--- a/4 - Kubernates. IL PASSAGGIO DA DOCKER COMPOSE ALL'ORCHESTRAZIONE ENTERPRISE.pptx
+++ b/4 - Kubernates. IL PASSAGGIO DA DOCKER COMPOSE ALL'ORCHESTRAZIONE ENTERPRISE.pptx
@@ -6678,12 +6678,15 @@
               </a:rPr>
               <a:t>backend-enterprise</a:t>
             </a:r>
-            <a:endParaRPr lang="it-IT" dirty="0">
-              <a:solidFill>
-                <a:srgbClr val="171FE2"/>
-              </a:solidFill>
-              <a:latin typeface="Consolas" panose="020B0609020204030204" pitchFamily="49" charset="0"/>
-            </a:endParaRPr>
+            <a:r>
+              <a:rPr lang="it-IT" dirty="0">
+                <a:solidFill>
+                  <a:srgbClr val="171FE2"/>
+                </a:solidFill>
+                <a:latin typeface="Consolas" panose="020B0609020204030204" pitchFamily="49" charset="0"/>
+              </a:rPr>
+              <a:t> # nome del Pod</a:t>
+            </a:r>
           </a:p>
           <a:p>
             <a:r>
@@ -7091,6 +7094,9 @@
             </a:r>
           </a:p>
           <a:p>
+            <a:endParaRPr lang="it-IT" dirty="0"/>
+          </a:p>
+          <a:p>
             <a:r>
               <a:rPr lang="it-IT" dirty="0"/>
               <a:t>Se modifichiamo il file YAML cambiando un parametro, eseguendo di nuovo </a:t>
@@ -7250,6 +7256,36 @@
           </a:p>
         </p:txBody>
       </p:sp>
+      <p:pic>
+        <p:nvPicPr>
+          <p:cNvPr id="5" name="Immagine 4">
+            <a:extLst>
+              <a:ext uri="{FF2B5EF4-FFF2-40B4-BE49-F238E27FC236}">
+                <a16:creationId xmlns:a16="http://schemas.microsoft.com/office/drawing/2014/main" id="{C32B7998-5E2C-4980-BB63-4A511D6EB3FB}"/>
+              </a:ext>
+            </a:extLst>
+          </p:cNvPr>
+          <p:cNvPicPr>
+            <a:picLocks noChangeAspect="1"/>
+          </p:cNvPicPr>
+          <p:nvPr/>
+        </p:nvPicPr>
+        <p:blipFill>
+          <a:blip r:embed="rId2"/>
+          <a:stretch>
+            <a:fillRect/>
+          </a:stretch>
+        </p:blipFill>
+        <p:spPr>
+          <a:xfrm>
+            <a:off x="3695365" y="4467424"/>
+            <a:ext cx="4801270" cy="390580"/>
+          </a:xfrm>
+          <a:prstGeom prst="rect">
+            <a:avLst/>
+          </a:prstGeom>
+        </p:spPr>
+      </p:pic>
     </p:spTree>
     <p:extLst>
       <p:ext uri="{BB962C8B-B14F-4D97-AF65-F5344CB8AC3E}">
@@ -10005,6 +10041,15 @@
 </file>
 
 <file path=customXml/item2.xml><?xml version="1.0" encoding="utf-8"?>
+<?mso-contentType ?>
+<FormTemplates xmlns="http://schemas.microsoft.com/sharepoint/v3/contenttype/forms">
+  <Display>DocumentLibraryForm</Display>
+  <Edit>DocumentLibraryForm</Edit>
+  <New>DocumentLibraryForm</New>
+</FormTemplates>
+</file>
+
+<file path=customXml/item3.xml><?xml version="1.0" encoding="utf-8"?>
 <p:properties xmlns:p="http://schemas.microsoft.com/office/2006/metadata/properties" xmlns:xsi="http://www.w3.org/2001/XMLSchema-instance" xmlns:pc="http://schemas.microsoft.com/office/infopath/2007/PartnerControls">
   <documentManagement>
     <TaxCatchAll xmlns="21b72fd8-e7d0-49ac-9795-d1b0bc6b7e1c" xsi:nil="true"/>
@@ -10014,15 +10059,6 @@
     <Argomento xmlns="8b3acf13-3a58-43b2-a29e-f23503de136d" xsi:nil="true"/>
   </documentManagement>
 </p:properties>
-</file>
-
-<file path=customXml/item3.xml><?xml version="1.0" encoding="utf-8"?>
-<?mso-contentType ?>
-<FormTemplates xmlns="http://schemas.microsoft.com/sharepoint/v3/contenttype/forms">
-  <Display>DocumentLibraryForm</Display>
-  <Edit>DocumentLibraryForm</Edit>
-  <New>DocumentLibraryForm</New>
-</FormTemplates>
 </file>
 
 <file path=customXml/itemProps1.xml><?xml version="1.0" encoding="utf-8"?>
@@ -10045,6 +10081,14 @@
 </file>
 
 <file path=customXml/itemProps2.xml><?xml version="1.0" encoding="utf-8"?>
+<ds:datastoreItem xmlns:ds="http://schemas.openxmlformats.org/officeDocument/2006/customXml" ds:itemID="{67C65656-B2D8-4C19-A873-091B25A5212E}">
+  <ds:schemaRefs>
+    <ds:schemaRef ds:uri="http://schemas.microsoft.com/sharepoint/v3/contenttype/forms"/>
+  </ds:schemaRefs>
+</ds:datastoreItem>
+</file>
+
+<file path=customXml/itemProps3.xml><?xml version="1.0" encoding="utf-8"?>
 <ds:datastoreItem xmlns:ds="http://schemas.openxmlformats.org/officeDocument/2006/customXml" ds:itemID="{6766878A-54ED-4867-B478-72A29DC19B89}">
   <ds:schemaRefs>
     <ds:schemaRef ds:uri="http://schemas.microsoft.com/office/2006/metadata/properties"/>
@@ -10053,12 +10097,4 @@
     <ds:schemaRef ds:uri="8b3acf13-3a58-43b2-a29e-f23503de136d"/>
   </ds:schemaRefs>
 </ds:datastoreItem>
-</file>
-
-<file path=customXml/itemProps3.xml><?xml version="1.0" encoding="utf-8"?>
-<ds:datastoreItem xmlns:ds="http://schemas.openxmlformats.org/officeDocument/2006/customXml" ds:itemID="{67C65656-B2D8-4C19-A873-091B25A5212E}">
-  <ds:schemaRefs>
-    <ds:schemaRef ds:uri="http://schemas.microsoft.com/sharepoint/v3/contenttype/forms"/>
-  </ds:schemaRefs>
-</ds:datastoreItem>
 </file>
--- a/4 - Kubernates. IL PASSAGGIO DA DOCKER COMPOSE ALL'ORCHESTRAZIONE ENTERPRISE.pptx
+++ b/4 - Kubernates. IL PASSAGGIO DA DOCKER COMPOSE ALL'ORCHESTRAZIONE ENTERPRISE.pptx
@@ -5,10 +5,10 @@
     <p:sldMasterId id="2147483672" r:id="rId4"/>
   </p:sldMasterIdLst>
   <p:notesMasterIdLst>
-    <p:notesMasterId r:id="rId28"/>
+    <p:notesMasterId r:id="rId30"/>
   </p:notesMasterIdLst>
   <p:handoutMasterIdLst>
-    <p:handoutMasterId r:id="rId29"/>
+    <p:handoutMasterId r:id="rId31"/>
   </p:handoutMasterIdLst>
   <p:sldIdLst>
     <p:sldId id="262" r:id="rId5"/>
@@ -33,7 +33,9 @@
     <p:sldId id="279" r:id="rId24"/>
     <p:sldId id="280" r:id="rId25"/>
     <p:sldId id="281" r:id="rId26"/>
-    <p:sldId id="261" r:id="rId27"/>
+    <p:sldId id="282" r:id="rId27"/>
+    <p:sldId id="283" r:id="rId28"/>
+    <p:sldId id="261" r:id="rId29"/>
   </p:sldIdLst>
   <p:sldSz cx="12192000" cy="6858000"/>
   <p:notesSz cx="6858000" cy="9144000"/>
@@ -7300,6 +7302,424 @@
 </file>
 
 <file path=ppt/slides/slide23.xml><?xml version="1.0" encoding="utf-8"?>
+<p:sld xmlns:a="http://schemas.openxmlformats.org/drawingml/2006/main" xmlns:r="http://schemas.openxmlformats.org/officeDocument/2006/relationships" xmlns:p="http://schemas.openxmlformats.org/presentationml/2006/main">
+  <p:cSld>
+    <p:spTree>
+      <p:nvGrpSpPr>
+        <p:cNvPr id="1" name="">
+          <a:extLst>
+            <a:ext uri="{FF2B5EF4-FFF2-40B4-BE49-F238E27FC236}">
+              <a16:creationId xmlns:a16="http://schemas.microsoft.com/office/drawing/2014/main" id="{F7584BBB-F9EC-324B-3BED-5D99FEA2AB77}"/>
+            </a:ext>
+          </a:extLst>
+        </p:cNvPr>
+        <p:cNvGrpSpPr/>
+        <p:nvPr/>
+      </p:nvGrpSpPr>
+      <p:grpSpPr>
+        <a:xfrm>
+          <a:off x="0" y="0"/>
+          <a:ext cx="0" cy="0"/>
+          <a:chOff x="0" y="0"/>
+          <a:chExt cx="0" cy="0"/>
+        </a:xfrm>
+      </p:grpSpPr>
+      <p:sp>
+        <p:nvSpPr>
+          <p:cNvPr id="2" name="Titolo della lezione">
+            <a:extLst>
+              <a:ext uri="{FF2B5EF4-FFF2-40B4-BE49-F238E27FC236}">
+                <a16:creationId xmlns:a16="http://schemas.microsoft.com/office/drawing/2014/main" id="{E44283CC-4F3D-BA0A-B123-B8EDB9C1806B}"/>
+              </a:ext>
+            </a:extLst>
+          </p:cNvPr>
+          <p:cNvSpPr>
+            <a:spLocks noGrp="1"/>
+          </p:cNvSpPr>
+          <p:nvPr>
+            <p:ph type="title"/>
+          </p:nvPr>
+        </p:nvSpPr>
+        <p:spPr>
+          <a:xfrm>
+            <a:off x="838200" y="831206"/>
+            <a:ext cx="10515600" cy="314198"/>
+          </a:xfrm>
+        </p:spPr>
+        <p:txBody>
+          <a:bodyPr/>
+          <a:lstStyle/>
+          <a:p>
+            <a:r>
+              <a:rPr lang="it-IT" dirty="0"/>
+              <a:t>SLIDE 21: LE ETICHETTE (LABELS) – IL SISTEMA DI ORGANIZZAZIONE ENTERPRISE</a:t>
+            </a:r>
+          </a:p>
+        </p:txBody>
+      </p:sp>
+      <p:sp>
+        <p:nvSpPr>
+          <p:cNvPr id="3" name="Contenuto della lezione">
+            <a:extLst>
+              <a:ext uri="{FF2B5EF4-FFF2-40B4-BE49-F238E27FC236}">
+                <a16:creationId xmlns:a16="http://schemas.microsoft.com/office/drawing/2014/main" id="{5A6F2147-CC53-D6A9-7FCF-20E97AB470C8}"/>
+              </a:ext>
+            </a:extLst>
+          </p:cNvPr>
+          <p:cNvSpPr>
+            <a:spLocks noGrp="1"/>
+          </p:cNvSpPr>
+          <p:nvPr>
+            <p:ph idx="1"/>
+          </p:nvPr>
+        </p:nvSpPr>
+        <p:spPr>
+          <a:xfrm>
+            <a:off x="1317319" y="1633943"/>
+            <a:ext cx="9557362" cy="4803369"/>
+          </a:xfrm>
+        </p:spPr>
+        <p:txBody>
+          <a:bodyPr/>
+          <a:lstStyle/>
+          <a:p>
+            <a:r>
+              <a:rPr lang="it-IT" dirty="0"/>
+              <a:t>Man mano che la nostra applicazione </a:t>
+            </a:r>
+            <a:r>
+              <a:rPr lang="it-IT" dirty="0" err="1"/>
+              <a:t>enterprise</a:t>
+            </a:r>
+            <a:r>
+              <a:rPr lang="it-IT" dirty="0"/>
+              <a:t> cresce, all'interno del cluster </a:t>
+            </a:r>
+            <a:r>
+              <a:rPr lang="it-IT" dirty="0" err="1"/>
+              <a:t>Kubernetes</a:t>
+            </a:r>
+            <a:r>
+              <a:rPr lang="it-IT" dirty="0"/>
+              <a:t> non avremo più un solo Pod isolato, ma potremmo trovarci a gestire centinaia o migliaia di Pod attivi contemporaneamente: copie del </a:t>
+            </a:r>
+            <a:r>
+              <a:rPr lang="it-IT" dirty="0" err="1"/>
+              <a:t>frontend</a:t>
+            </a:r>
+            <a:r>
+              <a:rPr lang="it-IT" dirty="0"/>
+              <a:t>, repliche del </a:t>
+            </a:r>
+            <a:r>
+              <a:rPr lang="it-IT" dirty="0" err="1"/>
+              <a:t>backend</a:t>
+            </a:r>
+            <a:r>
+              <a:rPr lang="it-IT" dirty="0"/>
+              <a:t> Spring Boot, database di produzione e database di test. </a:t>
+            </a:r>
+          </a:p>
+          <a:p>
+            <a:r>
+              <a:rPr lang="it-IT" dirty="0"/>
+              <a:t>Come fa </a:t>
+            </a:r>
+            <a:r>
+              <a:rPr lang="it-IT" dirty="0" err="1"/>
+              <a:t>Kubernetes</a:t>
+            </a:r>
+            <a:r>
+              <a:rPr lang="it-IT" dirty="0"/>
+              <a:t> a non fare confusione e a sapere quali Pod appartengono al </a:t>
+            </a:r>
+            <a:r>
+              <a:rPr lang="it-IT" dirty="0" err="1"/>
+              <a:t>backend</a:t>
+            </a:r>
+            <a:r>
+              <a:rPr lang="it-IT" dirty="0"/>
+              <a:t> e quali al </a:t>
+            </a:r>
+            <a:r>
+              <a:rPr lang="it-IT" dirty="0" err="1"/>
+              <a:t>frontend</a:t>
+            </a:r>
+            <a:r>
+              <a:rPr lang="it-IT" dirty="0"/>
+              <a:t>? </a:t>
+            </a:r>
+          </a:p>
+          <a:p>
+            <a:r>
+              <a:rPr lang="it-IT" dirty="0"/>
+              <a:t>La risposta sta in un </a:t>
+            </a:r>
+            <a:r>
+              <a:rPr lang="it-IT" b="1" dirty="0">
+                <a:solidFill>
+                  <a:srgbClr val="171FE2"/>
+                </a:solidFill>
+              </a:rPr>
+              <a:t>meccanismo di catalogazione </a:t>
+            </a:r>
+            <a:r>
+              <a:rPr lang="it-IT" dirty="0"/>
+              <a:t>di una semplicità disarmante ma di una potenza devastante: le </a:t>
+            </a:r>
+            <a:r>
+              <a:rPr lang="it-IT" b="1" dirty="0"/>
+              <a:t>Labels</a:t>
+            </a:r>
+            <a:r>
+              <a:rPr lang="it-IT" dirty="0"/>
+              <a:t> (Etichette) e i </a:t>
+            </a:r>
+            <a:r>
+              <a:rPr lang="it-IT" b="1" dirty="0" err="1"/>
+              <a:t>Selectors</a:t>
+            </a:r>
+            <a:r>
+              <a:rPr lang="it-IT" dirty="0"/>
+              <a:t> (Selettori).</a:t>
+            </a:r>
+            <a:endParaRPr lang="it-IT" dirty="0">
+              <a:solidFill>
+                <a:srgbClr val="171FE2"/>
+              </a:solidFill>
+              <a:latin typeface="Consolas" panose="020B0609020204030204" pitchFamily="49" charset="0"/>
+            </a:endParaRPr>
+          </a:p>
+        </p:txBody>
+      </p:sp>
+    </p:spTree>
+    <p:extLst>
+      <p:ext uri="{BB962C8B-B14F-4D97-AF65-F5344CB8AC3E}">
+        <p14:creationId xmlns:p14="http://schemas.microsoft.com/office/powerpoint/2010/main" val="2482989330"/>
+      </p:ext>
+    </p:extLst>
+  </p:cSld>
+  <p:clrMapOvr>
+    <a:masterClrMapping/>
+  </p:clrMapOvr>
+</p:sld>
+</file>
+
+<file path=ppt/slides/slide24.xml><?xml version="1.0" encoding="utf-8"?>
+<p:sld xmlns:a="http://schemas.openxmlformats.org/drawingml/2006/main" xmlns:r="http://schemas.openxmlformats.org/officeDocument/2006/relationships" xmlns:p="http://schemas.openxmlformats.org/presentationml/2006/main">
+  <p:cSld>
+    <p:spTree>
+      <p:nvGrpSpPr>
+        <p:cNvPr id="1" name="">
+          <a:extLst>
+            <a:ext uri="{FF2B5EF4-FFF2-40B4-BE49-F238E27FC236}">
+              <a16:creationId xmlns:a16="http://schemas.microsoft.com/office/drawing/2014/main" id="{AC13E2BD-A2B2-64FB-23FE-B638AF3D7B55}"/>
+            </a:ext>
+          </a:extLst>
+        </p:cNvPr>
+        <p:cNvGrpSpPr/>
+        <p:nvPr/>
+      </p:nvGrpSpPr>
+      <p:grpSpPr>
+        <a:xfrm>
+          <a:off x="0" y="0"/>
+          <a:ext cx="0" cy="0"/>
+          <a:chOff x="0" y="0"/>
+          <a:chExt cx="0" cy="0"/>
+        </a:xfrm>
+      </p:grpSpPr>
+      <p:sp>
+        <p:nvSpPr>
+          <p:cNvPr id="2" name="Titolo della lezione">
+            <a:extLst>
+              <a:ext uri="{FF2B5EF4-FFF2-40B4-BE49-F238E27FC236}">
+                <a16:creationId xmlns:a16="http://schemas.microsoft.com/office/drawing/2014/main" id="{6A167A5A-C1DA-BC2D-83ED-FCBB6A50536E}"/>
+              </a:ext>
+            </a:extLst>
+          </p:cNvPr>
+          <p:cNvSpPr>
+            <a:spLocks noGrp="1"/>
+          </p:cNvSpPr>
+          <p:nvPr>
+            <p:ph type="title"/>
+          </p:nvPr>
+        </p:nvSpPr>
+        <p:spPr>
+          <a:xfrm>
+            <a:off x="838200" y="831206"/>
+            <a:ext cx="10515600" cy="314198"/>
+          </a:xfrm>
+        </p:spPr>
+        <p:txBody>
+          <a:bodyPr/>
+          <a:lstStyle/>
+          <a:p>
+            <a:r>
+              <a:rPr lang="it-IT" dirty="0"/>
+              <a:t>SLIDE 22: LE ETICHETTE (LABELS) – IL SISTEMA DI ORGANIZZAZIONE ENTERPRISE</a:t>
+            </a:r>
+          </a:p>
+        </p:txBody>
+      </p:sp>
+      <p:sp>
+        <p:nvSpPr>
+          <p:cNvPr id="3" name="Contenuto della lezione">
+            <a:extLst>
+              <a:ext uri="{FF2B5EF4-FFF2-40B4-BE49-F238E27FC236}">
+                <a16:creationId xmlns:a16="http://schemas.microsoft.com/office/drawing/2014/main" id="{9F1C3028-832A-261D-7738-7114EDE86496}"/>
+              </a:ext>
+            </a:extLst>
+          </p:cNvPr>
+          <p:cNvSpPr>
+            <a:spLocks noGrp="1"/>
+          </p:cNvSpPr>
+          <p:nvPr>
+            <p:ph idx="1"/>
+          </p:nvPr>
+        </p:nvSpPr>
+        <p:spPr>
+          <a:xfrm>
+            <a:off x="1317319" y="1633943"/>
+            <a:ext cx="9557362" cy="4803369"/>
+          </a:xfrm>
+        </p:spPr>
+        <p:txBody>
+          <a:bodyPr/>
+          <a:lstStyle/>
+          <a:p>
+            <a:r>
+              <a:rPr lang="it-IT" dirty="0"/>
+              <a:t>Una </a:t>
+            </a:r>
+            <a:r>
+              <a:rPr lang="it-IT" b="1" dirty="0"/>
+              <a:t>Label</a:t>
+            </a:r>
+            <a:r>
+              <a:rPr lang="it-IT" dirty="0"/>
+              <a:t> non è altro che una </a:t>
+            </a:r>
+            <a:r>
+              <a:rPr lang="it-IT" b="1" dirty="0">
+                <a:solidFill>
+                  <a:srgbClr val="171FE2"/>
+                </a:solidFill>
+              </a:rPr>
+              <a:t>coppia chiave-valore </a:t>
+            </a:r>
+            <a:r>
+              <a:rPr lang="it-IT" dirty="0"/>
+              <a:t>(un'etichetta testuale personalizzata, come ad esempio app: </a:t>
+            </a:r>
+            <a:r>
+              <a:rPr lang="it-IT" dirty="0" err="1"/>
+              <a:t>backend</a:t>
+            </a:r>
+            <a:r>
+              <a:rPr lang="it-IT" dirty="0"/>
+              <a:t> o ambiente: produzione) che noi andiamo ad "incollare" all'interno della sezione metadata del nostro file YAML. </a:t>
+            </a:r>
+          </a:p>
+          <a:p>
+            <a:r>
+              <a:rPr lang="it-IT" dirty="0"/>
+              <a:t>I </a:t>
+            </a:r>
+            <a:r>
+              <a:rPr lang="it-IT" b="1" dirty="0" err="1"/>
+              <a:t>Selectors</a:t>
+            </a:r>
+            <a:r>
+              <a:rPr lang="it-IT" dirty="0"/>
+              <a:t> sono dei filtri di ricerca intelligenti. </a:t>
+            </a:r>
+          </a:p>
+          <a:p>
+            <a:r>
+              <a:rPr lang="it-IT" dirty="0"/>
+              <a:t>Quando un domani un componente di rete dovrà inviare il traffico al </a:t>
+            </a:r>
+            <a:r>
+              <a:rPr lang="it-IT" dirty="0" err="1"/>
+              <a:t>backend</a:t>
+            </a:r>
+            <a:r>
+              <a:rPr lang="it-IT" dirty="0"/>
+              <a:t>, non cercherà il nome del singolo Pod (che abbiamo visto essere mortale ed effimero), ma dirà a </a:t>
+            </a:r>
+            <a:r>
+              <a:rPr lang="it-IT" dirty="0" err="1"/>
+              <a:t>Kubernetes</a:t>
+            </a:r>
+            <a:r>
+              <a:rPr lang="it-IT" dirty="0"/>
+              <a:t>: </a:t>
+            </a:r>
+            <a:r>
+              <a:rPr lang="it-IT" i="1" dirty="0"/>
+              <a:t>"Prendi tutte le richieste e lanciale verso qualunque Pod nel cluster che abbia l'etichetta app: </a:t>
+            </a:r>
+            <a:r>
+              <a:rPr lang="it-IT" i="1" dirty="0" err="1"/>
+              <a:t>backend</a:t>
+            </a:r>
+            <a:r>
+              <a:rPr lang="it-IT" i="1"/>
+              <a:t>"</a:t>
+            </a:r>
+            <a:r>
+              <a:rPr lang="it-IT"/>
+              <a:t>. </a:t>
+            </a:r>
+          </a:p>
+          <a:p>
+            <a:r>
+              <a:rPr lang="it-IT"/>
+              <a:t>Questo </a:t>
+            </a:r>
+            <a:r>
+              <a:rPr lang="it-IT" dirty="0"/>
+              <a:t>sistema di accoppiamento debole (Loose </a:t>
+            </a:r>
+            <a:r>
+              <a:rPr lang="it-IT" dirty="0" err="1"/>
+              <a:t>Coupling</a:t>
+            </a:r>
+            <a:r>
+              <a:rPr lang="it-IT" dirty="0"/>
+              <a:t>) permette a </a:t>
+            </a:r>
+            <a:r>
+              <a:rPr lang="it-IT" dirty="0" err="1"/>
+              <a:t>Kubernetes</a:t>
+            </a:r>
+            <a:r>
+              <a:rPr lang="it-IT" dirty="0"/>
+              <a:t> di essere totalmente dinamico: possiamo aggiungere o distruggere Pod in qualsiasi momento; finché sul baccello c'è incollata l'etichetta corretta, il sistema lo troverà e lo includerà nelle operazioni di rete in tempo reale.</a:t>
+            </a:r>
+            <a:endParaRPr lang="it-IT" dirty="0">
+              <a:solidFill>
+                <a:srgbClr val="171FE2"/>
+              </a:solidFill>
+              <a:latin typeface="Consolas" panose="020B0609020204030204" pitchFamily="49" charset="0"/>
+            </a:endParaRPr>
+          </a:p>
+        </p:txBody>
+      </p:sp>
+    </p:spTree>
+    <p:extLst>
+      <p:ext uri="{BB962C8B-B14F-4D97-AF65-F5344CB8AC3E}">
+        <p14:creationId xmlns:p14="http://schemas.microsoft.com/office/powerpoint/2010/main" val="2888977719"/>
+      </p:ext>
+    </p:extLst>
+  </p:cSld>
+  <p:clrMapOvr>
+    <a:masterClrMapping/>
+  </p:clrMapOvr>
+</p:sld>
+</file>
+
+<file path=ppt/slides/slide25.xml><?xml version="1.0" encoding="utf-8"?>
 <p:sld xmlns:a="http://schemas.openxmlformats.org/drawingml/2006/main" xmlns:r="http://schemas.openxmlformats.org/officeDocument/2006/relationships" xmlns:p="http://schemas.openxmlformats.org/presentationml/2006/main">
   <p:cSld>
     <p:spTree>
@@ -9790,6 +10210,15 @@
 </file>
 
 <file path=customXml/item1.xml><?xml version="1.0" encoding="utf-8"?>
+<?mso-contentType ?>
+<FormTemplates xmlns="http://schemas.microsoft.com/sharepoint/v3/contenttype/forms">
+  <Display>DocumentLibraryForm</Display>
+  <Edit>DocumentLibraryForm</Edit>
+  <New>DocumentLibraryForm</New>
+</FormTemplates>
+</file>
+
+<file path=customXml/item2.xml><?xml version="1.0" encoding="utf-8"?>
 <ct:contentTypeSchema xmlns:ct="http://schemas.microsoft.com/office/2006/metadata/contentType" xmlns:ma="http://schemas.microsoft.com/office/2006/metadata/properties/metaAttributes" ct:_="" ma:_="" ma:contentTypeName="Document" ma:contentTypeID="0x010100D3455C6CD0B9BF4DB2CA3009677D9668" ma:contentTypeVersion="17" ma:contentTypeDescription="Create a new document." ma:contentTypeScope="" ma:versionID="6361f2605a906a42d9630ca59d277a8b">
   <xsd:schema xmlns:xsd="http://www.w3.org/2001/XMLSchema" xmlns:xs="http://www.w3.org/2001/XMLSchema" xmlns:p="http://schemas.microsoft.com/office/2006/metadata/properties" xmlns:ns2="8b3acf13-3a58-43b2-a29e-f23503de136d" xmlns:ns3="21b72fd8-e7d0-49ac-9795-d1b0bc6b7e1c" targetNamespace="http://schemas.microsoft.com/office/2006/metadata/properties" ma:root="true" ma:fieldsID="ae4eb9e2c998b5efed80ec6126f835fa" ns2:_="" ns3:_="">
     <xsd:import namespace="8b3acf13-3a58-43b2-a29e-f23503de136d"/>
@@ -10040,15 +10469,6 @@
 </ct:contentTypeSchema>
 </file>
 
-<file path=customXml/item2.xml><?xml version="1.0" encoding="utf-8"?>
-<?mso-contentType ?>
-<FormTemplates xmlns="http://schemas.microsoft.com/sharepoint/v3/contenttype/forms">
-  <Display>DocumentLibraryForm</Display>
-  <Edit>DocumentLibraryForm</Edit>
-  <New>DocumentLibraryForm</New>
-</FormTemplates>
-</file>
-
 <file path=customXml/item3.xml><?xml version="1.0" encoding="utf-8"?>
 <p:properties xmlns:p="http://schemas.microsoft.com/office/2006/metadata/properties" xmlns:xsi="http://www.w3.org/2001/XMLSchema-instance" xmlns:pc="http://schemas.microsoft.com/office/infopath/2007/PartnerControls">
   <documentManagement>
@@ -10062,6 +10482,14 @@
 </file>
 
 <file path=customXml/itemProps1.xml><?xml version="1.0" encoding="utf-8"?>
+<ds:datastoreItem xmlns:ds="http://schemas.openxmlformats.org/officeDocument/2006/customXml" ds:itemID="{67C65656-B2D8-4C19-A873-091B25A5212E}">
+  <ds:schemaRefs>
+    <ds:schemaRef ds:uri="http://schemas.microsoft.com/sharepoint/v3/contenttype/forms"/>
+  </ds:schemaRefs>
+</ds:datastoreItem>
+</file>
+
+<file path=customXml/itemProps2.xml><?xml version="1.0" encoding="utf-8"?>
 <ds:datastoreItem xmlns:ds="http://schemas.openxmlformats.org/officeDocument/2006/customXml" ds:itemID="{70468F63-B318-4D5F-A1DF-86BE98AC2293}">
   <ds:schemaRefs>
     <ds:schemaRef ds:uri="http://schemas.microsoft.com/office/2006/metadata/contentType"/>
@@ -10080,14 +10508,6 @@
 </ds:datastoreItem>
 </file>
 
-<file path=customXml/itemProps2.xml><?xml version="1.0" encoding="utf-8"?>
-<ds:datastoreItem xmlns:ds="http://schemas.openxmlformats.org/officeDocument/2006/customXml" ds:itemID="{67C65656-B2D8-4C19-A873-091B25A5212E}">
-  <ds:schemaRefs>
-    <ds:schemaRef ds:uri="http://schemas.microsoft.com/sharepoint/v3/contenttype/forms"/>
-  </ds:schemaRefs>
-</ds:datastoreItem>
-</file>
-
 <file path=customXml/itemProps3.xml><?xml version="1.0" encoding="utf-8"?>
 <ds:datastoreItem xmlns:ds="http://schemas.openxmlformats.org/officeDocument/2006/customXml" ds:itemID="{6766878A-54ED-4867-B478-72A29DC19B89}">
   <ds:schemaRefs>

--- a/4 - Kubernates. IL PASSAGGIO DA DOCKER COMPOSE ALL'ORCHESTRAZIONE ENTERPRISE.pptx
+++ b/4 - Kubernates. IL PASSAGGIO DA DOCKER COMPOSE ALL'ORCHESTRAZIONE ENTERPRISE.pptx
@@ -5,10 +5,10 @@
     <p:sldMasterId id="2147483672" r:id="rId4"/>
   </p:sldMasterIdLst>
   <p:notesMasterIdLst>
-    <p:notesMasterId r:id="rId30"/>
+    <p:notesMasterId r:id="rId39"/>
   </p:notesMasterIdLst>
   <p:handoutMasterIdLst>
-    <p:handoutMasterId r:id="rId31"/>
+    <p:handoutMasterId r:id="rId40"/>
   </p:handoutMasterIdLst>
   <p:sldIdLst>
     <p:sldId id="262" r:id="rId5"/>
@@ -35,7 +35,16 @@
     <p:sldId id="281" r:id="rId26"/>
     <p:sldId id="282" r:id="rId27"/>
     <p:sldId id="283" r:id="rId28"/>
-    <p:sldId id="261" r:id="rId29"/>
+    <p:sldId id="284" r:id="rId29"/>
+    <p:sldId id="285" r:id="rId30"/>
+    <p:sldId id="286" r:id="rId31"/>
+    <p:sldId id="287" r:id="rId32"/>
+    <p:sldId id="288" r:id="rId33"/>
+    <p:sldId id="289" r:id="rId34"/>
+    <p:sldId id="290" r:id="rId35"/>
+    <p:sldId id="291" r:id="rId36"/>
+    <p:sldId id="292" r:id="rId37"/>
+    <p:sldId id="261" r:id="rId38"/>
   </p:sldIdLst>
   <p:sldSz cx="12192000" cy="6858000"/>
   <p:notesSz cx="6858000" cy="9144000"/>
@@ -933,13 +942,13 @@
           <p:nvPr userDrawn="1"/>
         </p:nvPicPr>
         <p:blipFill>
-          <a:blip>
+          <a:blip r:embed="rId3">
             <a:extLst>
               <a:ext uri="{28A0092B-C50C-407E-A947-70E740481C1C}">
                 <a14:useLocalDpi xmlns:a14="http://schemas.microsoft.com/office/drawing/2010/main" val="0"/>
               </a:ext>
               <a:ext uri="{96DAC541-7B7A-43D3-8B79-37D633B846F1}">
-                <asvg:svgBlip xmlns:asvg="http://schemas.microsoft.com/office/drawing/2016/SVG/main" r:embed="rId3"/>
+                <asvg:svgBlip xmlns:asvg="http://schemas.microsoft.com/office/drawing/2016/SVG/main" r:embed="rId4"/>
               </a:ext>
             </a:extLst>
           </a:blip>
@@ -1410,14 +1419,14 @@
           <p:nvPr userDrawn="1"/>
         </p:nvPicPr>
         <p:blipFill>
-          <a:blip>
+          <a:blip r:embed="rId4">
             <a:lum bright="100000"/>
             <a:extLst>
               <a:ext uri="{28A0092B-C50C-407E-A947-70E740481C1C}">
                 <a14:useLocalDpi xmlns:a14="http://schemas.microsoft.com/office/drawing/2010/main" val="0"/>
               </a:ext>
               <a:ext uri="{96DAC541-7B7A-43D3-8B79-37D633B846F1}">
-                <asvg:svgBlip xmlns:asvg="http://schemas.microsoft.com/office/drawing/2016/SVG/main" r:embed="rId4"/>
+                <asvg:svgBlip xmlns:asvg="http://schemas.microsoft.com/office/drawing/2016/SVG/main" r:embed="rId5"/>
               </a:ext>
             </a:extLst>
           </a:blip>
@@ -1494,7 +1503,7 @@
           <p:nvPr userDrawn="1"/>
         </p:nvPicPr>
         <p:blipFill rotWithShape="1">
-          <a:blip r:embed="rId5" cstate="print"/>
+          <a:blip r:embed="rId6" cstate="print"/>
           <a:srcRect l="1386" t="187" r="342" b="95555"/>
           <a:stretch/>
         </p:blipFill>
@@ -1791,13 +1800,13 @@
           <p:nvPr userDrawn="1"/>
         </p:nvPicPr>
         <p:blipFill>
-          <a:blip>
+          <a:blip r:embed="rId2">
             <a:extLst>
               <a:ext uri="{28A0092B-C50C-407E-A947-70E740481C1C}">
                 <a14:useLocalDpi xmlns:a14="http://schemas.microsoft.com/office/drawing/2010/main" val="0"/>
               </a:ext>
               <a:ext uri="{96DAC541-7B7A-43D3-8B79-37D633B846F1}">
-                <asvg:svgBlip xmlns:asvg="http://schemas.microsoft.com/office/drawing/2016/SVG/main" r:embed="rId2"/>
+                <asvg:svgBlip xmlns:asvg="http://schemas.microsoft.com/office/drawing/2016/SVG/main" r:embed="rId3"/>
               </a:ext>
             </a:extLst>
           </a:blip>
@@ -2157,13 +2166,13 @@
           <p:nvPr userDrawn="1"/>
         </p:nvPicPr>
         <p:blipFill>
-          <a:blip>
+          <a:blip r:embed="rId2">
             <a:extLst>
               <a:ext uri="{28A0092B-C50C-407E-A947-70E740481C1C}">
                 <a14:useLocalDpi xmlns:a14="http://schemas.microsoft.com/office/drawing/2010/main" val="0"/>
               </a:ext>
               <a:ext uri="{96DAC541-7B7A-43D3-8B79-37D633B846F1}">
-                <asvg:svgBlip xmlns:asvg="http://schemas.microsoft.com/office/drawing/2016/SVG/main" r:embed="rId2"/>
+                <asvg:svgBlip xmlns:asvg="http://schemas.microsoft.com/office/drawing/2016/SVG/main" r:embed="rId3"/>
               </a:ext>
             </a:extLst>
           </a:blip>
@@ -2463,13 +2472,13 @@
           <p:nvPr userDrawn="1"/>
         </p:nvPicPr>
         <p:blipFill>
-          <a:blip>
+          <a:blip r:embed="rId3">
             <a:extLst>
               <a:ext uri="{28A0092B-C50C-407E-A947-70E740481C1C}">
                 <a14:useLocalDpi xmlns:a14="http://schemas.microsoft.com/office/drawing/2010/main" val="0"/>
               </a:ext>
               <a:ext uri="{96DAC541-7B7A-43D3-8B79-37D633B846F1}">
-                <asvg:svgBlip xmlns:asvg="http://schemas.microsoft.com/office/drawing/2016/SVG/main" r:embed="rId3"/>
+                <asvg:svgBlip xmlns:asvg="http://schemas.microsoft.com/office/drawing/2016/SVG/main" r:embed="rId4"/>
               </a:ext>
             </a:extLst>
           </a:blip>
@@ -2814,13 +2823,13 @@
           <p:nvPr userDrawn="1"/>
         </p:nvPicPr>
         <p:blipFill>
-          <a:blip>
+          <a:blip r:embed="rId3">
             <a:extLst>
               <a:ext uri="{28A0092B-C50C-407E-A947-70E740481C1C}">
                 <a14:useLocalDpi xmlns:a14="http://schemas.microsoft.com/office/drawing/2010/main" val="0"/>
               </a:ext>
               <a:ext uri="{96DAC541-7B7A-43D3-8B79-37D633B846F1}">
-                <asvg:svgBlip xmlns:asvg="http://schemas.microsoft.com/office/drawing/2016/SVG/main" r:embed="rId3"/>
+                <asvg:svgBlip xmlns:asvg="http://schemas.microsoft.com/office/drawing/2016/SVG/main" r:embed="rId4"/>
               </a:ext>
             </a:extLst>
           </a:blip>
@@ -3087,13 +3096,13 @@
           <p:nvPr userDrawn="1"/>
         </p:nvPicPr>
         <p:blipFill>
-          <a:blip>
+          <a:blip r:embed="rId9">
             <a:extLst>
               <a:ext uri="{28A0092B-C50C-407E-A947-70E740481C1C}">
                 <a14:useLocalDpi xmlns:a14="http://schemas.microsoft.com/office/drawing/2010/main" val="0"/>
               </a:ext>
               <a:ext uri="{96DAC541-7B7A-43D3-8B79-37D633B846F1}">
-                <asvg:svgBlip xmlns:asvg="http://schemas.microsoft.com/office/drawing/2016/SVG/main" r:embed="rId9"/>
+                <asvg:svgBlip xmlns:asvg="http://schemas.microsoft.com/office/drawing/2016/SVG/main" r:embed="rId10"/>
               </a:ext>
             </a:extLst>
           </a:blip>
@@ -7401,7 +7410,19 @@
             </a:r>
             <a:r>
               <a:rPr lang="it-IT" dirty="0"/>
-              <a:t> non avremo più un solo Pod isolato, ma potremmo trovarci a gestire centinaia o migliaia di Pod attivi contemporaneamente: copie del </a:t>
+              <a:t> non avremo più un solo Pod isolato, ma potremmo trovarci a gestire centinaia o migliaia di Pod attivi contemporaneamente: </a:t>
+            </a:r>
+            <a:r>
+              <a:rPr lang="it-IT" dirty="0">
+                <a:solidFill>
+                  <a:srgbClr val="171FE2"/>
+                </a:solidFill>
+              </a:rPr>
+              <a:t>copie</a:t>
+            </a:r>
+            <a:r>
+              <a:rPr lang="it-IT" dirty="0"/>
+              <a:t> del </a:t>
             </a:r>
             <a:r>
               <a:rPr lang="it-IT" dirty="0" err="1"/>
@@ -7409,7 +7430,19 @@
             </a:r>
             <a:r>
               <a:rPr lang="it-IT" dirty="0"/>
-              <a:t>, repliche del </a:t>
+              <a:t>, </a:t>
+            </a:r>
+            <a:r>
+              <a:rPr lang="it-IT" dirty="0">
+                <a:solidFill>
+                  <a:srgbClr val="171FE2"/>
+                </a:solidFill>
+              </a:rPr>
+              <a:t>repliche</a:t>
+            </a:r>
+            <a:r>
+              <a:rPr lang="it-IT" dirty="0"/>
+              <a:t> del </a:t>
             </a:r>
             <a:r>
               <a:rPr lang="it-IT" dirty="0" err="1"/>
@@ -7422,6 +7455,16 @@
           </a:p>
           <a:p>
             <a:r>
+              <a:rPr lang="it-IT" dirty="0">
+                <a:solidFill>
+                  <a:srgbClr val="171FE2"/>
+                </a:solidFill>
+              </a:rPr>
+              <a:t>Le copie sono necessarie per distribuire il traffico che altrimenti farebbe collassare il singolo container.</a:t>
+            </a:r>
+          </a:p>
+          <a:p>
+            <a:r>
               <a:rPr lang="it-IT" dirty="0"/>
               <a:t>Come fa </a:t>
             </a:r>
@@ -7461,11 +7504,11 @@
                   <a:srgbClr val="171FE2"/>
                 </a:solidFill>
               </a:rPr>
-              <a:t>meccanismo di catalogazione </a:t>
-            </a:r>
-            <a:r>
-              <a:rPr lang="it-IT" dirty="0"/>
-              <a:t>di una semplicità disarmante ma di una potenza devastante: le </a:t>
+              <a:t>meccanismo di catalogazione</a:t>
+            </a:r>
+            <a:r>
+              <a:rPr lang="it-IT" dirty="0"/>
+              <a:t>: le </a:t>
             </a:r>
             <a:r>
               <a:rPr lang="it-IT" b="1" dirty="0"/>
@@ -7579,7 +7622,7 @@
         </p:nvSpPr>
         <p:spPr>
           <a:xfrm>
-            <a:off x="1317319" y="1633943"/>
+            <a:off x="1317319" y="1643087"/>
             <a:ext cx="9557362" cy="4803369"/>
           </a:xfrm>
         </p:spPr>
@@ -7622,87 +7665,233 @@
           </a:p>
           <a:p>
             <a:r>
-              <a:rPr lang="it-IT" dirty="0"/>
-              <a:t>I </a:t>
-            </a:r>
-            <a:r>
-              <a:rPr lang="it-IT" b="1" dirty="0" err="1"/>
-              <a:t>Selectors</a:t>
-            </a:r>
-            <a:r>
-              <a:rPr lang="it-IT" dirty="0"/>
-              <a:t> sono dei filtri di ricerca intelligenti. </a:t>
-            </a:r>
-          </a:p>
-          <a:p>
-            <a:r>
-              <a:rPr lang="it-IT" dirty="0"/>
-              <a:t>Quando un domani un componente di rete dovrà inviare il traffico al </a:t>
-            </a:r>
-            <a:r>
-              <a:rPr lang="it-IT" dirty="0" err="1"/>
+              <a:rPr lang="en-US" sz="1600" dirty="0" err="1">
+                <a:solidFill>
+                  <a:srgbClr val="171FE2"/>
+                </a:solidFill>
+                <a:latin typeface="Consolas" panose="020B0609020204030204" pitchFamily="49" charset="0"/>
+              </a:rPr>
+              <a:t>apiVersion</a:t>
+            </a:r>
+            <a:r>
+              <a:rPr lang="en-US" sz="1600" dirty="0">
+                <a:solidFill>
+                  <a:srgbClr val="171FE2"/>
+                </a:solidFill>
+                <a:latin typeface="Consolas" panose="020B0609020204030204" pitchFamily="49" charset="0"/>
+              </a:rPr>
+              <a:t>: v1</a:t>
+            </a:r>
+          </a:p>
+          <a:p>
+            <a:r>
+              <a:rPr lang="en-US" sz="1600" dirty="0">
+                <a:solidFill>
+                  <a:srgbClr val="171FE2"/>
+                </a:solidFill>
+                <a:latin typeface="Consolas" panose="020B0609020204030204" pitchFamily="49" charset="0"/>
+              </a:rPr>
+              <a:t>kind: Pod</a:t>
+            </a:r>
+          </a:p>
+          <a:p>
+            <a:r>
+              <a:rPr lang="en-US" sz="1600" dirty="0">
+                <a:solidFill>
+                  <a:srgbClr val="171FE2"/>
+                </a:solidFill>
+                <a:latin typeface="Consolas" panose="020B0609020204030204" pitchFamily="49" charset="0"/>
+              </a:rPr>
+              <a:t>metadata:</a:t>
+            </a:r>
+          </a:p>
+          <a:p>
+            <a:r>
+              <a:rPr lang="en-US" sz="1600" dirty="0">
+                <a:solidFill>
+                  <a:srgbClr val="171FE2"/>
+                </a:solidFill>
+                <a:latin typeface="Consolas" panose="020B0609020204030204" pitchFamily="49" charset="0"/>
+              </a:rPr>
+              <a:t>  name: backend-pod-1</a:t>
+            </a:r>
+          </a:p>
+          <a:p>
+            <a:r>
+              <a:rPr lang="en-US" sz="1600" dirty="0">
+                <a:solidFill>
+                  <a:srgbClr val="171FE2"/>
+                </a:solidFill>
+                <a:latin typeface="Consolas" panose="020B0609020204030204" pitchFamily="49" charset="0"/>
+              </a:rPr>
+              <a:t>  labels:</a:t>
+            </a:r>
+          </a:p>
+          <a:p>
+            <a:r>
+              <a:rPr lang="en-US" sz="1600" dirty="0">
+                <a:solidFill>
+                  <a:srgbClr val="171FE2"/>
+                </a:solidFill>
+                <a:latin typeface="Consolas" panose="020B0609020204030204" pitchFamily="49" charset="0"/>
+              </a:rPr>
+              <a:t>    </a:t>
+            </a:r>
+            <a:r>
+              <a:rPr lang="en-US" sz="1600" dirty="0">
+                <a:solidFill>
+                  <a:srgbClr val="FF0000"/>
+                </a:solidFill>
+                <a:latin typeface="Consolas" panose="020B0609020204030204" pitchFamily="49" charset="0"/>
+              </a:rPr>
+              <a:t>app: backend      #stiamo </a:t>
+            </a:r>
+            <a:r>
+              <a:rPr lang="en-US" sz="1600" dirty="0" err="1">
+                <a:solidFill>
+                  <a:srgbClr val="FF0000"/>
+                </a:solidFill>
+                <a:latin typeface="Consolas" panose="020B0609020204030204" pitchFamily="49" charset="0"/>
+              </a:rPr>
+              <a:t>dicendo</a:t>
+            </a:r>
+            <a:r>
+              <a:rPr lang="en-US" sz="1600" dirty="0">
+                <a:solidFill>
+                  <a:srgbClr val="FF0000"/>
+                </a:solidFill>
+                <a:latin typeface="Consolas" panose="020B0609020204030204" pitchFamily="49" charset="0"/>
+              </a:rPr>
+              <a:t>:</a:t>
+            </a:r>
+            <a:r>
+              <a:rPr lang="it-IT" sz="1600" dirty="0">
+                <a:solidFill>
+                  <a:srgbClr val="FF0000"/>
+                </a:solidFill>
+                <a:latin typeface="Consolas" panose="020B0609020204030204" pitchFamily="49" charset="0"/>
+              </a:rPr>
+              <a:t>questo </a:t>
+            </a:r>
+            <a:r>
+              <a:rPr lang="it-IT" sz="1600" dirty="0" err="1">
+                <a:solidFill>
+                  <a:srgbClr val="FF0000"/>
+                </a:solidFill>
+                <a:latin typeface="Consolas" panose="020B0609020204030204" pitchFamily="49" charset="0"/>
+              </a:rPr>
+              <a:t>Pod</a:t>
+            </a:r>
+            <a:r>
+              <a:rPr lang="it-IT" sz="1600" dirty="0">
+                <a:solidFill>
+                  <a:srgbClr val="FF0000"/>
+                </a:solidFill>
+                <a:latin typeface="Consolas" panose="020B0609020204030204" pitchFamily="49" charset="0"/>
+              </a:rPr>
+              <a:t> appartiene al </a:t>
+            </a:r>
+            <a:r>
+              <a:rPr lang="it-IT" sz="1600" dirty="0" err="1">
+                <a:solidFill>
+                  <a:srgbClr val="FF0000"/>
+                </a:solidFill>
+                <a:latin typeface="Consolas" panose="020B0609020204030204" pitchFamily="49" charset="0"/>
+              </a:rPr>
               <a:t>backend</a:t>
             </a:r>
             <a:r>
-              <a:rPr lang="it-IT" dirty="0"/>
-              <a:t>, non cercherà il nome del singolo Pod (che abbiamo visto essere mortale ed effimero), ma dirà a </a:t>
-            </a:r>
-            <a:r>
-              <a:rPr lang="it-IT" dirty="0" err="1"/>
-              <a:t>Kubernetes</a:t>
-            </a:r>
-            <a:r>
-              <a:rPr lang="it-IT" dirty="0"/>
-              <a:t>: </a:t>
-            </a:r>
-            <a:r>
-              <a:rPr lang="it-IT" i="1" dirty="0"/>
-              <a:t>"Prendi tutte le richieste e lanciale verso qualunque Pod nel cluster che abbia l'etichetta app: </a:t>
-            </a:r>
-            <a:r>
-              <a:rPr lang="it-IT" i="1" dirty="0" err="1"/>
-              <a:t>backend</a:t>
-            </a:r>
-            <a:r>
-              <a:rPr lang="it-IT" i="1"/>
-              <a:t>"</a:t>
-            </a:r>
-            <a:r>
-              <a:rPr lang="it-IT"/>
-              <a:t>. </a:t>
-            </a:r>
-          </a:p>
-          <a:p>
-            <a:r>
-              <a:rPr lang="it-IT"/>
-              <a:t>Questo </a:t>
-            </a:r>
-            <a:r>
-              <a:rPr lang="it-IT" dirty="0"/>
-              <a:t>sistema di accoppiamento debole (Loose </a:t>
-            </a:r>
-            <a:r>
-              <a:rPr lang="it-IT" dirty="0" err="1"/>
-              <a:t>Coupling</a:t>
-            </a:r>
-            <a:r>
-              <a:rPr lang="it-IT" dirty="0"/>
-              <a:t>) permette a </a:t>
-            </a:r>
-            <a:r>
-              <a:rPr lang="it-IT" dirty="0" err="1"/>
-              <a:t>Kubernetes</a:t>
-            </a:r>
-            <a:r>
-              <a:rPr lang="it-IT" dirty="0"/>
-              <a:t> di essere totalmente dinamico: possiamo aggiungere o distruggere Pod in qualsiasi momento; finché sul baccello c'è incollata l'etichetta corretta, il sistema lo troverà e lo includerà nelle operazioni di rete in tempo reale.</a:t>
-            </a:r>
-            <a:endParaRPr lang="it-IT" dirty="0">
+              <a:rPr lang="it-IT" sz="1600" dirty="0">
+                <a:solidFill>
+                  <a:srgbClr val="FF0000"/>
+                </a:solidFill>
+                <a:latin typeface="Consolas" panose="020B0609020204030204" pitchFamily="49" charset="0"/>
+              </a:rPr>
+              <a:t> </a:t>
+            </a:r>
+            <a:endParaRPr lang="en-US" sz="1600" dirty="0">
+              <a:solidFill>
+                <a:srgbClr val="FF0000"/>
+              </a:solidFill>
+              <a:latin typeface="Consolas" panose="020B0609020204030204" pitchFamily="49" charset="0"/>
+            </a:endParaRPr>
+          </a:p>
+          <a:p>
+            <a:r>
+              <a:rPr lang="en-US" sz="1600" dirty="0">
+                <a:solidFill>
+                  <a:srgbClr val="171FE2"/>
+                </a:solidFill>
+                <a:latin typeface="Consolas" panose="020B0609020204030204" pitchFamily="49" charset="0"/>
+              </a:rPr>
+              <a:t>    environment: production</a:t>
+            </a:r>
+            <a:endParaRPr lang="it-IT" sz="1600" dirty="0">
               <a:solidFill>
                 <a:srgbClr val="171FE2"/>
               </a:solidFill>
               <a:latin typeface="Consolas" panose="020B0609020204030204" pitchFamily="49" charset="0"/>
             </a:endParaRPr>
+          </a:p>
+          <a:p>
+            <a:r>
+              <a:rPr lang="it-IT" dirty="0"/>
+              <a:t>I </a:t>
+            </a:r>
+            <a:r>
+              <a:rPr lang="it-IT" b="1" dirty="0" err="1"/>
+              <a:t>Selectors</a:t>
+            </a:r>
+            <a:r>
+              <a:rPr lang="it-IT" dirty="0"/>
+              <a:t> sono dei filtri di ricerca intelligenti. </a:t>
+            </a:r>
+          </a:p>
+          <a:p>
+            <a:r>
+              <a:rPr lang="it-IT" dirty="0"/>
+              <a:t>Quando un domani un componente di rete dovrà inviare il traffico al </a:t>
+            </a:r>
+            <a:r>
+              <a:rPr lang="it-IT" dirty="0" err="1"/>
+              <a:t>backend</a:t>
+            </a:r>
+            <a:r>
+              <a:rPr lang="it-IT" dirty="0"/>
+              <a:t>, non cercherà il nome del singolo </a:t>
+            </a:r>
+            <a:r>
+              <a:rPr lang="it-IT" dirty="0" err="1"/>
+              <a:t>Pod</a:t>
+            </a:r>
+            <a:r>
+              <a:rPr lang="it-IT" dirty="0"/>
+              <a:t> (mortale ed effimero), ma dirà a </a:t>
+            </a:r>
+            <a:r>
+              <a:rPr lang="it-IT" dirty="0" err="1"/>
+              <a:t>Kubernetes</a:t>
+            </a:r>
+            <a:r>
+              <a:rPr lang="it-IT" dirty="0"/>
+              <a:t>: </a:t>
+            </a:r>
+            <a:r>
+              <a:rPr lang="it-IT" i="1" dirty="0"/>
+              <a:t>"Prendi tutte le richieste e lanciale verso qualunque Pod nel cluster che abbia l'etichetta app: </a:t>
+            </a:r>
+            <a:r>
+              <a:rPr lang="it-IT" i="1" dirty="0" err="1"/>
+              <a:t>backend</a:t>
+            </a:r>
+            <a:r>
+              <a:rPr lang="it-IT" i="1" dirty="0"/>
+              <a:t>"</a:t>
+            </a:r>
+            <a:r>
+              <a:rPr lang="it-IT" dirty="0"/>
+              <a:t>. </a:t>
+            </a:r>
           </a:p>
         </p:txBody>
       </p:sp>
@@ -7724,7 +7913,13 @@
   <p:cSld>
     <p:spTree>
       <p:nvGrpSpPr>
-        <p:cNvPr id="1" name=""/>
+        <p:cNvPr id="1" name="">
+          <a:extLst>
+            <a:ext uri="{FF2B5EF4-FFF2-40B4-BE49-F238E27FC236}">
+              <a16:creationId xmlns:a16="http://schemas.microsoft.com/office/drawing/2014/main" id="{D73BD51A-029C-6CB4-AB9F-881304C02D73}"/>
+            </a:ext>
+          </a:extLst>
+        </p:cNvPr>
         <p:cNvGrpSpPr/>
         <p:nvPr/>
       </p:nvGrpSpPr>
@@ -7738,10 +7933,10 @@
       </p:grpSpPr>
       <p:sp>
         <p:nvSpPr>
-          <p:cNvPr id="2" name="Titolo 1">
+          <p:cNvPr id="2" name="Titolo della lezione">
             <a:extLst>
               <a:ext uri="{FF2B5EF4-FFF2-40B4-BE49-F238E27FC236}">
-                <a16:creationId xmlns:a16="http://schemas.microsoft.com/office/drawing/2014/main" id="{B5E02355-4941-9C10-CA1D-649F04DB5143}"/>
+                <a16:creationId xmlns:a16="http://schemas.microsoft.com/office/drawing/2014/main" id="{771930EA-90C1-AC5F-0255-2B1CCE3C033F}"/>
               </a:ext>
             </a:extLst>
           </p:cNvPr>
@@ -7752,24 +7947,1763 @@
             <p:ph type="title"/>
           </p:nvPr>
         </p:nvSpPr>
-        <p:spPr/>
+        <p:spPr>
+          <a:xfrm>
+            <a:off x="838200" y="831206"/>
+            <a:ext cx="10515600" cy="314198"/>
+          </a:xfrm>
+        </p:spPr>
         <p:txBody>
           <a:bodyPr/>
           <a:lstStyle/>
           <a:p>
             <a:r>
-              <a:rPr lang="it-IT" spc="0" dirty="0">
-                <a:latin typeface="Neue Haas Grotesk Text Pro" panose="020B0504020202020204" pitchFamily="34" charset="0"/>
-              </a:rPr>
-              <a:t>GRAZIE PER L’ATTENZIONE</a:t>
-            </a:r>
+              <a:rPr lang="it-IT" dirty="0"/>
+              <a:t>SLIDE 23: LE ETICHETTE (LABELS) – IL SISTEMA DI ORGANIZZAZIONE ENTERPRISE</a:t>
+            </a:r>
+          </a:p>
+        </p:txBody>
+      </p:sp>
+      <p:sp>
+        <p:nvSpPr>
+          <p:cNvPr id="3" name="Contenuto della lezione">
+            <a:extLst>
+              <a:ext uri="{FF2B5EF4-FFF2-40B4-BE49-F238E27FC236}">
+                <a16:creationId xmlns:a16="http://schemas.microsoft.com/office/drawing/2014/main" id="{0CECA509-6227-36A6-B263-3AE377255548}"/>
+              </a:ext>
+            </a:extLst>
+          </p:cNvPr>
+          <p:cNvSpPr>
+            <a:spLocks noGrp="1"/>
+          </p:cNvSpPr>
+          <p:nvPr>
+            <p:ph idx="1"/>
+          </p:nvPr>
+        </p:nvSpPr>
+        <p:spPr>
+          <a:xfrm>
+            <a:off x="1317319" y="1643087"/>
+            <a:ext cx="3346121" cy="4803369"/>
+          </a:xfrm>
+        </p:spPr>
+        <p:txBody>
+          <a:bodyPr/>
+          <a:lstStyle/>
+          <a:p>
+            <a:r>
+              <a:rPr lang="it-IT" sz="1600" dirty="0"/>
+              <a:t>Supponiamo di avere tre </a:t>
+            </a:r>
+            <a:r>
+              <a:rPr lang="it-IT" sz="1600" dirty="0" err="1"/>
+              <a:t>Pod</a:t>
+            </a:r>
+            <a:r>
+              <a:rPr lang="it-IT" sz="1600" dirty="0"/>
+              <a:t>:</a:t>
+            </a:r>
+          </a:p>
+          <a:p>
+            <a:r>
+              <a:rPr lang="en-US" sz="1600" dirty="0">
+                <a:solidFill>
+                  <a:srgbClr val="171FE2"/>
+                </a:solidFill>
+                <a:latin typeface="Consolas" panose="020B0609020204030204" pitchFamily="49" charset="0"/>
+              </a:rPr>
+              <a:t>Pod A</a:t>
+            </a:r>
+          </a:p>
+          <a:p>
+            <a:r>
+              <a:rPr lang="en-US" sz="1600" dirty="0">
+                <a:solidFill>
+                  <a:srgbClr val="171FE2"/>
+                </a:solidFill>
+                <a:latin typeface="Consolas" panose="020B0609020204030204" pitchFamily="49" charset="0"/>
+              </a:rPr>
+              <a:t>labels:</a:t>
+            </a:r>
+          </a:p>
+          <a:p>
+            <a:r>
+              <a:rPr lang="en-US" sz="1600" dirty="0">
+                <a:solidFill>
+                  <a:srgbClr val="171FE2"/>
+                </a:solidFill>
+                <a:latin typeface="Consolas" panose="020B0609020204030204" pitchFamily="49" charset="0"/>
+              </a:rPr>
+              <a:t>  app: backend</a:t>
+            </a:r>
+          </a:p>
+          <a:p>
+            <a:endParaRPr lang="en-US" sz="1600" dirty="0">
+              <a:solidFill>
+                <a:srgbClr val="171FE2"/>
+              </a:solidFill>
+              <a:latin typeface="Consolas" panose="020B0609020204030204" pitchFamily="49" charset="0"/>
+            </a:endParaRPr>
+          </a:p>
+          <a:p>
+            <a:r>
+              <a:rPr lang="en-US" sz="1600" dirty="0">
+                <a:solidFill>
+                  <a:srgbClr val="171FE2"/>
+                </a:solidFill>
+                <a:latin typeface="Consolas" panose="020B0609020204030204" pitchFamily="49" charset="0"/>
+              </a:rPr>
+              <a:t>Pod B</a:t>
+            </a:r>
+          </a:p>
+          <a:p>
+            <a:r>
+              <a:rPr lang="en-US" sz="1600" dirty="0">
+                <a:solidFill>
+                  <a:srgbClr val="171FE2"/>
+                </a:solidFill>
+                <a:latin typeface="Consolas" panose="020B0609020204030204" pitchFamily="49" charset="0"/>
+              </a:rPr>
+              <a:t>labels:</a:t>
+            </a:r>
+          </a:p>
+          <a:p>
+            <a:r>
+              <a:rPr lang="en-US" sz="1600" dirty="0">
+                <a:solidFill>
+                  <a:srgbClr val="171FE2"/>
+                </a:solidFill>
+                <a:latin typeface="Consolas" panose="020B0609020204030204" pitchFamily="49" charset="0"/>
+              </a:rPr>
+              <a:t>  app: backend</a:t>
+            </a:r>
+          </a:p>
+          <a:p>
+            <a:endParaRPr lang="en-US" sz="1600" dirty="0">
+              <a:solidFill>
+                <a:srgbClr val="171FE2"/>
+              </a:solidFill>
+              <a:latin typeface="Consolas" panose="020B0609020204030204" pitchFamily="49" charset="0"/>
+            </a:endParaRPr>
+          </a:p>
+          <a:p>
+            <a:r>
+              <a:rPr lang="en-US" sz="1600" dirty="0">
+                <a:solidFill>
+                  <a:srgbClr val="171FE2"/>
+                </a:solidFill>
+                <a:latin typeface="Consolas" panose="020B0609020204030204" pitchFamily="49" charset="0"/>
+              </a:rPr>
+              <a:t>Pod C</a:t>
+            </a:r>
+          </a:p>
+          <a:p>
+            <a:r>
+              <a:rPr lang="en-US" sz="1600" dirty="0">
+                <a:solidFill>
+                  <a:srgbClr val="171FE2"/>
+                </a:solidFill>
+                <a:latin typeface="Consolas" panose="020B0609020204030204" pitchFamily="49" charset="0"/>
+              </a:rPr>
+              <a:t>labels:</a:t>
+            </a:r>
+          </a:p>
+          <a:p>
+            <a:r>
+              <a:rPr lang="en-US" sz="1600" dirty="0">
+                <a:solidFill>
+                  <a:srgbClr val="171FE2"/>
+                </a:solidFill>
+                <a:latin typeface="Consolas" panose="020B0609020204030204" pitchFamily="49" charset="0"/>
+              </a:rPr>
+              <a:t>  app: frontend</a:t>
+            </a:r>
+          </a:p>
+        </p:txBody>
+      </p:sp>
+      <p:sp>
+        <p:nvSpPr>
+          <p:cNvPr id="4" name="CasellaDiTesto 3">
+            <a:extLst>
+              <a:ext uri="{FF2B5EF4-FFF2-40B4-BE49-F238E27FC236}">
+                <a16:creationId xmlns:a16="http://schemas.microsoft.com/office/drawing/2014/main" id="{2B378C46-549C-F2A9-F126-F5138D15AFB6}"/>
+              </a:ext>
+            </a:extLst>
+          </p:cNvPr>
+          <p:cNvSpPr txBox="1"/>
+          <p:nvPr/>
+        </p:nvSpPr>
+        <p:spPr>
+          <a:xfrm>
+            <a:off x="6096000" y="1643087"/>
+            <a:ext cx="3097323" cy="5078313"/>
+          </a:xfrm>
+          <a:prstGeom prst="rect">
+            <a:avLst/>
+          </a:prstGeom>
+          <a:noFill/>
+        </p:spPr>
+        <p:txBody>
+          <a:bodyPr wrap="none" rtlCol="0">
+            <a:spAutoFit/>
+          </a:bodyPr>
+          <a:lstStyle/>
+          <a:p>
+            <a:r>
+              <a:rPr lang="en-US" dirty="0" err="1"/>
+              <a:t>Visualmente</a:t>
+            </a:r>
+            <a:r>
+              <a:rPr lang="en-US" dirty="0"/>
+              <a:t>:</a:t>
+            </a:r>
+          </a:p>
+          <a:p>
+            <a:r>
+              <a:rPr lang="en-US" dirty="0">
+                <a:solidFill>
+                  <a:srgbClr val="171FE2"/>
+                </a:solidFill>
+                <a:latin typeface="Consolas" panose="020B0609020204030204" pitchFamily="49" charset="0"/>
+              </a:rPr>
+              <a:t>Pod A  --&gt; app=backend</a:t>
+            </a:r>
+          </a:p>
+          <a:p>
+            <a:r>
+              <a:rPr lang="en-US" dirty="0">
+                <a:solidFill>
+                  <a:srgbClr val="171FE2"/>
+                </a:solidFill>
+                <a:latin typeface="Consolas" panose="020B0609020204030204" pitchFamily="49" charset="0"/>
+              </a:rPr>
+              <a:t>Pod B  --&gt; app=backend</a:t>
+            </a:r>
+          </a:p>
+          <a:p>
+            <a:r>
+              <a:rPr lang="en-US" dirty="0">
+                <a:solidFill>
+                  <a:srgbClr val="171FE2"/>
+                </a:solidFill>
+                <a:latin typeface="Consolas" panose="020B0609020204030204" pitchFamily="49" charset="0"/>
+              </a:rPr>
+              <a:t>Pod C  --&gt; app=frontend</a:t>
+            </a:r>
+          </a:p>
+          <a:p>
+            <a:endParaRPr lang="en-US" dirty="0">
+              <a:solidFill>
+                <a:srgbClr val="171FE2"/>
+              </a:solidFill>
+              <a:latin typeface="Consolas" panose="020B0609020204030204" pitchFamily="49" charset="0"/>
+            </a:endParaRPr>
+          </a:p>
+          <a:p>
+            <a:r>
+              <a:rPr lang="it-IT" dirty="0"/>
+              <a:t>Se un Service ha:</a:t>
+            </a:r>
+          </a:p>
+          <a:p>
+            <a:r>
+              <a:rPr lang="it-IT" dirty="0">
+                <a:solidFill>
+                  <a:srgbClr val="171FE2"/>
+                </a:solidFill>
+                <a:latin typeface="Consolas" panose="020B0609020204030204" pitchFamily="49" charset="0"/>
+              </a:rPr>
+              <a:t>selector:</a:t>
+            </a:r>
+            <a:br>
+              <a:rPr lang="it-IT" dirty="0">
+                <a:solidFill>
+                  <a:srgbClr val="171FE2"/>
+                </a:solidFill>
+                <a:latin typeface="Consolas" panose="020B0609020204030204" pitchFamily="49" charset="0"/>
+              </a:rPr>
+            </a:br>
+            <a:r>
+              <a:rPr lang="it-IT" dirty="0">
+                <a:solidFill>
+                  <a:srgbClr val="171FE2"/>
+                </a:solidFill>
+                <a:latin typeface="Consolas" panose="020B0609020204030204" pitchFamily="49" charset="0"/>
+              </a:rPr>
+              <a:t>  app: </a:t>
+            </a:r>
+            <a:r>
+              <a:rPr lang="it-IT" dirty="0" err="1">
+                <a:solidFill>
+                  <a:srgbClr val="171FE2"/>
+                </a:solidFill>
+                <a:latin typeface="Consolas" panose="020B0609020204030204" pitchFamily="49" charset="0"/>
+              </a:rPr>
+              <a:t>backend</a:t>
+            </a:r>
+            <a:endParaRPr lang="it-IT" dirty="0">
+              <a:solidFill>
+                <a:srgbClr val="171FE2"/>
+              </a:solidFill>
+              <a:latin typeface="Consolas" panose="020B0609020204030204" pitchFamily="49" charset="0"/>
+            </a:endParaRPr>
+          </a:p>
+          <a:p>
+            <a:endParaRPr lang="it-IT" dirty="0">
+              <a:solidFill>
+                <a:srgbClr val="171FE2"/>
+              </a:solidFill>
+              <a:latin typeface="Consolas" panose="020B0609020204030204" pitchFamily="49" charset="0"/>
+            </a:endParaRPr>
+          </a:p>
+          <a:p>
+            <a:r>
+              <a:rPr lang="it-IT" dirty="0" err="1"/>
+              <a:t>Kubernetes</a:t>
+            </a:r>
+            <a:r>
+              <a:rPr lang="it-IT" dirty="0"/>
+              <a:t> vede:</a:t>
+            </a:r>
+          </a:p>
+          <a:p>
+            <a:r>
+              <a:rPr lang="it-IT" dirty="0"/>
+              <a:t>Service</a:t>
+            </a:r>
+            <a:br>
+              <a:rPr lang="it-IT" dirty="0"/>
+            </a:br>
+            <a:r>
+              <a:rPr lang="it-IT" dirty="0"/>
+              <a:t>   |</a:t>
+            </a:r>
+            <a:br>
+              <a:rPr lang="it-IT" dirty="0"/>
+            </a:br>
+            <a:r>
+              <a:rPr lang="it-IT" dirty="0"/>
+              <a:t>   +--&gt; </a:t>
+            </a:r>
+            <a:r>
+              <a:rPr lang="it-IT" dirty="0" err="1"/>
+              <a:t>Pod</a:t>
+            </a:r>
+            <a:r>
+              <a:rPr lang="it-IT" dirty="0"/>
+              <a:t> A</a:t>
+            </a:r>
+            <a:br>
+              <a:rPr lang="it-IT" dirty="0"/>
+            </a:br>
+            <a:r>
+              <a:rPr lang="it-IT" dirty="0"/>
+              <a:t>   |</a:t>
+            </a:r>
+            <a:br>
+              <a:rPr lang="it-IT" dirty="0"/>
+            </a:br>
+            <a:r>
+              <a:rPr lang="it-IT" dirty="0"/>
+              <a:t>   +--&gt; </a:t>
+            </a:r>
+            <a:r>
+              <a:rPr lang="it-IT" dirty="0" err="1"/>
+              <a:t>Pod</a:t>
+            </a:r>
+            <a:r>
+              <a:rPr lang="it-IT" dirty="0"/>
+              <a:t> B</a:t>
+            </a:r>
+          </a:p>
+          <a:p>
+            <a:r>
+              <a:rPr lang="it-IT" dirty="0"/>
+              <a:t>e ignora il </a:t>
+            </a:r>
+            <a:r>
+              <a:rPr lang="it-IT" dirty="0" err="1"/>
+              <a:t>Pod</a:t>
+            </a:r>
+            <a:r>
+              <a:rPr lang="it-IT" dirty="0"/>
+              <a:t> C.</a:t>
+            </a:r>
+          </a:p>
+          <a:p>
+            <a:endParaRPr lang="it-IT" dirty="0">
+              <a:solidFill>
+                <a:srgbClr val="171FE2"/>
+              </a:solidFill>
+              <a:latin typeface="Consolas" panose="020B0609020204030204" pitchFamily="49" charset="0"/>
+            </a:endParaRPr>
+          </a:p>
+          <a:p>
+            <a:endParaRPr lang="it-IT" dirty="0"/>
+          </a:p>
+        </p:txBody>
+      </p:sp>
+      <p:sp>
+        <p:nvSpPr>
+          <p:cNvPr id="5" name="Freccia a destra 4">
+            <a:extLst>
+              <a:ext uri="{FF2B5EF4-FFF2-40B4-BE49-F238E27FC236}">
+                <a16:creationId xmlns:a16="http://schemas.microsoft.com/office/drawing/2014/main" id="{691D6748-63A7-7713-29B0-3EB14C58E1CF}"/>
+              </a:ext>
+            </a:extLst>
+          </p:cNvPr>
+          <p:cNvSpPr/>
+          <p:nvPr/>
+        </p:nvSpPr>
+        <p:spPr>
+          <a:xfrm>
+            <a:off x="4443984" y="3520440"/>
+            <a:ext cx="1005840" cy="649224"/>
+          </a:xfrm>
+          <a:prstGeom prst="rightArrow">
+            <a:avLst/>
+          </a:prstGeom>
+        </p:spPr>
+        <p:style>
+          <a:lnRef idx="2">
+            <a:schemeClr val="accent1">
+              <a:shade val="15000"/>
+            </a:schemeClr>
+          </a:lnRef>
+          <a:fillRef idx="1">
+            <a:schemeClr val="accent1"/>
+          </a:fillRef>
+          <a:effectRef idx="0">
+            <a:schemeClr val="accent1"/>
+          </a:effectRef>
+          <a:fontRef idx="minor">
+            <a:schemeClr val="lt1"/>
+          </a:fontRef>
+        </p:style>
+        <p:txBody>
+          <a:bodyPr rtlCol="0" anchor="ctr"/>
+          <a:lstStyle/>
+          <a:p>
+            <a:pPr algn="ctr"/>
+            <a:endParaRPr lang="it-IT"/>
           </a:p>
         </p:txBody>
       </p:sp>
     </p:spTree>
     <p:extLst>
       <p:ext uri="{BB962C8B-B14F-4D97-AF65-F5344CB8AC3E}">
-        <p14:creationId xmlns:p14="http://schemas.microsoft.com/office/powerpoint/2010/main" val="3003246572"/>
+        <p14:creationId xmlns:p14="http://schemas.microsoft.com/office/powerpoint/2010/main" val="451572910"/>
+      </p:ext>
+    </p:extLst>
+  </p:cSld>
+  <p:clrMapOvr>
+    <a:masterClrMapping/>
+  </p:clrMapOvr>
+</p:sld>
+</file>
+
+<file path=ppt/slides/slide26.xml><?xml version="1.0" encoding="utf-8"?>
+<p:sld xmlns:a="http://schemas.openxmlformats.org/drawingml/2006/main" xmlns:r="http://schemas.openxmlformats.org/officeDocument/2006/relationships" xmlns:p="http://schemas.openxmlformats.org/presentationml/2006/main">
+  <p:cSld>
+    <p:spTree>
+      <p:nvGrpSpPr>
+        <p:cNvPr id="1" name="">
+          <a:extLst>
+            <a:ext uri="{FF2B5EF4-FFF2-40B4-BE49-F238E27FC236}">
+              <a16:creationId xmlns:a16="http://schemas.microsoft.com/office/drawing/2014/main" id="{0C8BEE91-33E4-CBE9-B47B-52AC20182E76}"/>
+            </a:ext>
+          </a:extLst>
+        </p:cNvPr>
+        <p:cNvGrpSpPr/>
+        <p:nvPr/>
+      </p:nvGrpSpPr>
+      <p:grpSpPr>
+        <a:xfrm>
+          <a:off x="0" y="0"/>
+          <a:ext cx="0" cy="0"/>
+          <a:chOff x="0" y="0"/>
+          <a:chExt cx="0" cy="0"/>
+        </a:xfrm>
+      </p:grpSpPr>
+      <p:sp>
+        <p:nvSpPr>
+          <p:cNvPr id="2" name="Titolo della lezione">
+            <a:extLst>
+              <a:ext uri="{FF2B5EF4-FFF2-40B4-BE49-F238E27FC236}">
+                <a16:creationId xmlns:a16="http://schemas.microsoft.com/office/drawing/2014/main" id="{B951C85F-34F1-AE4A-B504-2B503F4FD9D7}"/>
+              </a:ext>
+            </a:extLst>
+          </p:cNvPr>
+          <p:cNvSpPr>
+            <a:spLocks noGrp="1"/>
+          </p:cNvSpPr>
+          <p:nvPr>
+            <p:ph type="title"/>
+          </p:nvPr>
+        </p:nvSpPr>
+        <p:spPr>
+          <a:xfrm>
+            <a:off x="838200" y="831206"/>
+            <a:ext cx="10515600" cy="314198"/>
+          </a:xfrm>
+        </p:spPr>
+        <p:txBody>
+          <a:bodyPr/>
+          <a:lstStyle/>
+          <a:p>
+            <a:r>
+              <a:rPr lang="it-IT" dirty="0"/>
+              <a:t>SLIDE 24: IL CONCETTO DI DEPLOYMENT – IL SUPERVISORE AUTOMATICO DELLE REPLICHE</a:t>
+            </a:r>
+          </a:p>
+        </p:txBody>
+      </p:sp>
+      <p:sp>
+        <p:nvSpPr>
+          <p:cNvPr id="3" name="Contenuto della lezione">
+            <a:extLst>
+              <a:ext uri="{FF2B5EF4-FFF2-40B4-BE49-F238E27FC236}">
+                <a16:creationId xmlns:a16="http://schemas.microsoft.com/office/drawing/2014/main" id="{82904E00-AB47-DC25-6017-0ECC79262AAA}"/>
+              </a:ext>
+            </a:extLst>
+          </p:cNvPr>
+          <p:cNvSpPr>
+            <a:spLocks noGrp="1"/>
+          </p:cNvSpPr>
+          <p:nvPr>
+            <p:ph idx="1"/>
+          </p:nvPr>
+        </p:nvSpPr>
+        <p:spPr>
+          <a:xfrm>
+            <a:off x="1317319" y="1633943"/>
+            <a:ext cx="9557362" cy="4803369"/>
+          </a:xfrm>
+        </p:spPr>
+        <p:txBody>
+          <a:bodyPr/>
+          <a:lstStyle/>
+          <a:p>
+            <a:r>
+              <a:rPr lang="it-IT" b="1" dirty="0"/>
+              <a:t>In produzione non si scrive e non si </a:t>
+            </a:r>
+            <a:r>
+              <a:rPr lang="it-IT" b="1" dirty="0" err="1"/>
+              <a:t>deploya</a:t>
+            </a:r>
+            <a:r>
+              <a:rPr lang="it-IT" b="1" dirty="0"/>
+              <a:t> mai un singolo </a:t>
+            </a:r>
+            <a:r>
+              <a:rPr lang="it-IT" b="1" dirty="0" err="1"/>
+              <a:t>Pod</a:t>
+            </a:r>
+            <a:r>
+              <a:rPr lang="it-IT" b="1" dirty="0"/>
+              <a:t> isolato</a:t>
+            </a:r>
+            <a:r>
+              <a:rPr lang="it-IT" dirty="0"/>
+              <a:t>. </a:t>
+            </a:r>
+          </a:p>
+          <a:p>
+            <a:r>
+              <a:rPr lang="it-IT" dirty="0"/>
+              <a:t>I </a:t>
+            </a:r>
+            <a:r>
+              <a:rPr lang="it-IT" dirty="0" err="1"/>
+              <a:t>Pod</a:t>
+            </a:r>
+            <a:r>
+              <a:rPr lang="it-IT" dirty="0"/>
+              <a:t> sono effimeri e mortali. Se creiamo un </a:t>
+            </a:r>
+            <a:r>
+              <a:rPr lang="it-IT" dirty="0" err="1"/>
+              <a:t>Pod</a:t>
+            </a:r>
+            <a:r>
+              <a:rPr lang="it-IT" dirty="0"/>
+              <a:t> isolato e per un qualsiasi motivo il server operaio su cui risiede si surriscalda o si spegne, quel </a:t>
+            </a:r>
+            <a:r>
+              <a:rPr lang="it-IT" dirty="0" err="1"/>
+              <a:t>Pod</a:t>
+            </a:r>
+            <a:r>
+              <a:rPr lang="it-IT" dirty="0"/>
+              <a:t> muore, l'applicazione va offline e nessuno la farà risorgere. </a:t>
+            </a:r>
+          </a:p>
+          <a:p>
+            <a:r>
+              <a:rPr lang="it-IT" dirty="0"/>
+              <a:t>Per evitare questo disastro, </a:t>
+            </a:r>
+            <a:r>
+              <a:rPr lang="it-IT" dirty="0" err="1"/>
+              <a:t>Kubernetes</a:t>
+            </a:r>
+            <a:r>
+              <a:rPr lang="it-IT" dirty="0"/>
+              <a:t> introduce un oggetto di livello superiore chiamato </a:t>
+            </a:r>
+            <a:r>
+              <a:rPr lang="it-IT" b="1" dirty="0"/>
+              <a:t>Deployment</a:t>
+            </a:r>
+            <a:r>
+              <a:rPr lang="it-IT" dirty="0"/>
+              <a:t>. </a:t>
+            </a:r>
+          </a:p>
+          <a:p>
+            <a:r>
+              <a:rPr lang="it-IT" dirty="0">
+                <a:solidFill>
+                  <a:srgbClr val="171FE2"/>
+                </a:solidFill>
+              </a:rPr>
+              <a:t>Il Deployment non sostituisce il </a:t>
+            </a:r>
+            <a:r>
+              <a:rPr lang="it-IT" dirty="0" err="1">
+                <a:solidFill>
+                  <a:srgbClr val="171FE2"/>
+                </a:solidFill>
+              </a:rPr>
+              <a:t>Pod</a:t>
+            </a:r>
+            <a:r>
+              <a:rPr lang="it-IT" dirty="0">
+                <a:solidFill>
+                  <a:srgbClr val="171FE2"/>
+                </a:solidFill>
+              </a:rPr>
+              <a:t>, ma si comporta come un </a:t>
+            </a:r>
+            <a:r>
+              <a:rPr lang="it-IT" b="1" dirty="0">
+                <a:solidFill>
+                  <a:srgbClr val="171FE2"/>
+                </a:solidFill>
+              </a:rPr>
+              <a:t>Manager</a:t>
+            </a:r>
+            <a:r>
+              <a:rPr lang="it-IT" dirty="0">
+                <a:solidFill>
+                  <a:srgbClr val="171FE2"/>
+                </a:solidFill>
+              </a:rPr>
+              <a:t> o un supervisore di altissimo livello il cui unico scopo è gestire la vita, la morte e la moltiplicazione dei </a:t>
+            </a:r>
+            <a:r>
+              <a:rPr lang="it-IT" dirty="0" err="1">
+                <a:solidFill>
+                  <a:srgbClr val="171FE2"/>
+                </a:solidFill>
+              </a:rPr>
+              <a:t>Pod</a:t>
+            </a:r>
+            <a:r>
+              <a:rPr lang="it-IT" dirty="0">
+                <a:solidFill>
+                  <a:srgbClr val="171FE2"/>
+                </a:solidFill>
+              </a:rPr>
+              <a:t> per nostro conto.</a:t>
+            </a:r>
+            <a:endParaRPr lang="it-IT" dirty="0">
+              <a:solidFill>
+                <a:srgbClr val="171FE2"/>
+              </a:solidFill>
+              <a:latin typeface="Consolas" panose="020B0609020204030204" pitchFamily="49" charset="0"/>
+            </a:endParaRPr>
+          </a:p>
+        </p:txBody>
+      </p:sp>
+    </p:spTree>
+    <p:extLst>
+      <p:ext uri="{BB962C8B-B14F-4D97-AF65-F5344CB8AC3E}">
+        <p14:creationId xmlns:p14="http://schemas.microsoft.com/office/powerpoint/2010/main" val="2691295824"/>
+      </p:ext>
+    </p:extLst>
+  </p:cSld>
+  <p:clrMapOvr>
+    <a:masterClrMapping/>
+  </p:clrMapOvr>
+</p:sld>
+</file>
+
+<file path=ppt/slides/slide27.xml><?xml version="1.0" encoding="utf-8"?>
+<p:sld xmlns:a="http://schemas.openxmlformats.org/drawingml/2006/main" xmlns:r="http://schemas.openxmlformats.org/officeDocument/2006/relationships" xmlns:p="http://schemas.openxmlformats.org/presentationml/2006/main">
+  <p:cSld>
+    <p:spTree>
+      <p:nvGrpSpPr>
+        <p:cNvPr id="1" name="">
+          <a:extLst>
+            <a:ext uri="{FF2B5EF4-FFF2-40B4-BE49-F238E27FC236}">
+              <a16:creationId xmlns:a16="http://schemas.microsoft.com/office/drawing/2014/main" id="{0179A4E5-CEF7-8CE4-F87C-90B2D9B350BE}"/>
+            </a:ext>
+          </a:extLst>
+        </p:cNvPr>
+        <p:cNvGrpSpPr/>
+        <p:nvPr/>
+      </p:nvGrpSpPr>
+      <p:grpSpPr>
+        <a:xfrm>
+          <a:off x="0" y="0"/>
+          <a:ext cx="0" cy="0"/>
+          <a:chOff x="0" y="0"/>
+          <a:chExt cx="0" cy="0"/>
+        </a:xfrm>
+      </p:grpSpPr>
+      <p:sp>
+        <p:nvSpPr>
+          <p:cNvPr id="2" name="Titolo della lezione">
+            <a:extLst>
+              <a:ext uri="{FF2B5EF4-FFF2-40B4-BE49-F238E27FC236}">
+                <a16:creationId xmlns:a16="http://schemas.microsoft.com/office/drawing/2014/main" id="{FF2F71B5-45B1-E928-205A-CC786E80C1AF}"/>
+              </a:ext>
+            </a:extLst>
+          </p:cNvPr>
+          <p:cNvSpPr>
+            <a:spLocks noGrp="1"/>
+          </p:cNvSpPr>
+          <p:nvPr>
+            <p:ph type="title"/>
+          </p:nvPr>
+        </p:nvSpPr>
+        <p:spPr>
+          <a:xfrm>
+            <a:off x="838200" y="831206"/>
+            <a:ext cx="10515600" cy="314198"/>
+          </a:xfrm>
+        </p:spPr>
+        <p:txBody>
+          <a:bodyPr/>
+          <a:lstStyle/>
+          <a:p>
+            <a:r>
+              <a:rPr lang="it-IT" dirty="0"/>
+              <a:t>SLIDE 25: IL CONCETTO DI DEPLOYMENT – IL SUPERVISORE AUTOMATICO DELLE REPLICHE</a:t>
+            </a:r>
+          </a:p>
+        </p:txBody>
+      </p:sp>
+      <p:sp>
+        <p:nvSpPr>
+          <p:cNvPr id="3" name="Contenuto della lezione">
+            <a:extLst>
+              <a:ext uri="{FF2B5EF4-FFF2-40B4-BE49-F238E27FC236}">
+                <a16:creationId xmlns:a16="http://schemas.microsoft.com/office/drawing/2014/main" id="{85E53063-27B7-6A7A-E37E-CA3D3A5F96E7}"/>
+              </a:ext>
+            </a:extLst>
+          </p:cNvPr>
+          <p:cNvSpPr>
+            <a:spLocks noGrp="1"/>
+          </p:cNvSpPr>
+          <p:nvPr>
+            <p:ph idx="1"/>
+          </p:nvPr>
+        </p:nvSpPr>
+        <p:spPr>
+          <a:xfrm>
+            <a:off x="1317319" y="1633943"/>
+            <a:ext cx="9557362" cy="4803369"/>
+          </a:xfrm>
+        </p:spPr>
+        <p:txBody>
+          <a:bodyPr/>
+          <a:lstStyle/>
+          <a:p>
+            <a:r>
+              <a:rPr lang="it-IT" dirty="0"/>
+              <a:t>Quando scriviamo un </a:t>
+            </a:r>
+            <a:r>
+              <a:rPr lang="it-IT" b="1" dirty="0">
+                <a:solidFill>
+                  <a:srgbClr val="171FE2"/>
+                </a:solidFill>
+              </a:rPr>
+              <a:t>Manifesto di tipo Deployment</a:t>
+            </a:r>
+            <a:r>
+              <a:rPr lang="it-IT" dirty="0"/>
+              <a:t>, non creiamo direttamente un container, ma indichiamo al manager </a:t>
+            </a:r>
+            <a:r>
+              <a:rPr lang="it-IT" b="1" dirty="0"/>
+              <a:t>quanti </a:t>
+            </a:r>
+            <a:r>
+              <a:rPr lang="it-IT" b="1" dirty="0" err="1"/>
+              <a:t>Pod</a:t>
+            </a:r>
+            <a:r>
+              <a:rPr lang="it-IT" b="1" dirty="0"/>
+              <a:t> repliche </a:t>
+            </a:r>
+            <a:r>
+              <a:rPr lang="it-IT" dirty="0"/>
+              <a:t>devono essere attive in parallelo </a:t>
+            </a:r>
+            <a:r>
+              <a:rPr lang="it-IT" i="1" dirty="0"/>
+              <a:t>nel cluster. </a:t>
+            </a:r>
+            <a:endParaRPr lang="it-IT" dirty="0"/>
+          </a:p>
+          <a:p>
+            <a:r>
+              <a:rPr lang="it-IT" dirty="0"/>
+              <a:t>Ammettiamo ad esempio di volere 3 </a:t>
+            </a:r>
+            <a:r>
+              <a:rPr lang="it-IT" dirty="0" err="1"/>
+              <a:t>Replicas</a:t>
+            </a:r>
+            <a:r>
+              <a:rPr lang="it-IT" dirty="0"/>
+              <a:t>. </a:t>
+            </a:r>
+          </a:p>
+          <a:p>
+            <a:r>
+              <a:rPr lang="it-IT" dirty="0"/>
+              <a:t>Il Deployment prende l'ordine, crea i 3 </a:t>
+            </a:r>
+            <a:r>
+              <a:rPr lang="it-IT" dirty="0" err="1"/>
+              <a:t>Pod</a:t>
+            </a:r>
+            <a:r>
+              <a:rPr lang="it-IT" dirty="0"/>
+              <a:t> e si mette in modalità di ascolto continuo. </a:t>
+            </a:r>
+          </a:p>
+          <a:p>
+            <a:r>
+              <a:rPr lang="it-IT" dirty="0"/>
+              <a:t>Se andiamo nel server e cancelliamo un </a:t>
+            </a:r>
+            <a:r>
+              <a:rPr lang="it-IT" dirty="0" err="1"/>
+              <a:t>Pod</a:t>
+            </a:r>
+            <a:r>
+              <a:rPr lang="it-IT" dirty="0"/>
+              <a:t> a tradimento, il Deployment se ne accorge rapidamente, bussa all'</a:t>
+            </a:r>
+            <a:r>
+              <a:rPr lang="it-IT" b="1" dirty="0"/>
+              <a:t>API Server </a:t>
+            </a:r>
+            <a:r>
+              <a:rPr lang="it-IT" dirty="0"/>
+              <a:t>e informa </a:t>
+            </a:r>
+            <a:r>
+              <a:rPr lang="it-IT" dirty="0" err="1"/>
+              <a:t>Kubernates</a:t>
+            </a:r>
+            <a:r>
+              <a:rPr lang="it-IT" dirty="0"/>
+              <a:t> </a:t>
+            </a:r>
+            <a:r>
+              <a:rPr lang="it-IT" b="1" dirty="0"/>
+              <a:t>che da contratto </a:t>
+            </a:r>
+            <a:r>
+              <a:rPr lang="it-IT" dirty="0"/>
+              <a:t>le repliche non possono essere meno di 3.</a:t>
+            </a:r>
+            <a:endParaRPr lang="it-IT" i="1" dirty="0"/>
+          </a:p>
+          <a:p>
+            <a:r>
+              <a:rPr lang="it-IT" b="1" i="1" dirty="0" err="1"/>
+              <a:t>Scheduler</a:t>
+            </a:r>
+            <a:r>
+              <a:rPr lang="it-IT" i="1" dirty="0"/>
+              <a:t>, viene quindi contattato per ripristinare un </a:t>
+            </a:r>
+            <a:r>
+              <a:rPr lang="it-IT" i="1" dirty="0" err="1"/>
+              <a:t>Pod</a:t>
+            </a:r>
+            <a:r>
+              <a:rPr lang="it-IT" i="1" dirty="0"/>
+              <a:t> nel primo server trovato libero</a:t>
+            </a:r>
+            <a:r>
+              <a:rPr lang="it-IT" dirty="0"/>
+              <a:t>.</a:t>
+            </a:r>
+          </a:p>
+          <a:p>
+            <a:r>
+              <a:rPr lang="it-IT" dirty="0">
+                <a:solidFill>
+                  <a:srgbClr val="171FE2"/>
+                </a:solidFill>
+              </a:rPr>
+              <a:t>Questo meccanismo garantisce l'</a:t>
+            </a:r>
+            <a:r>
+              <a:rPr lang="it-IT" b="1" dirty="0">
+                <a:solidFill>
+                  <a:srgbClr val="171FE2"/>
+                </a:solidFill>
+              </a:rPr>
+              <a:t>Alta Affidabilità</a:t>
+            </a:r>
+            <a:r>
+              <a:rPr lang="it-IT" dirty="0">
+                <a:solidFill>
+                  <a:srgbClr val="171FE2"/>
+                </a:solidFill>
+              </a:rPr>
+              <a:t> (High </a:t>
+            </a:r>
+            <a:r>
+              <a:rPr lang="it-IT" dirty="0" err="1">
+                <a:solidFill>
+                  <a:srgbClr val="171FE2"/>
+                </a:solidFill>
+              </a:rPr>
+              <a:t>Availability</a:t>
+            </a:r>
+            <a:r>
+              <a:rPr lang="it-IT" dirty="0">
+                <a:solidFill>
+                  <a:srgbClr val="171FE2"/>
+                </a:solidFill>
+              </a:rPr>
+              <a:t>) del software aziendale: l'applicazione si auto-ripara da sola nel cuore della notte senza che nessun tecnico debba svegliarsi per risolvere l'emergenza.</a:t>
+            </a:r>
+            <a:endParaRPr lang="it-IT" dirty="0">
+              <a:solidFill>
+                <a:srgbClr val="171FE2"/>
+              </a:solidFill>
+              <a:latin typeface="Consolas" panose="020B0609020204030204" pitchFamily="49" charset="0"/>
+            </a:endParaRPr>
+          </a:p>
+        </p:txBody>
+      </p:sp>
+    </p:spTree>
+    <p:extLst>
+      <p:ext uri="{BB962C8B-B14F-4D97-AF65-F5344CB8AC3E}">
+        <p14:creationId xmlns:p14="http://schemas.microsoft.com/office/powerpoint/2010/main" val="2823687170"/>
+      </p:ext>
+    </p:extLst>
+  </p:cSld>
+  <p:clrMapOvr>
+    <a:masterClrMapping/>
+  </p:clrMapOvr>
+</p:sld>
+</file>
+
+<file path=ppt/slides/slide28.xml><?xml version="1.0" encoding="utf-8"?>
+<p:sld xmlns:a="http://schemas.openxmlformats.org/drawingml/2006/main" xmlns:r="http://schemas.openxmlformats.org/officeDocument/2006/relationships" xmlns:p="http://schemas.openxmlformats.org/presentationml/2006/main">
+  <p:cSld>
+    <p:spTree>
+      <p:nvGrpSpPr>
+        <p:cNvPr id="1" name="">
+          <a:extLst>
+            <a:ext uri="{FF2B5EF4-FFF2-40B4-BE49-F238E27FC236}">
+              <a16:creationId xmlns:a16="http://schemas.microsoft.com/office/drawing/2014/main" id="{C703D6AC-4E32-8BE5-B45A-50411B843422}"/>
+            </a:ext>
+          </a:extLst>
+        </p:cNvPr>
+        <p:cNvGrpSpPr/>
+        <p:nvPr/>
+      </p:nvGrpSpPr>
+      <p:grpSpPr>
+        <a:xfrm>
+          <a:off x="0" y="0"/>
+          <a:ext cx="0" cy="0"/>
+          <a:chOff x="0" y="0"/>
+          <a:chExt cx="0" cy="0"/>
+        </a:xfrm>
+      </p:grpSpPr>
+      <p:sp>
+        <p:nvSpPr>
+          <p:cNvPr id="2" name="Titolo della lezione">
+            <a:extLst>
+              <a:ext uri="{FF2B5EF4-FFF2-40B4-BE49-F238E27FC236}">
+                <a16:creationId xmlns:a16="http://schemas.microsoft.com/office/drawing/2014/main" id="{5A14D1D1-37C7-384F-DBD3-BF59ED744A73}"/>
+              </a:ext>
+            </a:extLst>
+          </p:cNvPr>
+          <p:cNvSpPr>
+            <a:spLocks noGrp="1"/>
+          </p:cNvSpPr>
+          <p:nvPr>
+            <p:ph type="title"/>
+          </p:nvPr>
+        </p:nvSpPr>
+        <p:spPr>
+          <a:xfrm>
+            <a:off x="838200" y="831206"/>
+            <a:ext cx="10515600" cy="314198"/>
+          </a:xfrm>
+        </p:spPr>
+        <p:txBody>
+          <a:bodyPr/>
+          <a:lstStyle/>
+          <a:p>
+            <a:r>
+              <a:rPr lang="it-IT" dirty="0"/>
+              <a:t>SLIDE 26: IL CONCETTO DI DEPLOYMENT – IL SUPERVISORE AUTOMATICO DELLE REPLICHE</a:t>
+            </a:r>
+          </a:p>
+        </p:txBody>
+      </p:sp>
+      <p:sp>
+        <p:nvSpPr>
+          <p:cNvPr id="3" name="Contenuto della lezione">
+            <a:extLst>
+              <a:ext uri="{FF2B5EF4-FFF2-40B4-BE49-F238E27FC236}">
+                <a16:creationId xmlns:a16="http://schemas.microsoft.com/office/drawing/2014/main" id="{2C1BD579-7E22-3ACD-26F8-2A7E31E005FD}"/>
+              </a:ext>
+            </a:extLst>
+          </p:cNvPr>
+          <p:cNvSpPr>
+            <a:spLocks noGrp="1"/>
+          </p:cNvSpPr>
+          <p:nvPr>
+            <p:ph idx="1"/>
+          </p:nvPr>
+        </p:nvSpPr>
+        <p:spPr>
+          <a:xfrm>
+            <a:off x="1317319" y="1633943"/>
+            <a:ext cx="9557362" cy="4803369"/>
+          </a:xfrm>
+        </p:spPr>
+        <p:txBody>
+          <a:bodyPr/>
+          <a:lstStyle/>
+          <a:p>
+            <a:r>
+              <a:rPr lang="it-IT" i="1" dirty="0"/>
+              <a:t>Il Deployment gestisce anche gli aggiornamenti senza </a:t>
+            </a:r>
+            <a:r>
+              <a:rPr lang="it-IT" b="1" i="1" dirty="0" err="1"/>
+              <a:t>downtime</a:t>
+            </a:r>
+            <a:r>
+              <a:rPr lang="it-IT" i="1" dirty="0"/>
+              <a:t> (Rolling Update), ovvero, senza fermare l’applicazione. </a:t>
+            </a:r>
+          </a:p>
+          <a:p>
+            <a:r>
+              <a:rPr lang="it-IT" i="1" dirty="0"/>
+              <a:t>Quando cambiamo versione del codice nello YAML, il Deployment non spegne l'app lasciando gli utenti al buio. </a:t>
+            </a:r>
+          </a:p>
+          <a:p>
+            <a:r>
+              <a:rPr lang="it-IT" i="1" dirty="0">
+                <a:solidFill>
+                  <a:srgbClr val="171FE2"/>
+                </a:solidFill>
+              </a:rPr>
+              <a:t>Accende un nuovo </a:t>
+            </a:r>
+            <a:r>
+              <a:rPr lang="it-IT" i="1" dirty="0" err="1">
+                <a:solidFill>
+                  <a:srgbClr val="171FE2"/>
+                </a:solidFill>
+              </a:rPr>
+              <a:t>Pod</a:t>
+            </a:r>
+            <a:r>
+              <a:rPr lang="it-IT" i="1" dirty="0">
+                <a:solidFill>
+                  <a:srgbClr val="171FE2"/>
+                </a:solidFill>
+              </a:rPr>
+              <a:t> aggiornato, aspetta che sia pronto, gli devia il traffico, e solo allora spegne quello vecchio, uno alla volta, garantendo zero interruzioni del servizio</a:t>
+            </a:r>
+            <a:r>
+              <a:rPr lang="it-IT" dirty="0">
+                <a:solidFill>
+                  <a:srgbClr val="171FE2"/>
+                </a:solidFill>
+              </a:rPr>
+              <a:t>. </a:t>
+            </a:r>
+            <a:endParaRPr lang="it-IT" dirty="0">
+              <a:solidFill>
+                <a:srgbClr val="171FE2"/>
+              </a:solidFill>
+              <a:latin typeface="Consolas" panose="020B0609020204030204" pitchFamily="49" charset="0"/>
+            </a:endParaRPr>
+          </a:p>
+        </p:txBody>
+      </p:sp>
+    </p:spTree>
+    <p:extLst>
+      <p:ext uri="{BB962C8B-B14F-4D97-AF65-F5344CB8AC3E}">
+        <p14:creationId xmlns:p14="http://schemas.microsoft.com/office/powerpoint/2010/main" val="3786945252"/>
+      </p:ext>
+    </p:extLst>
+  </p:cSld>
+  <p:clrMapOvr>
+    <a:masterClrMapping/>
+  </p:clrMapOvr>
+</p:sld>
+</file>
+
+<file path=ppt/slides/slide29.xml><?xml version="1.0" encoding="utf-8"?>
+<p:sld xmlns:a="http://schemas.openxmlformats.org/drawingml/2006/main" xmlns:r="http://schemas.openxmlformats.org/officeDocument/2006/relationships" xmlns:p="http://schemas.openxmlformats.org/presentationml/2006/main">
+  <p:cSld>
+    <p:spTree>
+      <p:nvGrpSpPr>
+        <p:cNvPr id="1" name="">
+          <a:extLst>
+            <a:ext uri="{FF2B5EF4-FFF2-40B4-BE49-F238E27FC236}">
+              <a16:creationId xmlns:a16="http://schemas.microsoft.com/office/drawing/2014/main" id="{8BE5DAEC-6EC6-4FFE-AEB1-5AF2891504AB}"/>
+            </a:ext>
+          </a:extLst>
+        </p:cNvPr>
+        <p:cNvGrpSpPr/>
+        <p:nvPr/>
+      </p:nvGrpSpPr>
+      <p:grpSpPr>
+        <a:xfrm>
+          <a:off x="0" y="0"/>
+          <a:ext cx="0" cy="0"/>
+          <a:chOff x="0" y="0"/>
+          <a:chExt cx="0" cy="0"/>
+        </a:xfrm>
+      </p:grpSpPr>
+      <p:sp>
+        <p:nvSpPr>
+          <p:cNvPr id="2" name="Titolo della lezione">
+            <a:extLst>
+              <a:ext uri="{FF2B5EF4-FFF2-40B4-BE49-F238E27FC236}">
+                <a16:creationId xmlns:a16="http://schemas.microsoft.com/office/drawing/2014/main" id="{36911778-5423-FA0E-D0D0-3CA478D97024}"/>
+              </a:ext>
+            </a:extLst>
+          </p:cNvPr>
+          <p:cNvSpPr>
+            <a:spLocks noGrp="1"/>
+          </p:cNvSpPr>
+          <p:nvPr>
+            <p:ph type="title"/>
+          </p:nvPr>
+        </p:nvSpPr>
+        <p:spPr>
+          <a:xfrm>
+            <a:off x="838200" y="831206"/>
+            <a:ext cx="10515600" cy="314198"/>
+          </a:xfrm>
+        </p:spPr>
+        <p:txBody>
+          <a:bodyPr/>
+          <a:lstStyle/>
+          <a:p>
+            <a:r>
+              <a:rPr lang="it-IT" dirty="0"/>
+              <a:t>SLIDE 27: L'ANATOMIA DELLO YAML DI UN DEPLOYMENT – CAPIRE I DUE LIVELLI</a:t>
+            </a:r>
+          </a:p>
+        </p:txBody>
+      </p:sp>
+      <p:sp>
+        <p:nvSpPr>
+          <p:cNvPr id="3" name="Contenuto della lezione">
+            <a:extLst>
+              <a:ext uri="{FF2B5EF4-FFF2-40B4-BE49-F238E27FC236}">
+                <a16:creationId xmlns:a16="http://schemas.microsoft.com/office/drawing/2014/main" id="{18B8B0A5-0CDE-B620-BA50-8405CD227E98}"/>
+              </a:ext>
+            </a:extLst>
+          </p:cNvPr>
+          <p:cNvSpPr>
+            <a:spLocks noGrp="1"/>
+          </p:cNvSpPr>
+          <p:nvPr>
+            <p:ph idx="1"/>
+          </p:nvPr>
+        </p:nvSpPr>
+        <p:spPr>
+          <a:xfrm>
+            <a:off x="1317319" y="1633943"/>
+            <a:ext cx="4964609" cy="4803369"/>
+          </a:xfrm>
+        </p:spPr>
+        <p:txBody>
+          <a:bodyPr/>
+          <a:lstStyle/>
+          <a:p>
+            <a:r>
+              <a:rPr lang="it-IT" dirty="0"/>
+              <a:t>Dato che il Deployment è un oggetto superiore che deve contenere al suo interno le istruzioni per generare altri oggetti (i </a:t>
+            </a:r>
+            <a:r>
+              <a:rPr lang="it-IT" dirty="0" err="1"/>
+              <a:t>Pod</a:t>
+            </a:r>
+            <a:r>
+              <a:rPr lang="it-IT" dirty="0"/>
+              <a:t>), la struttura del suo file YAML è inevitabilmente nidificata a "scatola cinese". </a:t>
+            </a:r>
+          </a:p>
+          <a:p>
+            <a:r>
+              <a:rPr lang="it-IT" dirty="0"/>
+              <a:t>Il file è diviso nettamente in due piani sovrapposti: </a:t>
+            </a:r>
+            <a:r>
+              <a:rPr lang="it-IT" dirty="0">
+                <a:solidFill>
+                  <a:srgbClr val="FF0000"/>
+                </a:solidFill>
+              </a:rPr>
+              <a:t>il </a:t>
+            </a:r>
+            <a:r>
+              <a:rPr lang="it-IT" b="1" dirty="0">
+                <a:solidFill>
+                  <a:srgbClr val="FF0000"/>
+                </a:solidFill>
+              </a:rPr>
+              <a:t>guscio esterno</a:t>
+            </a:r>
+            <a:r>
+              <a:rPr lang="it-IT" dirty="0">
+                <a:solidFill>
+                  <a:srgbClr val="FF0000"/>
+                </a:solidFill>
+              </a:rPr>
+              <a:t> (le istruzioni del Deployment, ovvero, il Manager)</a:t>
+            </a:r>
+            <a:r>
+              <a:rPr lang="it-IT" dirty="0"/>
+              <a:t> e </a:t>
+            </a:r>
+            <a:r>
+              <a:rPr lang="it-IT" dirty="0">
+                <a:solidFill>
+                  <a:srgbClr val="171FE2"/>
+                </a:solidFill>
+              </a:rPr>
+              <a:t>il </a:t>
+            </a:r>
+            <a:r>
+              <a:rPr lang="it-IT" b="1" dirty="0">
+                <a:solidFill>
+                  <a:srgbClr val="171FE2"/>
+                </a:solidFill>
+              </a:rPr>
+              <a:t>nocciolo interno</a:t>
+            </a:r>
+            <a:r>
+              <a:rPr lang="it-IT" dirty="0">
+                <a:solidFill>
+                  <a:srgbClr val="171FE2"/>
+                </a:solidFill>
+              </a:rPr>
+              <a:t> (lo stampo o template del </a:t>
+            </a:r>
+            <a:r>
+              <a:rPr lang="it-IT" dirty="0" err="1">
+                <a:solidFill>
+                  <a:srgbClr val="171FE2"/>
+                </a:solidFill>
+              </a:rPr>
+              <a:t>Pod</a:t>
+            </a:r>
+            <a:r>
+              <a:rPr lang="it-IT" dirty="0">
+                <a:solidFill>
+                  <a:srgbClr val="171FE2"/>
+                </a:solidFill>
+              </a:rPr>
+              <a:t>).</a:t>
+            </a:r>
+          </a:p>
+          <a:p>
+            <a:r>
+              <a:rPr lang="it-IT" dirty="0"/>
+              <a:t>Il guscio esterno inizia in cima dichiarando </a:t>
+            </a:r>
+            <a:r>
+              <a:rPr lang="it-IT" dirty="0" err="1"/>
+              <a:t>kind</a:t>
+            </a:r>
+            <a:r>
+              <a:rPr lang="it-IT" dirty="0"/>
+              <a:t>: Deployment. </a:t>
+            </a:r>
+          </a:p>
+          <a:p>
+            <a:r>
+              <a:rPr lang="it-IT" dirty="0"/>
+              <a:t>Nella sua sezione </a:t>
+            </a:r>
+            <a:r>
+              <a:rPr lang="it-IT" dirty="0" err="1"/>
+              <a:t>spec</a:t>
+            </a:r>
+            <a:r>
+              <a:rPr lang="it-IT" dirty="0"/>
+              <a:t> (le specifiche del manager), andiamo a definire quante copie vogliamo tramite la chiave </a:t>
+            </a:r>
+            <a:r>
+              <a:rPr lang="it-IT" dirty="0" err="1"/>
+              <a:t>replicas</a:t>
+            </a:r>
+            <a:r>
+              <a:rPr lang="it-IT" dirty="0"/>
+              <a:t>: 3. </a:t>
+            </a:r>
+          </a:p>
+          <a:p>
+            <a:r>
+              <a:rPr lang="it-IT" dirty="0"/>
+              <a:t>Subito sotto, troviamo una voce fondamentale chiamata </a:t>
+            </a:r>
+            <a:r>
+              <a:rPr lang="it-IT" dirty="0">
+                <a:solidFill>
+                  <a:srgbClr val="171FE2"/>
+                </a:solidFill>
+              </a:rPr>
+              <a:t>selector: </a:t>
+            </a:r>
+            <a:r>
+              <a:rPr lang="it-IT" dirty="0" err="1">
+                <a:solidFill>
+                  <a:srgbClr val="171FE2"/>
+                </a:solidFill>
+              </a:rPr>
+              <a:t>matchLabels</a:t>
+            </a:r>
+            <a:r>
+              <a:rPr lang="it-IT" dirty="0"/>
+              <a:t>. </a:t>
+            </a:r>
+          </a:p>
+        </p:txBody>
+      </p:sp>
+      <p:sp>
+        <p:nvSpPr>
+          <p:cNvPr id="5" name="CasellaDiTesto 4">
+            <a:extLst>
+              <a:ext uri="{FF2B5EF4-FFF2-40B4-BE49-F238E27FC236}">
+                <a16:creationId xmlns:a16="http://schemas.microsoft.com/office/drawing/2014/main" id="{52AF1707-2EBB-082D-A4DA-D174FD20C1DB}"/>
+              </a:ext>
+            </a:extLst>
+          </p:cNvPr>
+          <p:cNvSpPr txBox="1"/>
+          <p:nvPr/>
+        </p:nvSpPr>
+        <p:spPr>
+          <a:xfrm>
+            <a:off x="6757416" y="1357971"/>
+            <a:ext cx="4110421" cy="5355312"/>
+          </a:xfrm>
+          <a:prstGeom prst="rect">
+            <a:avLst/>
+          </a:prstGeom>
+          <a:noFill/>
+        </p:spPr>
+        <p:txBody>
+          <a:bodyPr wrap="none" rtlCol="0">
+            <a:spAutoFit/>
+          </a:bodyPr>
+          <a:lstStyle/>
+          <a:p>
+            <a:r>
+              <a:rPr lang="it-IT" dirty="0" err="1">
+                <a:solidFill>
+                  <a:srgbClr val="FF0000"/>
+                </a:solidFill>
+                <a:latin typeface="Consolas" panose="020B0609020204030204" pitchFamily="49" charset="0"/>
+              </a:rPr>
+              <a:t>apiVersion</a:t>
+            </a:r>
+            <a:r>
+              <a:rPr lang="it-IT" dirty="0">
+                <a:solidFill>
+                  <a:srgbClr val="FF0000"/>
+                </a:solidFill>
+                <a:latin typeface="Consolas" panose="020B0609020204030204" pitchFamily="49" charset="0"/>
+              </a:rPr>
+              <a:t>: apps/v1</a:t>
+            </a:r>
+          </a:p>
+          <a:p>
+            <a:r>
+              <a:rPr lang="it-IT" dirty="0" err="1">
+                <a:solidFill>
+                  <a:srgbClr val="FF0000"/>
+                </a:solidFill>
+                <a:latin typeface="Consolas" panose="020B0609020204030204" pitchFamily="49" charset="0"/>
+              </a:rPr>
+              <a:t>kind</a:t>
+            </a:r>
+            <a:r>
+              <a:rPr lang="it-IT" dirty="0">
+                <a:solidFill>
+                  <a:srgbClr val="FF0000"/>
+                </a:solidFill>
+                <a:latin typeface="Consolas" panose="020B0609020204030204" pitchFamily="49" charset="0"/>
+              </a:rPr>
+              <a:t>: Deployment</a:t>
+            </a:r>
+          </a:p>
+          <a:p>
+            <a:r>
+              <a:rPr lang="it-IT" dirty="0">
+                <a:solidFill>
+                  <a:srgbClr val="FF0000"/>
+                </a:solidFill>
+                <a:latin typeface="Consolas" panose="020B0609020204030204" pitchFamily="49" charset="0"/>
+              </a:rPr>
+              <a:t>metadata:</a:t>
+            </a:r>
+          </a:p>
+          <a:p>
+            <a:r>
+              <a:rPr lang="it-IT" dirty="0">
+                <a:solidFill>
+                  <a:srgbClr val="FF0000"/>
+                </a:solidFill>
+                <a:latin typeface="Consolas" panose="020B0609020204030204" pitchFamily="49" charset="0"/>
+              </a:rPr>
+              <a:t>  name: </a:t>
+            </a:r>
+            <a:r>
+              <a:rPr lang="it-IT" dirty="0" err="1">
+                <a:solidFill>
+                  <a:srgbClr val="FF0000"/>
+                </a:solidFill>
+                <a:latin typeface="Consolas" panose="020B0609020204030204" pitchFamily="49" charset="0"/>
+              </a:rPr>
+              <a:t>backend</a:t>
+            </a:r>
+            <a:r>
+              <a:rPr lang="it-IT" dirty="0">
+                <a:solidFill>
+                  <a:srgbClr val="FF0000"/>
+                </a:solidFill>
+                <a:latin typeface="Consolas" panose="020B0609020204030204" pitchFamily="49" charset="0"/>
+              </a:rPr>
+              <a:t>-deployment</a:t>
+            </a:r>
+          </a:p>
+          <a:p>
+            <a:r>
+              <a:rPr lang="it-IT" dirty="0" err="1">
+                <a:solidFill>
+                  <a:srgbClr val="FF0000"/>
+                </a:solidFill>
+                <a:latin typeface="Consolas" panose="020B0609020204030204" pitchFamily="49" charset="0"/>
+              </a:rPr>
+              <a:t>spec</a:t>
+            </a:r>
+            <a:r>
+              <a:rPr lang="it-IT" dirty="0">
+                <a:solidFill>
+                  <a:srgbClr val="FF0000"/>
+                </a:solidFill>
+                <a:latin typeface="Consolas" panose="020B0609020204030204" pitchFamily="49" charset="0"/>
+              </a:rPr>
+              <a:t>:</a:t>
+            </a:r>
+          </a:p>
+          <a:p>
+            <a:r>
+              <a:rPr lang="it-IT" dirty="0">
+                <a:solidFill>
+                  <a:srgbClr val="FF0000"/>
+                </a:solidFill>
+                <a:latin typeface="Consolas" panose="020B0609020204030204" pitchFamily="49" charset="0"/>
+              </a:rPr>
+              <a:t>  </a:t>
+            </a:r>
+            <a:r>
+              <a:rPr lang="it-IT" dirty="0" err="1">
+                <a:solidFill>
+                  <a:srgbClr val="FF0000"/>
+                </a:solidFill>
+                <a:latin typeface="Consolas" panose="020B0609020204030204" pitchFamily="49" charset="0"/>
+              </a:rPr>
+              <a:t>replicas</a:t>
+            </a:r>
+            <a:r>
+              <a:rPr lang="it-IT" dirty="0">
+                <a:solidFill>
+                  <a:srgbClr val="FF0000"/>
+                </a:solidFill>
+                <a:latin typeface="Consolas" panose="020B0609020204030204" pitchFamily="49" charset="0"/>
+              </a:rPr>
+              <a:t>: 3</a:t>
+            </a:r>
+          </a:p>
+          <a:p>
+            <a:r>
+              <a:rPr lang="it-IT" dirty="0">
+                <a:solidFill>
+                  <a:srgbClr val="FF0000"/>
+                </a:solidFill>
+                <a:latin typeface="Consolas" panose="020B0609020204030204" pitchFamily="49" charset="0"/>
+              </a:rPr>
+              <a:t>  selector:</a:t>
+            </a:r>
+          </a:p>
+          <a:p>
+            <a:r>
+              <a:rPr lang="it-IT" dirty="0">
+                <a:solidFill>
+                  <a:srgbClr val="FF0000"/>
+                </a:solidFill>
+                <a:latin typeface="Consolas" panose="020B0609020204030204" pitchFamily="49" charset="0"/>
+              </a:rPr>
+              <a:t>    </a:t>
+            </a:r>
+            <a:r>
+              <a:rPr lang="it-IT" dirty="0" err="1">
+                <a:solidFill>
+                  <a:srgbClr val="FF0000"/>
+                </a:solidFill>
+                <a:latin typeface="Consolas" panose="020B0609020204030204" pitchFamily="49" charset="0"/>
+              </a:rPr>
+              <a:t>matchLabels</a:t>
+            </a:r>
+            <a:r>
+              <a:rPr lang="it-IT" dirty="0">
+                <a:solidFill>
+                  <a:srgbClr val="FF0000"/>
+                </a:solidFill>
+                <a:latin typeface="Consolas" panose="020B0609020204030204" pitchFamily="49" charset="0"/>
+              </a:rPr>
+              <a:t>:</a:t>
+            </a:r>
+          </a:p>
+          <a:p>
+            <a:r>
+              <a:rPr lang="it-IT" dirty="0">
+                <a:solidFill>
+                  <a:srgbClr val="FF0000"/>
+                </a:solidFill>
+                <a:latin typeface="Consolas" panose="020B0609020204030204" pitchFamily="49" charset="0"/>
+              </a:rPr>
+              <a:t>      app: </a:t>
+            </a:r>
+            <a:r>
+              <a:rPr lang="it-IT" dirty="0" err="1">
+                <a:solidFill>
+                  <a:srgbClr val="FF0000"/>
+                </a:solidFill>
+                <a:latin typeface="Consolas" panose="020B0609020204030204" pitchFamily="49" charset="0"/>
+              </a:rPr>
+              <a:t>backend-enterprise</a:t>
+            </a:r>
+            <a:endParaRPr lang="it-IT" dirty="0">
+              <a:solidFill>
+                <a:srgbClr val="FF0000"/>
+              </a:solidFill>
+              <a:latin typeface="Consolas" panose="020B0609020204030204" pitchFamily="49" charset="0"/>
+            </a:endParaRPr>
+          </a:p>
+          <a:p>
+            <a:r>
+              <a:rPr lang="it-IT" dirty="0">
+                <a:solidFill>
+                  <a:srgbClr val="171FE2"/>
+                </a:solidFill>
+                <a:latin typeface="Consolas" panose="020B0609020204030204" pitchFamily="49" charset="0"/>
+              </a:rPr>
+              <a:t>  template:</a:t>
+            </a:r>
+          </a:p>
+          <a:p>
+            <a:r>
+              <a:rPr lang="it-IT" dirty="0">
+                <a:solidFill>
+                  <a:srgbClr val="171FE2"/>
+                </a:solidFill>
+                <a:latin typeface="Consolas" panose="020B0609020204030204" pitchFamily="49" charset="0"/>
+              </a:rPr>
+              <a:t>    metadata:</a:t>
+            </a:r>
+          </a:p>
+          <a:p>
+            <a:r>
+              <a:rPr lang="it-IT" dirty="0">
+                <a:solidFill>
+                  <a:srgbClr val="171FE2"/>
+                </a:solidFill>
+                <a:latin typeface="Consolas" panose="020B0609020204030204" pitchFamily="49" charset="0"/>
+              </a:rPr>
+              <a:t>      labels:</a:t>
+            </a:r>
+          </a:p>
+          <a:p>
+            <a:r>
+              <a:rPr lang="it-IT" dirty="0">
+                <a:solidFill>
+                  <a:srgbClr val="171FE2"/>
+                </a:solidFill>
+                <a:latin typeface="Consolas" panose="020B0609020204030204" pitchFamily="49" charset="0"/>
+              </a:rPr>
+              <a:t>        app: </a:t>
+            </a:r>
+            <a:r>
+              <a:rPr lang="it-IT" dirty="0" err="1">
+                <a:solidFill>
+                  <a:srgbClr val="171FE2"/>
+                </a:solidFill>
+                <a:latin typeface="Consolas" panose="020B0609020204030204" pitchFamily="49" charset="0"/>
+              </a:rPr>
+              <a:t>backend-enterprise</a:t>
+            </a:r>
+            <a:endParaRPr lang="it-IT" dirty="0">
+              <a:solidFill>
+                <a:srgbClr val="171FE2"/>
+              </a:solidFill>
+              <a:latin typeface="Consolas" panose="020B0609020204030204" pitchFamily="49" charset="0"/>
+            </a:endParaRPr>
+          </a:p>
+          <a:p>
+            <a:r>
+              <a:rPr lang="it-IT" dirty="0">
+                <a:solidFill>
+                  <a:srgbClr val="171FE2"/>
+                </a:solidFill>
+                <a:latin typeface="Consolas" panose="020B0609020204030204" pitchFamily="49" charset="0"/>
+              </a:rPr>
+              <a:t>    </a:t>
+            </a:r>
+            <a:r>
+              <a:rPr lang="it-IT" dirty="0" err="1">
+                <a:solidFill>
+                  <a:srgbClr val="171FE2"/>
+                </a:solidFill>
+                <a:latin typeface="Consolas" panose="020B0609020204030204" pitchFamily="49" charset="0"/>
+              </a:rPr>
+              <a:t>spec</a:t>
+            </a:r>
+            <a:r>
+              <a:rPr lang="it-IT" dirty="0">
+                <a:solidFill>
+                  <a:srgbClr val="171FE2"/>
+                </a:solidFill>
+                <a:latin typeface="Consolas" panose="020B0609020204030204" pitchFamily="49" charset="0"/>
+              </a:rPr>
+              <a:t>:</a:t>
+            </a:r>
+          </a:p>
+          <a:p>
+            <a:r>
+              <a:rPr lang="it-IT" dirty="0">
+                <a:solidFill>
+                  <a:srgbClr val="171FE2"/>
+                </a:solidFill>
+                <a:latin typeface="Consolas" panose="020B0609020204030204" pitchFamily="49" charset="0"/>
+              </a:rPr>
+              <a:t>      containers:</a:t>
+            </a:r>
+          </a:p>
+          <a:p>
+            <a:r>
+              <a:rPr lang="it-IT" dirty="0">
+                <a:solidFill>
+                  <a:srgbClr val="171FE2"/>
+                </a:solidFill>
+                <a:latin typeface="Consolas" panose="020B0609020204030204" pitchFamily="49" charset="0"/>
+              </a:rPr>
+              <a:t>      - name: java-container</a:t>
+            </a:r>
+          </a:p>
+          <a:p>
+            <a:r>
+              <a:rPr lang="it-IT" dirty="0">
+                <a:solidFill>
+                  <a:srgbClr val="171FE2"/>
+                </a:solidFill>
+                <a:latin typeface="Consolas" panose="020B0609020204030204" pitchFamily="49" charset="0"/>
+              </a:rPr>
+              <a:t>        image: </a:t>
+            </a:r>
+            <a:r>
+              <a:rPr lang="it-IT" dirty="0" err="1">
+                <a:solidFill>
+                  <a:srgbClr val="171FE2"/>
+                </a:solidFill>
+                <a:latin typeface="Consolas" panose="020B0609020204030204" pitchFamily="49" charset="0"/>
+              </a:rPr>
+              <a:t>nginx</a:t>
+            </a:r>
+            <a:endParaRPr lang="it-IT" dirty="0">
+              <a:solidFill>
+                <a:srgbClr val="171FE2"/>
+              </a:solidFill>
+              <a:latin typeface="Consolas" panose="020B0609020204030204" pitchFamily="49" charset="0"/>
+            </a:endParaRPr>
+          </a:p>
+          <a:p>
+            <a:r>
+              <a:rPr lang="it-IT" dirty="0">
+                <a:solidFill>
+                  <a:srgbClr val="171FE2"/>
+                </a:solidFill>
+                <a:latin typeface="Consolas" panose="020B0609020204030204" pitchFamily="49" charset="0"/>
+              </a:rPr>
+              <a:t>        ports:</a:t>
+            </a:r>
+          </a:p>
+          <a:p>
+            <a:r>
+              <a:rPr lang="it-IT" dirty="0">
+                <a:solidFill>
+                  <a:srgbClr val="171FE2"/>
+                </a:solidFill>
+                <a:latin typeface="Consolas" panose="020B0609020204030204" pitchFamily="49" charset="0"/>
+              </a:rPr>
+              <a:t>        - </a:t>
+            </a:r>
+            <a:r>
+              <a:rPr lang="it-IT" dirty="0" err="1">
+                <a:solidFill>
+                  <a:srgbClr val="171FE2"/>
+                </a:solidFill>
+                <a:latin typeface="Consolas" panose="020B0609020204030204" pitchFamily="49" charset="0"/>
+              </a:rPr>
+              <a:t>containerPort</a:t>
+            </a:r>
+            <a:r>
+              <a:rPr lang="it-IT" dirty="0">
+                <a:solidFill>
+                  <a:srgbClr val="171FE2"/>
+                </a:solidFill>
+                <a:latin typeface="Consolas" panose="020B0609020204030204" pitchFamily="49" charset="0"/>
+              </a:rPr>
+              <a:t>: 80</a:t>
+            </a:r>
+          </a:p>
+        </p:txBody>
+      </p:sp>
+    </p:spTree>
+    <p:extLst>
+      <p:ext uri="{BB962C8B-B14F-4D97-AF65-F5344CB8AC3E}">
+        <p14:creationId xmlns:p14="http://schemas.microsoft.com/office/powerpoint/2010/main" val="1138370165"/>
       </p:ext>
     </p:extLst>
   </p:cSld>
@@ -7918,6 +9852,2471 @@
     <p:extLst>
       <p:ext uri="{BB962C8B-B14F-4D97-AF65-F5344CB8AC3E}">
         <p14:creationId xmlns:p14="http://schemas.microsoft.com/office/powerpoint/2010/main" val="526178137"/>
+      </p:ext>
+    </p:extLst>
+  </p:cSld>
+  <p:clrMapOvr>
+    <a:masterClrMapping/>
+  </p:clrMapOvr>
+</p:sld>
+</file>
+
+<file path=ppt/slides/slide30.xml><?xml version="1.0" encoding="utf-8"?>
+<p:sld xmlns:a="http://schemas.openxmlformats.org/drawingml/2006/main" xmlns:r="http://schemas.openxmlformats.org/officeDocument/2006/relationships" xmlns:p="http://schemas.openxmlformats.org/presentationml/2006/main">
+  <p:cSld>
+    <p:spTree>
+      <p:nvGrpSpPr>
+        <p:cNvPr id="1" name="">
+          <a:extLst>
+            <a:ext uri="{FF2B5EF4-FFF2-40B4-BE49-F238E27FC236}">
+              <a16:creationId xmlns:a16="http://schemas.microsoft.com/office/drawing/2014/main" id="{114B43C6-7625-4C71-3006-FC26D19E65B3}"/>
+            </a:ext>
+          </a:extLst>
+        </p:cNvPr>
+        <p:cNvGrpSpPr/>
+        <p:nvPr/>
+      </p:nvGrpSpPr>
+      <p:grpSpPr>
+        <a:xfrm>
+          <a:off x="0" y="0"/>
+          <a:ext cx="0" cy="0"/>
+          <a:chOff x="0" y="0"/>
+          <a:chExt cx="0" cy="0"/>
+        </a:xfrm>
+      </p:grpSpPr>
+      <p:sp>
+        <p:nvSpPr>
+          <p:cNvPr id="2" name="Titolo della lezione">
+            <a:extLst>
+              <a:ext uri="{FF2B5EF4-FFF2-40B4-BE49-F238E27FC236}">
+                <a16:creationId xmlns:a16="http://schemas.microsoft.com/office/drawing/2014/main" id="{6E456DBD-B62E-025A-7197-C27FAFA29C05}"/>
+              </a:ext>
+            </a:extLst>
+          </p:cNvPr>
+          <p:cNvSpPr>
+            <a:spLocks noGrp="1"/>
+          </p:cNvSpPr>
+          <p:nvPr>
+            <p:ph type="title"/>
+          </p:nvPr>
+        </p:nvSpPr>
+        <p:spPr>
+          <a:xfrm>
+            <a:off x="838200" y="831206"/>
+            <a:ext cx="10515600" cy="314198"/>
+          </a:xfrm>
+        </p:spPr>
+        <p:txBody>
+          <a:bodyPr/>
+          <a:lstStyle/>
+          <a:p>
+            <a:r>
+              <a:rPr lang="it-IT" dirty="0"/>
+              <a:t>SLIDE 28: L'ANATOMIA DELLO YAML DI UN DEPLOYMENT – CAPIRE I DUE LIVELLI</a:t>
+            </a:r>
+          </a:p>
+        </p:txBody>
+      </p:sp>
+      <p:sp>
+        <p:nvSpPr>
+          <p:cNvPr id="3" name="Contenuto della lezione">
+            <a:extLst>
+              <a:ext uri="{FF2B5EF4-FFF2-40B4-BE49-F238E27FC236}">
+                <a16:creationId xmlns:a16="http://schemas.microsoft.com/office/drawing/2014/main" id="{074B0FDD-4FE9-99AA-1027-093D08F88B8E}"/>
+              </a:ext>
+            </a:extLst>
+          </p:cNvPr>
+          <p:cNvSpPr>
+            <a:spLocks noGrp="1"/>
+          </p:cNvSpPr>
+          <p:nvPr>
+            <p:ph idx="1"/>
+          </p:nvPr>
+        </p:nvSpPr>
+        <p:spPr>
+          <a:xfrm>
+            <a:off x="1317319" y="1633943"/>
+            <a:ext cx="4964609" cy="4803369"/>
+          </a:xfrm>
+        </p:spPr>
+        <p:txBody>
+          <a:bodyPr/>
+          <a:lstStyle/>
+          <a:p>
+            <a:r>
+              <a:rPr lang="it-IT" dirty="0"/>
+              <a:t>Il template è il modello che il Deployment userà per generare i </a:t>
+            </a:r>
+            <a:r>
+              <a:rPr lang="it-IT" dirty="0" err="1"/>
+              <a:t>Pod</a:t>
+            </a:r>
+            <a:r>
+              <a:rPr lang="it-IT" dirty="0"/>
+              <a:t>.</a:t>
+            </a:r>
+          </a:p>
+          <a:p>
+            <a:r>
+              <a:rPr lang="it-IT" dirty="0"/>
+              <a:t>La voce template segue esattamente la </a:t>
+            </a:r>
+            <a:r>
+              <a:rPr lang="it-IT" dirty="0">
+                <a:solidFill>
+                  <a:srgbClr val="171FE2"/>
+                </a:solidFill>
+              </a:rPr>
+              <a:t>stessa identica struttura del vecchio </a:t>
+            </a:r>
+            <a:r>
+              <a:rPr lang="it-IT" dirty="0" err="1">
+                <a:solidFill>
+                  <a:srgbClr val="171FE2"/>
+                </a:solidFill>
+              </a:rPr>
+              <a:t>Pod</a:t>
+            </a:r>
+            <a:r>
+              <a:rPr lang="it-IT" dirty="0">
+                <a:solidFill>
+                  <a:srgbClr val="171FE2"/>
+                </a:solidFill>
+              </a:rPr>
+              <a:t> singolo</a:t>
+            </a:r>
+            <a:r>
+              <a:rPr lang="it-IT" dirty="0"/>
+              <a:t>: avrà la Label che corrisponde al selettore del capo e la sua sotto-</a:t>
+            </a:r>
+            <a:r>
+              <a:rPr lang="it-IT" dirty="0" err="1"/>
+              <a:t>spec</a:t>
+            </a:r>
+            <a:r>
+              <a:rPr lang="it-IT" dirty="0"/>
+              <a:t> dove dichiariamo i container e le immagini Docker da scaricare.</a:t>
+            </a:r>
+          </a:p>
+          <a:p>
+            <a:r>
+              <a:rPr lang="it-IT" dirty="0">
+                <a:solidFill>
+                  <a:srgbClr val="171FE2"/>
+                </a:solidFill>
+              </a:rPr>
+              <a:t>Il Deployment userà questo stampo per riprodurre i </a:t>
+            </a:r>
+            <a:r>
+              <a:rPr lang="it-IT" dirty="0" err="1">
+                <a:solidFill>
+                  <a:srgbClr val="171FE2"/>
+                </a:solidFill>
+              </a:rPr>
+              <a:t>Pod</a:t>
+            </a:r>
+            <a:r>
+              <a:rPr lang="it-IT" dirty="0">
+                <a:solidFill>
+                  <a:srgbClr val="171FE2"/>
+                </a:solidFill>
+              </a:rPr>
+              <a:t> in serie.</a:t>
+            </a:r>
+          </a:p>
+        </p:txBody>
+      </p:sp>
+      <p:sp>
+        <p:nvSpPr>
+          <p:cNvPr id="5" name="CasellaDiTesto 4">
+            <a:extLst>
+              <a:ext uri="{FF2B5EF4-FFF2-40B4-BE49-F238E27FC236}">
+                <a16:creationId xmlns:a16="http://schemas.microsoft.com/office/drawing/2014/main" id="{01DA60E3-2D15-B1EE-B849-42CB5315F407}"/>
+              </a:ext>
+            </a:extLst>
+          </p:cNvPr>
+          <p:cNvSpPr txBox="1"/>
+          <p:nvPr/>
+        </p:nvSpPr>
+        <p:spPr>
+          <a:xfrm>
+            <a:off x="6757416" y="1357971"/>
+            <a:ext cx="4110421" cy="5355312"/>
+          </a:xfrm>
+          <a:prstGeom prst="rect">
+            <a:avLst/>
+          </a:prstGeom>
+          <a:noFill/>
+        </p:spPr>
+        <p:txBody>
+          <a:bodyPr wrap="none" rtlCol="0">
+            <a:spAutoFit/>
+          </a:bodyPr>
+          <a:lstStyle/>
+          <a:p>
+            <a:r>
+              <a:rPr lang="it-IT" dirty="0" err="1">
+                <a:solidFill>
+                  <a:srgbClr val="FF0000"/>
+                </a:solidFill>
+                <a:latin typeface="Consolas" panose="020B0609020204030204" pitchFamily="49" charset="0"/>
+              </a:rPr>
+              <a:t>apiVersion</a:t>
+            </a:r>
+            <a:r>
+              <a:rPr lang="it-IT" dirty="0">
+                <a:solidFill>
+                  <a:srgbClr val="FF0000"/>
+                </a:solidFill>
+                <a:latin typeface="Consolas" panose="020B0609020204030204" pitchFamily="49" charset="0"/>
+              </a:rPr>
+              <a:t>: apps/v1</a:t>
+            </a:r>
+          </a:p>
+          <a:p>
+            <a:r>
+              <a:rPr lang="it-IT" dirty="0" err="1">
+                <a:solidFill>
+                  <a:srgbClr val="FF0000"/>
+                </a:solidFill>
+                <a:latin typeface="Consolas" panose="020B0609020204030204" pitchFamily="49" charset="0"/>
+              </a:rPr>
+              <a:t>kind</a:t>
+            </a:r>
+            <a:r>
+              <a:rPr lang="it-IT" dirty="0">
+                <a:solidFill>
+                  <a:srgbClr val="FF0000"/>
+                </a:solidFill>
+                <a:latin typeface="Consolas" panose="020B0609020204030204" pitchFamily="49" charset="0"/>
+              </a:rPr>
+              <a:t>: Deployment</a:t>
+            </a:r>
+          </a:p>
+          <a:p>
+            <a:r>
+              <a:rPr lang="it-IT" dirty="0">
+                <a:solidFill>
+                  <a:srgbClr val="FF0000"/>
+                </a:solidFill>
+                <a:latin typeface="Consolas" panose="020B0609020204030204" pitchFamily="49" charset="0"/>
+              </a:rPr>
+              <a:t>metadata:</a:t>
+            </a:r>
+          </a:p>
+          <a:p>
+            <a:r>
+              <a:rPr lang="it-IT" dirty="0">
+                <a:solidFill>
+                  <a:srgbClr val="FF0000"/>
+                </a:solidFill>
+                <a:latin typeface="Consolas" panose="020B0609020204030204" pitchFamily="49" charset="0"/>
+              </a:rPr>
+              <a:t>  name: </a:t>
+            </a:r>
+            <a:r>
+              <a:rPr lang="it-IT" dirty="0" err="1">
+                <a:solidFill>
+                  <a:srgbClr val="FF0000"/>
+                </a:solidFill>
+                <a:latin typeface="Consolas" panose="020B0609020204030204" pitchFamily="49" charset="0"/>
+              </a:rPr>
+              <a:t>backend</a:t>
+            </a:r>
+            <a:r>
+              <a:rPr lang="it-IT" dirty="0">
+                <a:solidFill>
+                  <a:srgbClr val="FF0000"/>
+                </a:solidFill>
+                <a:latin typeface="Consolas" panose="020B0609020204030204" pitchFamily="49" charset="0"/>
+              </a:rPr>
+              <a:t>-deployment</a:t>
+            </a:r>
+          </a:p>
+          <a:p>
+            <a:r>
+              <a:rPr lang="it-IT" dirty="0" err="1">
+                <a:solidFill>
+                  <a:srgbClr val="FF0000"/>
+                </a:solidFill>
+                <a:latin typeface="Consolas" panose="020B0609020204030204" pitchFamily="49" charset="0"/>
+              </a:rPr>
+              <a:t>spec</a:t>
+            </a:r>
+            <a:r>
+              <a:rPr lang="it-IT" dirty="0">
+                <a:solidFill>
+                  <a:srgbClr val="FF0000"/>
+                </a:solidFill>
+                <a:latin typeface="Consolas" panose="020B0609020204030204" pitchFamily="49" charset="0"/>
+              </a:rPr>
+              <a:t>:</a:t>
+            </a:r>
+          </a:p>
+          <a:p>
+            <a:r>
+              <a:rPr lang="it-IT" dirty="0">
+                <a:solidFill>
+                  <a:srgbClr val="FF0000"/>
+                </a:solidFill>
+                <a:latin typeface="Consolas" panose="020B0609020204030204" pitchFamily="49" charset="0"/>
+              </a:rPr>
+              <a:t>  </a:t>
+            </a:r>
+            <a:r>
+              <a:rPr lang="it-IT" dirty="0" err="1">
+                <a:solidFill>
+                  <a:srgbClr val="FF0000"/>
+                </a:solidFill>
+                <a:latin typeface="Consolas" panose="020B0609020204030204" pitchFamily="49" charset="0"/>
+              </a:rPr>
+              <a:t>replicas</a:t>
+            </a:r>
+            <a:r>
+              <a:rPr lang="it-IT" dirty="0">
+                <a:solidFill>
+                  <a:srgbClr val="FF0000"/>
+                </a:solidFill>
+                <a:latin typeface="Consolas" panose="020B0609020204030204" pitchFamily="49" charset="0"/>
+              </a:rPr>
+              <a:t>: 3</a:t>
+            </a:r>
+          </a:p>
+          <a:p>
+            <a:r>
+              <a:rPr lang="it-IT" dirty="0">
+                <a:solidFill>
+                  <a:srgbClr val="FF0000"/>
+                </a:solidFill>
+                <a:latin typeface="Consolas" panose="020B0609020204030204" pitchFamily="49" charset="0"/>
+              </a:rPr>
+              <a:t>  selector:</a:t>
+            </a:r>
+          </a:p>
+          <a:p>
+            <a:r>
+              <a:rPr lang="it-IT" dirty="0">
+                <a:solidFill>
+                  <a:srgbClr val="FF0000"/>
+                </a:solidFill>
+                <a:latin typeface="Consolas" panose="020B0609020204030204" pitchFamily="49" charset="0"/>
+              </a:rPr>
+              <a:t>    </a:t>
+            </a:r>
+            <a:r>
+              <a:rPr lang="it-IT" dirty="0" err="1">
+                <a:solidFill>
+                  <a:srgbClr val="FF0000"/>
+                </a:solidFill>
+                <a:latin typeface="Consolas" panose="020B0609020204030204" pitchFamily="49" charset="0"/>
+              </a:rPr>
+              <a:t>matchLabels</a:t>
+            </a:r>
+            <a:r>
+              <a:rPr lang="it-IT" dirty="0">
+                <a:solidFill>
+                  <a:srgbClr val="FF0000"/>
+                </a:solidFill>
+                <a:latin typeface="Consolas" panose="020B0609020204030204" pitchFamily="49" charset="0"/>
+              </a:rPr>
+              <a:t>:</a:t>
+            </a:r>
+          </a:p>
+          <a:p>
+            <a:r>
+              <a:rPr lang="it-IT" dirty="0">
+                <a:solidFill>
+                  <a:srgbClr val="FF0000"/>
+                </a:solidFill>
+                <a:latin typeface="Consolas" panose="020B0609020204030204" pitchFamily="49" charset="0"/>
+              </a:rPr>
+              <a:t>      app: </a:t>
+            </a:r>
+            <a:r>
+              <a:rPr lang="it-IT" dirty="0" err="1">
+                <a:solidFill>
+                  <a:srgbClr val="FF0000"/>
+                </a:solidFill>
+                <a:latin typeface="Consolas" panose="020B0609020204030204" pitchFamily="49" charset="0"/>
+              </a:rPr>
+              <a:t>backend-enterprise</a:t>
+            </a:r>
+            <a:endParaRPr lang="it-IT" dirty="0">
+              <a:solidFill>
+                <a:srgbClr val="FF0000"/>
+              </a:solidFill>
+              <a:latin typeface="Consolas" panose="020B0609020204030204" pitchFamily="49" charset="0"/>
+            </a:endParaRPr>
+          </a:p>
+          <a:p>
+            <a:r>
+              <a:rPr lang="it-IT" dirty="0">
+                <a:solidFill>
+                  <a:srgbClr val="171FE2"/>
+                </a:solidFill>
+                <a:latin typeface="Consolas" panose="020B0609020204030204" pitchFamily="49" charset="0"/>
+              </a:rPr>
+              <a:t>  template:</a:t>
+            </a:r>
+          </a:p>
+          <a:p>
+            <a:r>
+              <a:rPr lang="it-IT" dirty="0">
+                <a:solidFill>
+                  <a:srgbClr val="171FE2"/>
+                </a:solidFill>
+                <a:latin typeface="Consolas" panose="020B0609020204030204" pitchFamily="49" charset="0"/>
+              </a:rPr>
+              <a:t>    metadata:</a:t>
+            </a:r>
+          </a:p>
+          <a:p>
+            <a:r>
+              <a:rPr lang="it-IT" dirty="0">
+                <a:solidFill>
+                  <a:srgbClr val="171FE2"/>
+                </a:solidFill>
+                <a:latin typeface="Consolas" panose="020B0609020204030204" pitchFamily="49" charset="0"/>
+              </a:rPr>
+              <a:t>      labels:</a:t>
+            </a:r>
+          </a:p>
+          <a:p>
+            <a:r>
+              <a:rPr lang="it-IT" dirty="0">
+                <a:solidFill>
+                  <a:srgbClr val="171FE2"/>
+                </a:solidFill>
+                <a:latin typeface="Consolas" panose="020B0609020204030204" pitchFamily="49" charset="0"/>
+              </a:rPr>
+              <a:t>        app: </a:t>
+            </a:r>
+            <a:r>
+              <a:rPr lang="it-IT" dirty="0" err="1">
+                <a:solidFill>
+                  <a:srgbClr val="171FE2"/>
+                </a:solidFill>
+                <a:latin typeface="Consolas" panose="020B0609020204030204" pitchFamily="49" charset="0"/>
+              </a:rPr>
+              <a:t>backend-enterprise</a:t>
+            </a:r>
+            <a:endParaRPr lang="it-IT" dirty="0">
+              <a:solidFill>
+                <a:srgbClr val="171FE2"/>
+              </a:solidFill>
+              <a:latin typeface="Consolas" panose="020B0609020204030204" pitchFamily="49" charset="0"/>
+            </a:endParaRPr>
+          </a:p>
+          <a:p>
+            <a:r>
+              <a:rPr lang="it-IT" dirty="0">
+                <a:solidFill>
+                  <a:srgbClr val="171FE2"/>
+                </a:solidFill>
+                <a:latin typeface="Consolas" panose="020B0609020204030204" pitchFamily="49" charset="0"/>
+              </a:rPr>
+              <a:t>    </a:t>
+            </a:r>
+            <a:r>
+              <a:rPr lang="it-IT" dirty="0" err="1">
+                <a:solidFill>
+                  <a:srgbClr val="171FE2"/>
+                </a:solidFill>
+                <a:latin typeface="Consolas" panose="020B0609020204030204" pitchFamily="49" charset="0"/>
+              </a:rPr>
+              <a:t>spec</a:t>
+            </a:r>
+            <a:r>
+              <a:rPr lang="it-IT" dirty="0">
+                <a:solidFill>
+                  <a:srgbClr val="171FE2"/>
+                </a:solidFill>
+                <a:latin typeface="Consolas" panose="020B0609020204030204" pitchFamily="49" charset="0"/>
+              </a:rPr>
+              <a:t>:</a:t>
+            </a:r>
+          </a:p>
+          <a:p>
+            <a:r>
+              <a:rPr lang="it-IT" dirty="0">
+                <a:solidFill>
+                  <a:srgbClr val="171FE2"/>
+                </a:solidFill>
+                <a:latin typeface="Consolas" panose="020B0609020204030204" pitchFamily="49" charset="0"/>
+              </a:rPr>
+              <a:t>      containers:</a:t>
+            </a:r>
+          </a:p>
+          <a:p>
+            <a:r>
+              <a:rPr lang="it-IT" dirty="0">
+                <a:solidFill>
+                  <a:srgbClr val="171FE2"/>
+                </a:solidFill>
+                <a:latin typeface="Consolas" panose="020B0609020204030204" pitchFamily="49" charset="0"/>
+              </a:rPr>
+              <a:t>      - name: java-container</a:t>
+            </a:r>
+          </a:p>
+          <a:p>
+            <a:r>
+              <a:rPr lang="it-IT" dirty="0">
+                <a:solidFill>
+                  <a:srgbClr val="171FE2"/>
+                </a:solidFill>
+                <a:latin typeface="Consolas" panose="020B0609020204030204" pitchFamily="49" charset="0"/>
+              </a:rPr>
+              <a:t>        image: </a:t>
+            </a:r>
+            <a:r>
+              <a:rPr lang="it-IT" dirty="0" err="1">
+                <a:solidFill>
+                  <a:srgbClr val="171FE2"/>
+                </a:solidFill>
+                <a:latin typeface="Consolas" panose="020B0609020204030204" pitchFamily="49" charset="0"/>
+              </a:rPr>
+              <a:t>nginx</a:t>
+            </a:r>
+            <a:endParaRPr lang="it-IT" dirty="0">
+              <a:solidFill>
+                <a:srgbClr val="171FE2"/>
+              </a:solidFill>
+              <a:latin typeface="Consolas" panose="020B0609020204030204" pitchFamily="49" charset="0"/>
+            </a:endParaRPr>
+          </a:p>
+          <a:p>
+            <a:r>
+              <a:rPr lang="it-IT" dirty="0">
+                <a:solidFill>
+                  <a:srgbClr val="171FE2"/>
+                </a:solidFill>
+                <a:latin typeface="Consolas" panose="020B0609020204030204" pitchFamily="49" charset="0"/>
+              </a:rPr>
+              <a:t>        ports:</a:t>
+            </a:r>
+          </a:p>
+          <a:p>
+            <a:r>
+              <a:rPr lang="it-IT" dirty="0">
+                <a:solidFill>
+                  <a:srgbClr val="171FE2"/>
+                </a:solidFill>
+                <a:latin typeface="Consolas" panose="020B0609020204030204" pitchFamily="49" charset="0"/>
+              </a:rPr>
+              <a:t>        - </a:t>
+            </a:r>
+            <a:r>
+              <a:rPr lang="it-IT" dirty="0" err="1">
+                <a:solidFill>
+                  <a:srgbClr val="171FE2"/>
+                </a:solidFill>
+                <a:latin typeface="Consolas" panose="020B0609020204030204" pitchFamily="49" charset="0"/>
+              </a:rPr>
+              <a:t>containerPort</a:t>
+            </a:r>
+            <a:r>
+              <a:rPr lang="it-IT" dirty="0">
+                <a:solidFill>
+                  <a:srgbClr val="171FE2"/>
+                </a:solidFill>
+                <a:latin typeface="Consolas" panose="020B0609020204030204" pitchFamily="49" charset="0"/>
+              </a:rPr>
+              <a:t>: 80</a:t>
+            </a:r>
+          </a:p>
+        </p:txBody>
+      </p:sp>
+    </p:spTree>
+    <p:extLst>
+      <p:ext uri="{BB962C8B-B14F-4D97-AF65-F5344CB8AC3E}">
+        <p14:creationId xmlns:p14="http://schemas.microsoft.com/office/powerpoint/2010/main" val="2596669519"/>
+      </p:ext>
+    </p:extLst>
+  </p:cSld>
+  <p:clrMapOvr>
+    <a:masterClrMapping/>
+  </p:clrMapOvr>
+</p:sld>
+</file>
+
+<file path=ppt/slides/slide31.xml><?xml version="1.0" encoding="utf-8"?>
+<p:sld xmlns:a="http://schemas.openxmlformats.org/drawingml/2006/main" xmlns:r="http://schemas.openxmlformats.org/officeDocument/2006/relationships" xmlns:p="http://schemas.openxmlformats.org/presentationml/2006/main">
+  <p:cSld>
+    <p:spTree>
+      <p:nvGrpSpPr>
+        <p:cNvPr id="1" name="">
+          <a:extLst>
+            <a:ext uri="{FF2B5EF4-FFF2-40B4-BE49-F238E27FC236}">
+              <a16:creationId xmlns:a16="http://schemas.microsoft.com/office/drawing/2014/main" id="{C3881354-C9E2-02B3-D61F-A53C8D916704}"/>
+            </a:ext>
+          </a:extLst>
+        </p:cNvPr>
+        <p:cNvGrpSpPr/>
+        <p:nvPr/>
+      </p:nvGrpSpPr>
+      <p:grpSpPr>
+        <a:xfrm>
+          <a:off x="0" y="0"/>
+          <a:ext cx="0" cy="0"/>
+          <a:chOff x="0" y="0"/>
+          <a:chExt cx="0" cy="0"/>
+        </a:xfrm>
+      </p:grpSpPr>
+      <p:sp>
+        <p:nvSpPr>
+          <p:cNvPr id="2" name="Titolo della lezione">
+            <a:extLst>
+              <a:ext uri="{FF2B5EF4-FFF2-40B4-BE49-F238E27FC236}">
+                <a16:creationId xmlns:a16="http://schemas.microsoft.com/office/drawing/2014/main" id="{CC7C8291-4B2C-8373-E2EF-BC459BAA6DD7}"/>
+              </a:ext>
+            </a:extLst>
+          </p:cNvPr>
+          <p:cNvSpPr>
+            <a:spLocks noGrp="1"/>
+          </p:cNvSpPr>
+          <p:nvPr>
+            <p:ph type="title"/>
+          </p:nvPr>
+        </p:nvSpPr>
+        <p:spPr>
+          <a:xfrm>
+            <a:off x="838200" y="831206"/>
+            <a:ext cx="10515600" cy="314198"/>
+          </a:xfrm>
+        </p:spPr>
+        <p:txBody>
+          <a:bodyPr/>
+          <a:lstStyle/>
+          <a:p>
+            <a:r>
+              <a:rPr lang="it-IT" dirty="0"/>
+              <a:t>SLIDE 29: LAB PRACTICAL – CREARE E DEPLOYARE IL PRIMO DEPLOYMENT MULTI-COPIA</a:t>
+            </a:r>
+          </a:p>
+        </p:txBody>
+      </p:sp>
+      <p:sp>
+        <p:nvSpPr>
+          <p:cNvPr id="3" name="Contenuto della lezione">
+            <a:extLst>
+              <a:ext uri="{FF2B5EF4-FFF2-40B4-BE49-F238E27FC236}">
+                <a16:creationId xmlns:a16="http://schemas.microsoft.com/office/drawing/2014/main" id="{5B841ECF-846F-587F-F6E1-B81478BC9F70}"/>
+              </a:ext>
+            </a:extLst>
+          </p:cNvPr>
+          <p:cNvSpPr>
+            <a:spLocks noGrp="1"/>
+          </p:cNvSpPr>
+          <p:nvPr>
+            <p:ph idx="1"/>
+          </p:nvPr>
+        </p:nvSpPr>
+        <p:spPr>
+          <a:xfrm>
+            <a:off x="1317319" y="1633943"/>
+            <a:ext cx="5257217" cy="4803369"/>
+          </a:xfrm>
+        </p:spPr>
+        <p:txBody>
+          <a:bodyPr/>
+          <a:lstStyle/>
+          <a:p>
+            <a:r>
+              <a:rPr lang="it-IT" dirty="0"/>
+              <a:t>Creeremo un manager incaricato di far girare tre repliche del nostro server.</a:t>
+            </a:r>
+          </a:p>
+          <a:p>
+            <a:r>
+              <a:rPr lang="it-IT" dirty="0"/>
+              <a:t>Iniziamo col fare una cartella sul Desktop, da aprire con un editor (VS Code).</a:t>
+            </a:r>
+          </a:p>
+          <a:p>
+            <a:r>
+              <a:rPr lang="it-IT" dirty="0"/>
+              <a:t>Creiamo un file con il nome </a:t>
+            </a:r>
+            <a:r>
+              <a:rPr lang="it-IT" b="1" dirty="0"/>
+              <a:t>deployment-</a:t>
+            </a:r>
+            <a:r>
+              <a:rPr lang="it-IT" b="1" dirty="0" err="1"/>
+              <a:t>backend.yaml</a:t>
+            </a:r>
+            <a:r>
+              <a:rPr lang="it-IT" b="1" dirty="0"/>
+              <a:t> </a:t>
+            </a:r>
+            <a:endParaRPr lang="it-IT" dirty="0"/>
+          </a:p>
+          <a:p>
+            <a:r>
+              <a:rPr lang="it-IT" dirty="0"/>
+              <a:t>Copiamo all'interno:</a:t>
+            </a:r>
+          </a:p>
+          <a:p>
+            <a:endParaRPr lang="it-IT" dirty="0"/>
+          </a:p>
+          <a:p>
+            <a:r>
+              <a:rPr lang="it-IT" dirty="0"/>
+              <a:t>Mettendoci poi nella cartella con un terminale, eseguiamo:</a:t>
+            </a:r>
+          </a:p>
+          <a:p>
+            <a:r>
+              <a:rPr lang="en-US" dirty="0" err="1">
+                <a:solidFill>
+                  <a:srgbClr val="171FE2"/>
+                </a:solidFill>
+                <a:latin typeface="Consolas" panose="020B0609020204030204" pitchFamily="49" charset="0"/>
+              </a:rPr>
+              <a:t>kubectl</a:t>
+            </a:r>
+            <a:r>
+              <a:rPr lang="en-US" dirty="0">
+                <a:solidFill>
+                  <a:srgbClr val="171FE2"/>
+                </a:solidFill>
+                <a:latin typeface="Consolas" panose="020B0609020204030204" pitchFamily="49" charset="0"/>
+              </a:rPr>
+              <a:t> apply -f deployment-</a:t>
+            </a:r>
+            <a:r>
+              <a:rPr lang="en-US" dirty="0" err="1">
+                <a:solidFill>
+                  <a:srgbClr val="171FE2"/>
+                </a:solidFill>
+                <a:latin typeface="Consolas" panose="020B0609020204030204" pitchFamily="49" charset="0"/>
+              </a:rPr>
+              <a:t>backend.yaml</a:t>
+            </a:r>
+            <a:endParaRPr lang="it-IT" dirty="0">
+              <a:solidFill>
+                <a:srgbClr val="171FE2"/>
+              </a:solidFill>
+              <a:latin typeface="Consolas" panose="020B0609020204030204" pitchFamily="49" charset="0"/>
+            </a:endParaRPr>
+          </a:p>
+        </p:txBody>
+      </p:sp>
+      <p:sp>
+        <p:nvSpPr>
+          <p:cNvPr id="4" name="CasellaDiTesto 3">
+            <a:extLst>
+              <a:ext uri="{FF2B5EF4-FFF2-40B4-BE49-F238E27FC236}">
+                <a16:creationId xmlns:a16="http://schemas.microsoft.com/office/drawing/2014/main" id="{025AF75E-8433-1E76-0A1B-AF52B4012A46}"/>
+              </a:ext>
+            </a:extLst>
+          </p:cNvPr>
+          <p:cNvSpPr txBox="1"/>
+          <p:nvPr/>
+        </p:nvSpPr>
+        <p:spPr>
+          <a:xfrm>
+            <a:off x="6757416" y="1357971"/>
+            <a:ext cx="4110421" cy="5355312"/>
+          </a:xfrm>
+          <a:prstGeom prst="rect">
+            <a:avLst/>
+          </a:prstGeom>
+          <a:noFill/>
+        </p:spPr>
+        <p:txBody>
+          <a:bodyPr wrap="none" rtlCol="0">
+            <a:spAutoFit/>
+          </a:bodyPr>
+          <a:lstStyle/>
+          <a:p>
+            <a:r>
+              <a:rPr lang="it-IT" dirty="0" err="1">
+                <a:solidFill>
+                  <a:srgbClr val="FF0000"/>
+                </a:solidFill>
+                <a:latin typeface="Consolas" panose="020B0609020204030204" pitchFamily="49" charset="0"/>
+              </a:rPr>
+              <a:t>apiVersion</a:t>
+            </a:r>
+            <a:r>
+              <a:rPr lang="it-IT" dirty="0">
+                <a:solidFill>
+                  <a:srgbClr val="FF0000"/>
+                </a:solidFill>
+                <a:latin typeface="Consolas" panose="020B0609020204030204" pitchFamily="49" charset="0"/>
+              </a:rPr>
+              <a:t>: apps/v1</a:t>
+            </a:r>
+          </a:p>
+          <a:p>
+            <a:r>
+              <a:rPr lang="it-IT" dirty="0" err="1">
+                <a:solidFill>
+                  <a:srgbClr val="FF0000"/>
+                </a:solidFill>
+                <a:latin typeface="Consolas" panose="020B0609020204030204" pitchFamily="49" charset="0"/>
+              </a:rPr>
+              <a:t>kind</a:t>
+            </a:r>
+            <a:r>
+              <a:rPr lang="it-IT" dirty="0">
+                <a:solidFill>
+                  <a:srgbClr val="FF0000"/>
+                </a:solidFill>
+                <a:latin typeface="Consolas" panose="020B0609020204030204" pitchFamily="49" charset="0"/>
+              </a:rPr>
+              <a:t>: Deployment</a:t>
+            </a:r>
+          </a:p>
+          <a:p>
+            <a:r>
+              <a:rPr lang="it-IT" dirty="0">
+                <a:solidFill>
+                  <a:srgbClr val="FF0000"/>
+                </a:solidFill>
+                <a:latin typeface="Consolas" panose="020B0609020204030204" pitchFamily="49" charset="0"/>
+              </a:rPr>
+              <a:t>metadata:</a:t>
+            </a:r>
+          </a:p>
+          <a:p>
+            <a:r>
+              <a:rPr lang="it-IT" dirty="0">
+                <a:solidFill>
+                  <a:srgbClr val="FF0000"/>
+                </a:solidFill>
+                <a:latin typeface="Consolas" panose="020B0609020204030204" pitchFamily="49" charset="0"/>
+              </a:rPr>
+              <a:t>  name: </a:t>
+            </a:r>
+            <a:r>
+              <a:rPr lang="it-IT" dirty="0" err="1">
+                <a:solidFill>
+                  <a:srgbClr val="FF0000"/>
+                </a:solidFill>
+                <a:latin typeface="Consolas" panose="020B0609020204030204" pitchFamily="49" charset="0"/>
+              </a:rPr>
+              <a:t>backend</a:t>
+            </a:r>
+            <a:r>
+              <a:rPr lang="it-IT" dirty="0">
+                <a:solidFill>
+                  <a:srgbClr val="FF0000"/>
+                </a:solidFill>
+                <a:latin typeface="Consolas" panose="020B0609020204030204" pitchFamily="49" charset="0"/>
+              </a:rPr>
+              <a:t>-deployment</a:t>
+            </a:r>
+          </a:p>
+          <a:p>
+            <a:r>
+              <a:rPr lang="it-IT" dirty="0" err="1">
+                <a:solidFill>
+                  <a:srgbClr val="FF0000"/>
+                </a:solidFill>
+                <a:latin typeface="Consolas" panose="020B0609020204030204" pitchFamily="49" charset="0"/>
+              </a:rPr>
+              <a:t>spec</a:t>
+            </a:r>
+            <a:r>
+              <a:rPr lang="it-IT" dirty="0">
+                <a:solidFill>
+                  <a:srgbClr val="FF0000"/>
+                </a:solidFill>
+                <a:latin typeface="Consolas" panose="020B0609020204030204" pitchFamily="49" charset="0"/>
+              </a:rPr>
+              <a:t>:</a:t>
+            </a:r>
+          </a:p>
+          <a:p>
+            <a:r>
+              <a:rPr lang="it-IT" dirty="0">
+                <a:solidFill>
+                  <a:srgbClr val="FF0000"/>
+                </a:solidFill>
+                <a:latin typeface="Consolas" panose="020B0609020204030204" pitchFamily="49" charset="0"/>
+              </a:rPr>
+              <a:t>  </a:t>
+            </a:r>
+            <a:r>
+              <a:rPr lang="it-IT" dirty="0" err="1">
+                <a:solidFill>
+                  <a:srgbClr val="FF0000"/>
+                </a:solidFill>
+                <a:latin typeface="Consolas" panose="020B0609020204030204" pitchFamily="49" charset="0"/>
+              </a:rPr>
+              <a:t>replicas</a:t>
+            </a:r>
+            <a:r>
+              <a:rPr lang="it-IT" dirty="0">
+                <a:solidFill>
+                  <a:srgbClr val="FF0000"/>
+                </a:solidFill>
+                <a:latin typeface="Consolas" panose="020B0609020204030204" pitchFamily="49" charset="0"/>
+              </a:rPr>
+              <a:t>: 3</a:t>
+            </a:r>
+          </a:p>
+          <a:p>
+            <a:r>
+              <a:rPr lang="it-IT" dirty="0">
+                <a:solidFill>
+                  <a:srgbClr val="FF0000"/>
+                </a:solidFill>
+                <a:latin typeface="Consolas" panose="020B0609020204030204" pitchFamily="49" charset="0"/>
+              </a:rPr>
+              <a:t>  selector:</a:t>
+            </a:r>
+          </a:p>
+          <a:p>
+            <a:r>
+              <a:rPr lang="it-IT" dirty="0">
+                <a:solidFill>
+                  <a:srgbClr val="FF0000"/>
+                </a:solidFill>
+                <a:latin typeface="Consolas" panose="020B0609020204030204" pitchFamily="49" charset="0"/>
+              </a:rPr>
+              <a:t>    </a:t>
+            </a:r>
+            <a:r>
+              <a:rPr lang="it-IT" dirty="0" err="1">
+                <a:solidFill>
+                  <a:srgbClr val="FF0000"/>
+                </a:solidFill>
+                <a:latin typeface="Consolas" panose="020B0609020204030204" pitchFamily="49" charset="0"/>
+              </a:rPr>
+              <a:t>matchLabels</a:t>
+            </a:r>
+            <a:r>
+              <a:rPr lang="it-IT" dirty="0">
+                <a:solidFill>
+                  <a:srgbClr val="FF0000"/>
+                </a:solidFill>
+                <a:latin typeface="Consolas" panose="020B0609020204030204" pitchFamily="49" charset="0"/>
+              </a:rPr>
+              <a:t>:</a:t>
+            </a:r>
+          </a:p>
+          <a:p>
+            <a:r>
+              <a:rPr lang="it-IT" dirty="0">
+                <a:solidFill>
+                  <a:srgbClr val="FF0000"/>
+                </a:solidFill>
+                <a:latin typeface="Consolas" panose="020B0609020204030204" pitchFamily="49" charset="0"/>
+              </a:rPr>
+              <a:t>      app: </a:t>
+            </a:r>
+            <a:r>
+              <a:rPr lang="it-IT" dirty="0" err="1">
+                <a:solidFill>
+                  <a:srgbClr val="FF0000"/>
+                </a:solidFill>
+                <a:latin typeface="Consolas" panose="020B0609020204030204" pitchFamily="49" charset="0"/>
+              </a:rPr>
+              <a:t>backend-enterprise</a:t>
+            </a:r>
+            <a:endParaRPr lang="it-IT" dirty="0">
+              <a:solidFill>
+                <a:srgbClr val="FF0000"/>
+              </a:solidFill>
+              <a:latin typeface="Consolas" panose="020B0609020204030204" pitchFamily="49" charset="0"/>
+            </a:endParaRPr>
+          </a:p>
+          <a:p>
+            <a:r>
+              <a:rPr lang="it-IT" dirty="0">
+                <a:solidFill>
+                  <a:srgbClr val="171FE2"/>
+                </a:solidFill>
+                <a:latin typeface="Consolas" panose="020B0609020204030204" pitchFamily="49" charset="0"/>
+              </a:rPr>
+              <a:t>  template:</a:t>
+            </a:r>
+          </a:p>
+          <a:p>
+            <a:r>
+              <a:rPr lang="it-IT" dirty="0">
+                <a:solidFill>
+                  <a:srgbClr val="171FE2"/>
+                </a:solidFill>
+                <a:latin typeface="Consolas" panose="020B0609020204030204" pitchFamily="49" charset="0"/>
+              </a:rPr>
+              <a:t>    metadata:</a:t>
+            </a:r>
+          </a:p>
+          <a:p>
+            <a:r>
+              <a:rPr lang="it-IT" dirty="0">
+                <a:solidFill>
+                  <a:srgbClr val="171FE2"/>
+                </a:solidFill>
+                <a:latin typeface="Consolas" panose="020B0609020204030204" pitchFamily="49" charset="0"/>
+              </a:rPr>
+              <a:t>      labels:</a:t>
+            </a:r>
+          </a:p>
+          <a:p>
+            <a:r>
+              <a:rPr lang="it-IT" dirty="0">
+                <a:solidFill>
+                  <a:srgbClr val="171FE2"/>
+                </a:solidFill>
+                <a:latin typeface="Consolas" panose="020B0609020204030204" pitchFamily="49" charset="0"/>
+              </a:rPr>
+              <a:t>        app: </a:t>
+            </a:r>
+            <a:r>
+              <a:rPr lang="it-IT" dirty="0" err="1">
+                <a:solidFill>
+                  <a:srgbClr val="171FE2"/>
+                </a:solidFill>
+                <a:latin typeface="Consolas" panose="020B0609020204030204" pitchFamily="49" charset="0"/>
+              </a:rPr>
+              <a:t>backend-enterprise</a:t>
+            </a:r>
+            <a:endParaRPr lang="it-IT" dirty="0">
+              <a:solidFill>
+                <a:srgbClr val="171FE2"/>
+              </a:solidFill>
+              <a:latin typeface="Consolas" panose="020B0609020204030204" pitchFamily="49" charset="0"/>
+            </a:endParaRPr>
+          </a:p>
+          <a:p>
+            <a:r>
+              <a:rPr lang="it-IT" dirty="0">
+                <a:solidFill>
+                  <a:srgbClr val="171FE2"/>
+                </a:solidFill>
+                <a:latin typeface="Consolas" panose="020B0609020204030204" pitchFamily="49" charset="0"/>
+              </a:rPr>
+              <a:t>    </a:t>
+            </a:r>
+            <a:r>
+              <a:rPr lang="it-IT" dirty="0" err="1">
+                <a:solidFill>
+                  <a:srgbClr val="171FE2"/>
+                </a:solidFill>
+                <a:latin typeface="Consolas" panose="020B0609020204030204" pitchFamily="49" charset="0"/>
+              </a:rPr>
+              <a:t>spec</a:t>
+            </a:r>
+            <a:r>
+              <a:rPr lang="it-IT" dirty="0">
+                <a:solidFill>
+                  <a:srgbClr val="171FE2"/>
+                </a:solidFill>
+                <a:latin typeface="Consolas" panose="020B0609020204030204" pitchFamily="49" charset="0"/>
+              </a:rPr>
+              <a:t>:</a:t>
+            </a:r>
+          </a:p>
+          <a:p>
+            <a:r>
+              <a:rPr lang="it-IT" dirty="0">
+                <a:solidFill>
+                  <a:srgbClr val="171FE2"/>
+                </a:solidFill>
+                <a:latin typeface="Consolas" panose="020B0609020204030204" pitchFamily="49" charset="0"/>
+              </a:rPr>
+              <a:t>      containers:</a:t>
+            </a:r>
+          </a:p>
+          <a:p>
+            <a:r>
+              <a:rPr lang="it-IT" dirty="0">
+                <a:solidFill>
+                  <a:srgbClr val="171FE2"/>
+                </a:solidFill>
+                <a:latin typeface="Consolas" panose="020B0609020204030204" pitchFamily="49" charset="0"/>
+              </a:rPr>
+              <a:t>      - name: java-container</a:t>
+            </a:r>
+          </a:p>
+          <a:p>
+            <a:r>
+              <a:rPr lang="it-IT" dirty="0">
+                <a:solidFill>
+                  <a:srgbClr val="171FE2"/>
+                </a:solidFill>
+                <a:latin typeface="Consolas" panose="020B0609020204030204" pitchFamily="49" charset="0"/>
+              </a:rPr>
+              <a:t>        image: </a:t>
+            </a:r>
+            <a:r>
+              <a:rPr lang="it-IT" dirty="0" err="1">
+                <a:solidFill>
+                  <a:srgbClr val="171FE2"/>
+                </a:solidFill>
+                <a:latin typeface="Consolas" panose="020B0609020204030204" pitchFamily="49" charset="0"/>
+              </a:rPr>
+              <a:t>nginx</a:t>
+            </a:r>
+            <a:endParaRPr lang="it-IT" dirty="0">
+              <a:solidFill>
+                <a:srgbClr val="171FE2"/>
+              </a:solidFill>
+              <a:latin typeface="Consolas" panose="020B0609020204030204" pitchFamily="49" charset="0"/>
+            </a:endParaRPr>
+          </a:p>
+          <a:p>
+            <a:r>
+              <a:rPr lang="it-IT" dirty="0">
+                <a:solidFill>
+                  <a:srgbClr val="171FE2"/>
+                </a:solidFill>
+                <a:latin typeface="Consolas" panose="020B0609020204030204" pitchFamily="49" charset="0"/>
+              </a:rPr>
+              <a:t>        ports:</a:t>
+            </a:r>
+          </a:p>
+          <a:p>
+            <a:r>
+              <a:rPr lang="it-IT" dirty="0">
+                <a:solidFill>
+                  <a:srgbClr val="171FE2"/>
+                </a:solidFill>
+                <a:latin typeface="Consolas" panose="020B0609020204030204" pitchFamily="49" charset="0"/>
+              </a:rPr>
+              <a:t>        - </a:t>
+            </a:r>
+            <a:r>
+              <a:rPr lang="it-IT" dirty="0" err="1">
+                <a:solidFill>
+                  <a:srgbClr val="171FE2"/>
+                </a:solidFill>
+                <a:latin typeface="Consolas" panose="020B0609020204030204" pitchFamily="49" charset="0"/>
+              </a:rPr>
+              <a:t>containerPort</a:t>
+            </a:r>
+            <a:r>
+              <a:rPr lang="it-IT" dirty="0">
+                <a:solidFill>
+                  <a:srgbClr val="171FE2"/>
+                </a:solidFill>
+                <a:latin typeface="Consolas" panose="020B0609020204030204" pitchFamily="49" charset="0"/>
+              </a:rPr>
+              <a:t>: 80</a:t>
+            </a:r>
+          </a:p>
+        </p:txBody>
+      </p:sp>
+      <p:sp>
+        <p:nvSpPr>
+          <p:cNvPr id="5" name="Freccia a destra 4">
+            <a:extLst>
+              <a:ext uri="{FF2B5EF4-FFF2-40B4-BE49-F238E27FC236}">
+                <a16:creationId xmlns:a16="http://schemas.microsoft.com/office/drawing/2014/main" id="{FBB102CD-C70A-DC57-9C35-3E9DAC018C14}"/>
+              </a:ext>
+            </a:extLst>
+          </p:cNvPr>
+          <p:cNvSpPr/>
+          <p:nvPr/>
+        </p:nvSpPr>
+        <p:spPr>
+          <a:xfrm>
+            <a:off x="3749040" y="3285819"/>
+            <a:ext cx="3127248" cy="749808"/>
+          </a:xfrm>
+          <a:prstGeom prst="rightArrow">
+            <a:avLst/>
+          </a:prstGeom>
+        </p:spPr>
+        <p:style>
+          <a:lnRef idx="2">
+            <a:schemeClr val="accent1">
+              <a:shade val="15000"/>
+            </a:schemeClr>
+          </a:lnRef>
+          <a:fillRef idx="1">
+            <a:schemeClr val="accent1"/>
+          </a:fillRef>
+          <a:effectRef idx="0">
+            <a:schemeClr val="accent1"/>
+          </a:effectRef>
+          <a:fontRef idx="minor">
+            <a:schemeClr val="lt1"/>
+          </a:fontRef>
+        </p:style>
+        <p:txBody>
+          <a:bodyPr rtlCol="0" anchor="ctr"/>
+          <a:lstStyle/>
+          <a:p>
+            <a:pPr algn="ctr"/>
+            <a:endParaRPr lang="it-IT"/>
+          </a:p>
+        </p:txBody>
+      </p:sp>
+    </p:spTree>
+    <p:extLst>
+      <p:ext uri="{BB962C8B-B14F-4D97-AF65-F5344CB8AC3E}">
+        <p14:creationId xmlns:p14="http://schemas.microsoft.com/office/powerpoint/2010/main" val="3159631043"/>
+      </p:ext>
+    </p:extLst>
+  </p:cSld>
+  <p:clrMapOvr>
+    <a:masterClrMapping/>
+  </p:clrMapOvr>
+</p:sld>
+</file>
+
+<file path=ppt/slides/slide32.xml><?xml version="1.0" encoding="utf-8"?>
+<p:sld xmlns:a="http://schemas.openxmlformats.org/drawingml/2006/main" xmlns:r="http://schemas.openxmlformats.org/officeDocument/2006/relationships" xmlns:p="http://schemas.openxmlformats.org/presentationml/2006/main">
+  <p:cSld>
+    <p:spTree>
+      <p:nvGrpSpPr>
+        <p:cNvPr id="1" name="">
+          <a:extLst>
+            <a:ext uri="{FF2B5EF4-FFF2-40B4-BE49-F238E27FC236}">
+              <a16:creationId xmlns:a16="http://schemas.microsoft.com/office/drawing/2014/main" id="{3E3AA405-8447-4CF3-A0F9-CE8BE3C7473E}"/>
+            </a:ext>
+          </a:extLst>
+        </p:cNvPr>
+        <p:cNvGrpSpPr/>
+        <p:nvPr/>
+      </p:nvGrpSpPr>
+      <p:grpSpPr>
+        <a:xfrm>
+          <a:off x="0" y="0"/>
+          <a:ext cx="0" cy="0"/>
+          <a:chOff x="0" y="0"/>
+          <a:chExt cx="0" cy="0"/>
+        </a:xfrm>
+      </p:grpSpPr>
+      <p:sp>
+        <p:nvSpPr>
+          <p:cNvPr id="2" name="Titolo della lezione">
+            <a:extLst>
+              <a:ext uri="{FF2B5EF4-FFF2-40B4-BE49-F238E27FC236}">
+                <a16:creationId xmlns:a16="http://schemas.microsoft.com/office/drawing/2014/main" id="{16640E8A-884B-9002-C43A-73289EED6174}"/>
+              </a:ext>
+            </a:extLst>
+          </p:cNvPr>
+          <p:cNvSpPr>
+            <a:spLocks noGrp="1"/>
+          </p:cNvSpPr>
+          <p:nvPr>
+            <p:ph type="title"/>
+          </p:nvPr>
+        </p:nvSpPr>
+        <p:spPr>
+          <a:xfrm>
+            <a:off x="838200" y="831206"/>
+            <a:ext cx="10515600" cy="314198"/>
+          </a:xfrm>
+        </p:spPr>
+        <p:txBody>
+          <a:bodyPr/>
+          <a:lstStyle/>
+          <a:p>
+            <a:r>
+              <a:rPr lang="it-IT" dirty="0"/>
+              <a:t>SLIDE 30: LAB PRACTICAL – CREARE E DEPLOYARE IL PRIMO DEPLOYMENT MULTI-COPIA</a:t>
+            </a:r>
+          </a:p>
+        </p:txBody>
+      </p:sp>
+      <p:sp>
+        <p:nvSpPr>
+          <p:cNvPr id="3" name="Contenuto della lezione">
+            <a:extLst>
+              <a:ext uri="{FF2B5EF4-FFF2-40B4-BE49-F238E27FC236}">
+                <a16:creationId xmlns:a16="http://schemas.microsoft.com/office/drawing/2014/main" id="{1ACB1A85-ACE0-B74B-11E4-EEA85E43A4B6}"/>
+              </a:ext>
+            </a:extLst>
+          </p:cNvPr>
+          <p:cNvSpPr>
+            <a:spLocks noGrp="1"/>
+          </p:cNvSpPr>
+          <p:nvPr>
+            <p:ph idx="1"/>
+          </p:nvPr>
+        </p:nvSpPr>
+        <p:spPr>
+          <a:xfrm>
+            <a:off x="1317319" y="1633943"/>
+            <a:ext cx="5257217" cy="4803369"/>
+          </a:xfrm>
+        </p:spPr>
+        <p:txBody>
+          <a:bodyPr/>
+          <a:lstStyle/>
+          <a:p>
+            <a:r>
+              <a:rPr lang="it-IT" dirty="0"/>
+              <a:t>Il terminale risponderà confermando l'azione: </a:t>
+            </a:r>
+            <a:r>
+              <a:rPr lang="it-IT" sz="1600" dirty="0" err="1">
+                <a:solidFill>
+                  <a:srgbClr val="171FE2"/>
+                </a:solidFill>
+                <a:latin typeface="Consolas" panose="020B0609020204030204" pitchFamily="49" charset="0"/>
+              </a:rPr>
+              <a:t>deployment.apps</a:t>
+            </a:r>
+            <a:r>
+              <a:rPr lang="it-IT" sz="1600" dirty="0">
+                <a:solidFill>
+                  <a:srgbClr val="171FE2"/>
+                </a:solidFill>
+                <a:latin typeface="Consolas" panose="020B0609020204030204" pitchFamily="49" charset="0"/>
+              </a:rPr>
+              <a:t>/</a:t>
+            </a:r>
+            <a:r>
+              <a:rPr lang="it-IT" sz="1600" dirty="0" err="1">
+                <a:solidFill>
+                  <a:srgbClr val="171FE2"/>
+                </a:solidFill>
+                <a:latin typeface="Consolas" panose="020B0609020204030204" pitchFamily="49" charset="0"/>
+              </a:rPr>
+              <a:t>backend</a:t>
+            </a:r>
+            <a:r>
+              <a:rPr lang="it-IT" sz="1600" dirty="0">
+                <a:solidFill>
+                  <a:srgbClr val="171FE2"/>
+                </a:solidFill>
+                <a:latin typeface="Consolas" panose="020B0609020204030204" pitchFamily="49" charset="0"/>
+              </a:rPr>
+              <a:t>-deployment </a:t>
+            </a:r>
+            <a:r>
+              <a:rPr lang="it-IT" sz="1600" dirty="0" err="1">
+                <a:solidFill>
+                  <a:srgbClr val="171FE2"/>
+                </a:solidFill>
+                <a:latin typeface="Consolas" panose="020B0609020204030204" pitchFamily="49" charset="0"/>
+              </a:rPr>
+              <a:t>created</a:t>
+            </a:r>
+            <a:r>
+              <a:rPr lang="it-IT" sz="1600" dirty="0"/>
+              <a:t>. </a:t>
+            </a:r>
+          </a:p>
+          <a:p>
+            <a:r>
+              <a:rPr lang="it-IT" dirty="0"/>
+              <a:t>Adesso, lanciamo il comando per vedere cosa è successo a livello di </a:t>
+            </a:r>
+            <a:r>
+              <a:rPr lang="it-IT" dirty="0" err="1"/>
+              <a:t>Pod</a:t>
+            </a:r>
+            <a:r>
+              <a:rPr lang="it-IT" dirty="0"/>
+              <a:t> nel cluster: </a:t>
+            </a:r>
+          </a:p>
+          <a:p>
+            <a:r>
+              <a:rPr lang="it-IT" sz="1600" dirty="0" err="1">
+                <a:solidFill>
+                  <a:srgbClr val="171FE2"/>
+                </a:solidFill>
+                <a:latin typeface="Consolas" panose="020B0609020204030204" pitchFamily="49" charset="0"/>
+              </a:rPr>
+              <a:t>kubectl</a:t>
+            </a:r>
+            <a:r>
+              <a:rPr lang="it-IT" sz="1600" dirty="0">
+                <a:solidFill>
+                  <a:srgbClr val="171FE2"/>
+                </a:solidFill>
+                <a:latin typeface="Consolas" panose="020B0609020204030204" pitchFamily="49" charset="0"/>
+              </a:rPr>
+              <a:t> </a:t>
+            </a:r>
+            <a:r>
+              <a:rPr lang="it-IT" sz="1600" dirty="0" err="1">
+                <a:solidFill>
+                  <a:srgbClr val="171FE2"/>
+                </a:solidFill>
+                <a:latin typeface="Consolas" panose="020B0609020204030204" pitchFamily="49" charset="0"/>
+              </a:rPr>
+              <a:t>get</a:t>
+            </a:r>
+            <a:r>
+              <a:rPr lang="it-IT" sz="1600" dirty="0">
+                <a:solidFill>
+                  <a:srgbClr val="171FE2"/>
+                </a:solidFill>
+                <a:latin typeface="Consolas" panose="020B0609020204030204" pitchFamily="49" charset="0"/>
+              </a:rPr>
+              <a:t> </a:t>
+            </a:r>
+            <a:r>
+              <a:rPr lang="it-IT" sz="1600" dirty="0" err="1">
+                <a:solidFill>
+                  <a:srgbClr val="171FE2"/>
+                </a:solidFill>
+                <a:latin typeface="Consolas" panose="020B0609020204030204" pitchFamily="49" charset="0"/>
+              </a:rPr>
+              <a:t>pods</a:t>
+            </a:r>
+            <a:endParaRPr lang="it-IT" dirty="0">
+              <a:solidFill>
+                <a:srgbClr val="171FE2"/>
+              </a:solidFill>
+              <a:latin typeface="Consolas" panose="020B0609020204030204" pitchFamily="49" charset="0"/>
+            </a:endParaRPr>
+          </a:p>
+          <a:p>
+            <a:endParaRPr lang="it-IT" dirty="0">
+              <a:solidFill>
+                <a:srgbClr val="171FE2"/>
+              </a:solidFill>
+              <a:latin typeface="Consolas" panose="020B0609020204030204" pitchFamily="49" charset="0"/>
+            </a:endParaRPr>
+          </a:p>
+          <a:p>
+            <a:endParaRPr lang="it-IT" dirty="0"/>
+          </a:p>
+          <a:p>
+            <a:r>
+              <a:rPr lang="it-IT" dirty="0"/>
+              <a:t>Vediamo i 3 </a:t>
+            </a:r>
+            <a:r>
+              <a:rPr lang="it-IT" dirty="0" err="1"/>
+              <a:t>Pod</a:t>
+            </a:r>
+            <a:r>
+              <a:rPr lang="it-IT" dirty="0"/>
+              <a:t> </a:t>
+            </a:r>
+            <a:r>
+              <a:rPr lang="it-IT" dirty="0" err="1"/>
+              <a:t>backend</a:t>
+            </a:r>
+            <a:r>
+              <a:rPr lang="it-IT" dirty="0"/>
+              <a:t>-deployment- seguito da un codice alfanumerico casuale generato in automatico dal manager per evitare conflitto di nome. </a:t>
+            </a:r>
+            <a:r>
+              <a:rPr lang="it-IT" b="1" dirty="0"/>
+              <a:t>Tutti e tre nello stato Running.</a:t>
+            </a:r>
+          </a:p>
+          <a:p>
+            <a:r>
+              <a:rPr lang="it-IT" dirty="0">
+                <a:solidFill>
+                  <a:srgbClr val="171FE2"/>
+                </a:solidFill>
+              </a:rPr>
+              <a:t>Per il Deployment, la chiave </a:t>
+            </a:r>
+            <a:r>
+              <a:rPr lang="it-IT" dirty="0" err="1">
+                <a:solidFill>
+                  <a:srgbClr val="171FE2"/>
+                </a:solidFill>
+              </a:rPr>
+              <a:t>apiVersion</a:t>
+            </a:r>
+            <a:r>
+              <a:rPr lang="it-IT" dirty="0">
+                <a:solidFill>
+                  <a:srgbClr val="171FE2"/>
+                </a:solidFill>
+              </a:rPr>
+              <a:t> non è più v1 da sola, ma è </a:t>
+            </a:r>
+            <a:r>
+              <a:rPr lang="it-IT" b="1" dirty="0">
+                <a:solidFill>
+                  <a:srgbClr val="171FE2"/>
+                </a:solidFill>
+              </a:rPr>
+              <a:t>apps/v1.</a:t>
+            </a:r>
+          </a:p>
+          <a:p>
+            <a:r>
+              <a:rPr lang="it-IT" dirty="0"/>
+              <a:t>Questo succede perché il Deployment fa parte di un pacchetto di funzionalità avanzate (chiamato gruppo "apps"). </a:t>
+            </a:r>
+          </a:p>
+          <a:p>
+            <a:r>
+              <a:rPr lang="it-IT" b="1" dirty="0">
+                <a:solidFill>
+                  <a:srgbClr val="171FE2"/>
+                </a:solidFill>
+              </a:rPr>
+              <a:t>Con v1 il comando fallirebbe.</a:t>
+            </a:r>
+            <a:endParaRPr lang="it-IT" b="1" dirty="0">
+              <a:solidFill>
+                <a:srgbClr val="171FE2"/>
+              </a:solidFill>
+              <a:latin typeface="Consolas" panose="020B0609020204030204" pitchFamily="49" charset="0"/>
+            </a:endParaRPr>
+          </a:p>
+        </p:txBody>
+      </p:sp>
+      <p:sp>
+        <p:nvSpPr>
+          <p:cNvPr id="4" name="CasellaDiTesto 3">
+            <a:extLst>
+              <a:ext uri="{FF2B5EF4-FFF2-40B4-BE49-F238E27FC236}">
+                <a16:creationId xmlns:a16="http://schemas.microsoft.com/office/drawing/2014/main" id="{EA0D9133-E325-003E-F85D-366239727ECE}"/>
+              </a:ext>
+            </a:extLst>
+          </p:cNvPr>
+          <p:cNvSpPr txBox="1"/>
+          <p:nvPr/>
+        </p:nvSpPr>
+        <p:spPr>
+          <a:xfrm>
+            <a:off x="6757416" y="1357971"/>
+            <a:ext cx="4110421" cy="5355312"/>
+          </a:xfrm>
+          <a:prstGeom prst="rect">
+            <a:avLst/>
+          </a:prstGeom>
+          <a:noFill/>
+        </p:spPr>
+        <p:txBody>
+          <a:bodyPr wrap="none" rtlCol="0">
+            <a:spAutoFit/>
+          </a:bodyPr>
+          <a:lstStyle/>
+          <a:p>
+            <a:r>
+              <a:rPr lang="it-IT" dirty="0" err="1">
+                <a:solidFill>
+                  <a:srgbClr val="FF0000"/>
+                </a:solidFill>
+                <a:latin typeface="Consolas" panose="020B0609020204030204" pitchFamily="49" charset="0"/>
+              </a:rPr>
+              <a:t>apiVersion</a:t>
+            </a:r>
+            <a:r>
+              <a:rPr lang="it-IT" dirty="0">
+                <a:solidFill>
+                  <a:srgbClr val="FF0000"/>
+                </a:solidFill>
+                <a:latin typeface="Consolas" panose="020B0609020204030204" pitchFamily="49" charset="0"/>
+              </a:rPr>
+              <a:t>: apps/v1</a:t>
+            </a:r>
+          </a:p>
+          <a:p>
+            <a:r>
+              <a:rPr lang="it-IT" dirty="0" err="1">
+                <a:solidFill>
+                  <a:srgbClr val="FF0000"/>
+                </a:solidFill>
+                <a:latin typeface="Consolas" panose="020B0609020204030204" pitchFamily="49" charset="0"/>
+              </a:rPr>
+              <a:t>kind</a:t>
+            </a:r>
+            <a:r>
+              <a:rPr lang="it-IT" dirty="0">
+                <a:solidFill>
+                  <a:srgbClr val="FF0000"/>
+                </a:solidFill>
+                <a:latin typeface="Consolas" panose="020B0609020204030204" pitchFamily="49" charset="0"/>
+              </a:rPr>
+              <a:t>: Deployment</a:t>
+            </a:r>
+          </a:p>
+          <a:p>
+            <a:r>
+              <a:rPr lang="it-IT" dirty="0">
+                <a:solidFill>
+                  <a:srgbClr val="FF0000"/>
+                </a:solidFill>
+                <a:latin typeface="Consolas" panose="020B0609020204030204" pitchFamily="49" charset="0"/>
+              </a:rPr>
+              <a:t>metadata:</a:t>
+            </a:r>
+          </a:p>
+          <a:p>
+            <a:r>
+              <a:rPr lang="it-IT" dirty="0">
+                <a:solidFill>
+                  <a:srgbClr val="FF0000"/>
+                </a:solidFill>
+                <a:latin typeface="Consolas" panose="020B0609020204030204" pitchFamily="49" charset="0"/>
+              </a:rPr>
+              <a:t>  name: </a:t>
+            </a:r>
+            <a:r>
+              <a:rPr lang="it-IT" dirty="0" err="1">
+                <a:solidFill>
+                  <a:srgbClr val="FF0000"/>
+                </a:solidFill>
+                <a:latin typeface="Consolas" panose="020B0609020204030204" pitchFamily="49" charset="0"/>
+              </a:rPr>
+              <a:t>backend</a:t>
+            </a:r>
+            <a:r>
+              <a:rPr lang="it-IT" dirty="0">
+                <a:solidFill>
+                  <a:srgbClr val="FF0000"/>
+                </a:solidFill>
+                <a:latin typeface="Consolas" panose="020B0609020204030204" pitchFamily="49" charset="0"/>
+              </a:rPr>
+              <a:t>-deployment</a:t>
+            </a:r>
+          </a:p>
+          <a:p>
+            <a:r>
+              <a:rPr lang="it-IT" dirty="0" err="1">
+                <a:solidFill>
+                  <a:srgbClr val="FF0000"/>
+                </a:solidFill>
+                <a:latin typeface="Consolas" panose="020B0609020204030204" pitchFamily="49" charset="0"/>
+              </a:rPr>
+              <a:t>spec</a:t>
+            </a:r>
+            <a:r>
+              <a:rPr lang="it-IT" dirty="0">
+                <a:solidFill>
+                  <a:srgbClr val="FF0000"/>
+                </a:solidFill>
+                <a:latin typeface="Consolas" panose="020B0609020204030204" pitchFamily="49" charset="0"/>
+              </a:rPr>
+              <a:t>:</a:t>
+            </a:r>
+          </a:p>
+          <a:p>
+            <a:r>
+              <a:rPr lang="it-IT" dirty="0">
+                <a:solidFill>
+                  <a:srgbClr val="FF0000"/>
+                </a:solidFill>
+                <a:latin typeface="Consolas" panose="020B0609020204030204" pitchFamily="49" charset="0"/>
+              </a:rPr>
+              <a:t>  </a:t>
+            </a:r>
+            <a:r>
+              <a:rPr lang="it-IT" dirty="0" err="1">
+                <a:solidFill>
+                  <a:srgbClr val="FF0000"/>
+                </a:solidFill>
+                <a:latin typeface="Consolas" panose="020B0609020204030204" pitchFamily="49" charset="0"/>
+              </a:rPr>
+              <a:t>replicas</a:t>
+            </a:r>
+            <a:r>
+              <a:rPr lang="it-IT" dirty="0">
+                <a:solidFill>
+                  <a:srgbClr val="FF0000"/>
+                </a:solidFill>
+                <a:latin typeface="Consolas" panose="020B0609020204030204" pitchFamily="49" charset="0"/>
+              </a:rPr>
+              <a:t>: 3</a:t>
+            </a:r>
+          </a:p>
+          <a:p>
+            <a:r>
+              <a:rPr lang="it-IT" dirty="0">
+                <a:solidFill>
+                  <a:srgbClr val="FF0000"/>
+                </a:solidFill>
+                <a:latin typeface="Consolas" panose="020B0609020204030204" pitchFamily="49" charset="0"/>
+              </a:rPr>
+              <a:t>  selector:</a:t>
+            </a:r>
+          </a:p>
+          <a:p>
+            <a:r>
+              <a:rPr lang="it-IT" dirty="0">
+                <a:solidFill>
+                  <a:srgbClr val="FF0000"/>
+                </a:solidFill>
+                <a:latin typeface="Consolas" panose="020B0609020204030204" pitchFamily="49" charset="0"/>
+              </a:rPr>
+              <a:t>    </a:t>
+            </a:r>
+            <a:r>
+              <a:rPr lang="it-IT" dirty="0" err="1">
+                <a:solidFill>
+                  <a:srgbClr val="FF0000"/>
+                </a:solidFill>
+                <a:latin typeface="Consolas" panose="020B0609020204030204" pitchFamily="49" charset="0"/>
+              </a:rPr>
+              <a:t>matchLabels</a:t>
+            </a:r>
+            <a:r>
+              <a:rPr lang="it-IT" dirty="0">
+                <a:solidFill>
+                  <a:srgbClr val="FF0000"/>
+                </a:solidFill>
+                <a:latin typeface="Consolas" panose="020B0609020204030204" pitchFamily="49" charset="0"/>
+              </a:rPr>
+              <a:t>:</a:t>
+            </a:r>
+          </a:p>
+          <a:p>
+            <a:r>
+              <a:rPr lang="it-IT" dirty="0">
+                <a:solidFill>
+                  <a:srgbClr val="FF0000"/>
+                </a:solidFill>
+                <a:latin typeface="Consolas" panose="020B0609020204030204" pitchFamily="49" charset="0"/>
+              </a:rPr>
+              <a:t>      app: </a:t>
+            </a:r>
+            <a:r>
+              <a:rPr lang="it-IT" dirty="0" err="1">
+                <a:solidFill>
+                  <a:srgbClr val="FF0000"/>
+                </a:solidFill>
+                <a:latin typeface="Consolas" panose="020B0609020204030204" pitchFamily="49" charset="0"/>
+              </a:rPr>
+              <a:t>backend-enterprise</a:t>
+            </a:r>
+            <a:endParaRPr lang="it-IT" dirty="0">
+              <a:solidFill>
+                <a:srgbClr val="FF0000"/>
+              </a:solidFill>
+              <a:latin typeface="Consolas" panose="020B0609020204030204" pitchFamily="49" charset="0"/>
+            </a:endParaRPr>
+          </a:p>
+          <a:p>
+            <a:r>
+              <a:rPr lang="it-IT" dirty="0">
+                <a:solidFill>
+                  <a:srgbClr val="171FE2"/>
+                </a:solidFill>
+                <a:latin typeface="Consolas" panose="020B0609020204030204" pitchFamily="49" charset="0"/>
+              </a:rPr>
+              <a:t>  template:</a:t>
+            </a:r>
+          </a:p>
+          <a:p>
+            <a:r>
+              <a:rPr lang="it-IT" dirty="0">
+                <a:solidFill>
+                  <a:srgbClr val="171FE2"/>
+                </a:solidFill>
+                <a:latin typeface="Consolas" panose="020B0609020204030204" pitchFamily="49" charset="0"/>
+              </a:rPr>
+              <a:t>    metadata:</a:t>
+            </a:r>
+          </a:p>
+          <a:p>
+            <a:r>
+              <a:rPr lang="it-IT" dirty="0">
+                <a:solidFill>
+                  <a:srgbClr val="171FE2"/>
+                </a:solidFill>
+                <a:latin typeface="Consolas" panose="020B0609020204030204" pitchFamily="49" charset="0"/>
+              </a:rPr>
+              <a:t>      labels:</a:t>
+            </a:r>
+          </a:p>
+          <a:p>
+            <a:r>
+              <a:rPr lang="it-IT" dirty="0">
+                <a:solidFill>
+                  <a:srgbClr val="171FE2"/>
+                </a:solidFill>
+                <a:latin typeface="Consolas" panose="020B0609020204030204" pitchFamily="49" charset="0"/>
+              </a:rPr>
+              <a:t>        app: </a:t>
+            </a:r>
+            <a:r>
+              <a:rPr lang="it-IT" dirty="0" err="1">
+                <a:solidFill>
+                  <a:srgbClr val="171FE2"/>
+                </a:solidFill>
+                <a:latin typeface="Consolas" panose="020B0609020204030204" pitchFamily="49" charset="0"/>
+              </a:rPr>
+              <a:t>backend-enterprise</a:t>
+            </a:r>
+            <a:endParaRPr lang="it-IT" dirty="0">
+              <a:solidFill>
+                <a:srgbClr val="171FE2"/>
+              </a:solidFill>
+              <a:latin typeface="Consolas" panose="020B0609020204030204" pitchFamily="49" charset="0"/>
+            </a:endParaRPr>
+          </a:p>
+          <a:p>
+            <a:r>
+              <a:rPr lang="it-IT" dirty="0">
+                <a:solidFill>
+                  <a:srgbClr val="171FE2"/>
+                </a:solidFill>
+                <a:latin typeface="Consolas" panose="020B0609020204030204" pitchFamily="49" charset="0"/>
+              </a:rPr>
+              <a:t>    </a:t>
+            </a:r>
+            <a:r>
+              <a:rPr lang="it-IT" dirty="0" err="1">
+                <a:solidFill>
+                  <a:srgbClr val="171FE2"/>
+                </a:solidFill>
+                <a:latin typeface="Consolas" panose="020B0609020204030204" pitchFamily="49" charset="0"/>
+              </a:rPr>
+              <a:t>spec</a:t>
+            </a:r>
+            <a:r>
+              <a:rPr lang="it-IT" dirty="0">
+                <a:solidFill>
+                  <a:srgbClr val="171FE2"/>
+                </a:solidFill>
+                <a:latin typeface="Consolas" panose="020B0609020204030204" pitchFamily="49" charset="0"/>
+              </a:rPr>
+              <a:t>:</a:t>
+            </a:r>
+          </a:p>
+          <a:p>
+            <a:r>
+              <a:rPr lang="it-IT" dirty="0">
+                <a:solidFill>
+                  <a:srgbClr val="171FE2"/>
+                </a:solidFill>
+                <a:latin typeface="Consolas" panose="020B0609020204030204" pitchFamily="49" charset="0"/>
+              </a:rPr>
+              <a:t>      containers:</a:t>
+            </a:r>
+          </a:p>
+          <a:p>
+            <a:r>
+              <a:rPr lang="it-IT" dirty="0">
+                <a:solidFill>
+                  <a:srgbClr val="171FE2"/>
+                </a:solidFill>
+                <a:latin typeface="Consolas" panose="020B0609020204030204" pitchFamily="49" charset="0"/>
+              </a:rPr>
+              <a:t>      - name: java-container</a:t>
+            </a:r>
+          </a:p>
+          <a:p>
+            <a:r>
+              <a:rPr lang="it-IT" dirty="0">
+                <a:solidFill>
+                  <a:srgbClr val="171FE2"/>
+                </a:solidFill>
+                <a:latin typeface="Consolas" panose="020B0609020204030204" pitchFamily="49" charset="0"/>
+              </a:rPr>
+              <a:t>        image: </a:t>
+            </a:r>
+            <a:r>
+              <a:rPr lang="it-IT" dirty="0" err="1">
+                <a:solidFill>
+                  <a:srgbClr val="171FE2"/>
+                </a:solidFill>
+                <a:latin typeface="Consolas" panose="020B0609020204030204" pitchFamily="49" charset="0"/>
+              </a:rPr>
+              <a:t>nginx</a:t>
+            </a:r>
+            <a:endParaRPr lang="it-IT" dirty="0">
+              <a:solidFill>
+                <a:srgbClr val="171FE2"/>
+              </a:solidFill>
+              <a:latin typeface="Consolas" panose="020B0609020204030204" pitchFamily="49" charset="0"/>
+            </a:endParaRPr>
+          </a:p>
+          <a:p>
+            <a:r>
+              <a:rPr lang="it-IT" dirty="0">
+                <a:solidFill>
+                  <a:srgbClr val="171FE2"/>
+                </a:solidFill>
+                <a:latin typeface="Consolas" panose="020B0609020204030204" pitchFamily="49" charset="0"/>
+              </a:rPr>
+              <a:t>        ports:</a:t>
+            </a:r>
+          </a:p>
+          <a:p>
+            <a:r>
+              <a:rPr lang="it-IT" dirty="0">
+                <a:solidFill>
+                  <a:srgbClr val="171FE2"/>
+                </a:solidFill>
+                <a:latin typeface="Consolas" panose="020B0609020204030204" pitchFamily="49" charset="0"/>
+              </a:rPr>
+              <a:t>        - </a:t>
+            </a:r>
+            <a:r>
+              <a:rPr lang="it-IT" dirty="0" err="1">
+                <a:solidFill>
+                  <a:srgbClr val="171FE2"/>
+                </a:solidFill>
+                <a:latin typeface="Consolas" panose="020B0609020204030204" pitchFamily="49" charset="0"/>
+              </a:rPr>
+              <a:t>containerPort</a:t>
+            </a:r>
+            <a:r>
+              <a:rPr lang="it-IT" dirty="0">
+                <a:solidFill>
+                  <a:srgbClr val="171FE2"/>
+                </a:solidFill>
+                <a:latin typeface="Consolas" panose="020B0609020204030204" pitchFamily="49" charset="0"/>
+              </a:rPr>
+              <a:t>: 80</a:t>
+            </a:r>
+          </a:p>
+        </p:txBody>
+      </p:sp>
+      <p:pic>
+        <p:nvPicPr>
+          <p:cNvPr id="9" name="Immagine 8">
+            <a:extLst>
+              <a:ext uri="{FF2B5EF4-FFF2-40B4-BE49-F238E27FC236}">
+                <a16:creationId xmlns:a16="http://schemas.microsoft.com/office/drawing/2014/main" id="{FB1A399D-BAB4-4862-41F1-DEAF9C2F4CF0}"/>
+              </a:ext>
+            </a:extLst>
+          </p:cNvPr>
+          <p:cNvPicPr>
+            <a:picLocks noChangeAspect="1"/>
+          </p:cNvPicPr>
+          <p:nvPr/>
+        </p:nvPicPr>
+        <p:blipFill>
+          <a:blip r:embed="rId2">
+            <a:extLst>
+              <a:ext uri="{28A0092B-C50C-407E-A947-70E740481C1C}">
+                <a14:useLocalDpi xmlns:a14="http://schemas.microsoft.com/office/drawing/2010/main" val="0"/>
+              </a:ext>
+            </a:extLst>
+          </a:blip>
+          <a:stretch>
+            <a:fillRect/>
+          </a:stretch>
+        </p:blipFill>
+        <p:spPr>
+          <a:xfrm>
+            <a:off x="1370175" y="3175616"/>
+            <a:ext cx="5151503" cy="742317"/>
+          </a:xfrm>
+          <a:prstGeom prst="rect">
+            <a:avLst/>
+          </a:prstGeom>
+        </p:spPr>
+      </p:pic>
+    </p:spTree>
+    <p:extLst>
+      <p:ext uri="{BB962C8B-B14F-4D97-AF65-F5344CB8AC3E}">
+        <p14:creationId xmlns:p14="http://schemas.microsoft.com/office/powerpoint/2010/main" val="3428366567"/>
+      </p:ext>
+    </p:extLst>
+  </p:cSld>
+  <p:clrMapOvr>
+    <a:masterClrMapping/>
+  </p:clrMapOvr>
+</p:sld>
+</file>
+
+<file path=ppt/slides/slide33.xml><?xml version="1.0" encoding="utf-8"?>
+<p:sld xmlns:a="http://schemas.openxmlformats.org/drawingml/2006/main" xmlns:r="http://schemas.openxmlformats.org/officeDocument/2006/relationships" xmlns:p="http://schemas.openxmlformats.org/presentationml/2006/main">
+  <p:cSld>
+    <p:spTree>
+      <p:nvGrpSpPr>
+        <p:cNvPr id="1" name="">
+          <a:extLst>
+            <a:ext uri="{FF2B5EF4-FFF2-40B4-BE49-F238E27FC236}">
+              <a16:creationId xmlns:a16="http://schemas.microsoft.com/office/drawing/2014/main" id="{D528F478-7120-E65E-9D2C-050DB34A11AC}"/>
+            </a:ext>
+          </a:extLst>
+        </p:cNvPr>
+        <p:cNvGrpSpPr/>
+        <p:nvPr/>
+      </p:nvGrpSpPr>
+      <p:grpSpPr>
+        <a:xfrm>
+          <a:off x="0" y="0"/>
+          <a:ext cx="0" cy="0"/>
+          <a:chOff x="0" y="0"/>
+          <a:chExt cx="0" cy="0"/>
+        </a:xfrm>
+      </p:grpSpPr>
+      <p:sp>
+        <p:nvSpPr>
+          <p:cNvPr id="2" name="Titolo della lezione">
+            <a:extLst>
+              <a:ext uri="{FF2B5EF4-FFF2-40B4-BE49-F238E27FC236}">
+                <a16:creationId xmlns:a16="http://schemas.microsoft.com/office/drawing/2014/main" id="{0C63AE91-72C0-54B4-8BEB-E50D95D86129}"/>
+              </a:ext>
+            </a:extLst>
+          </p:cNvPr>
+          <p:cNvSpPr>
+            <a:spLocks noGrp="1"/>
+          </p:cNvSpPr>
+          <p:nvPr>
+            <p:ph type="title"/>
+          </p:nvPr>
+        </p:nvSpPr>
+        <p:spPr>
+          <a:xfrm>
+            <a:off x="838200" y="831206"/>
+            <a:ext cx="10515600" cy="314198"/>
+          </a:xfrm>
+        </p:spPr>
+        <p:txBody>
+          <a:bodyPr/>
+          <a:lstStyle/>
+          <a:p>
+            <a:r>
+              <a:rPr lang="it-IT" dirty="0"/>
+              <a:t>SLIDE 31: LAB PRACTICAL – TESTARE IL SELF-HEALING (UCCIDERE UN POD E VEDERLO RISORGERE)</a:t>
+            </a:r>
+          </a:p>
+        </p:txBody>
+      </p:sp>
+      <p:sp>
+        <p:nvSpPr>
+          <p:cNvPr id="3" name="Contenuto della lezione">
+            <a:extLst>
+              <a:ext uri="{FF2B5EF4-FFF2-40B4-BE49-F238E27FC236}">
+                <a16:creationId xmlns:a16="http://schemas.microsoft.com/office/drawing/2014/main" id="{2FBD5B30-9F3A-7C0A-8DF2-ABAD122BDA8D}"/>
+              </a:ext>
+            </a:extLst>
+          </p:cNvPr>
+          <p:cNvSpPr>
+            <a:spLocks noGrp="1"/>
+          </p:cNvSpPr>
+          <p:nvPr>
+            <p:ph idx="1"/>
+          </p:nvPr>
+        </p:nvSpPr>
+        <p:spPr>
+          <a:xfrm>
+            <a:off x="1317319" y="1633943"/>
+            <a:ext cx="9557362" cy="4803369"/>
+          </a:xfrm>
+        </p:spPr>
+        <p:txBody>
+          <a:bodyPr/>
+          <a:lstStyle/>
+          <a:p>
+            <a:r>
+              <a:rPr lang="it-IT" dirty="0"/>
+              <a:t>Andremo a simulare un gravissimo incidente sistemistico: faremo la parte del guasto hardware e uccideremo a tradimento uno dei tre </a:t>
+            </a:r>
+            <a:r>
+              <a:rPr lang="it-IT" dirty="0" err="1"/>
+              <a:t>Pod</a:t>
+            </a:r>
+            <a:r>
+              <a:rPr lang="it-IT" dirty="0"/>
+              <a:t> che stanno facendo girare la nostra applicazione aziendale, osservando come reagisce il cluster in totale autonomia.</a:t>
+            </a:r>
+          </a:p>
+          <a:p>
+            <a:r>
+              <a:rPr lang="it-IT" dirty="0"/>
+              <a:t>Da terminale lanciamo nuovamente il comando per elencare i </a:t>
+            </a:r>
+            <a:r>
+              <a:rPr lang="it-IT" dirty="0" err="1"/>
+              <a:t>Pod</a:t>
+            </a:r>
+            <a:r>
+              <a:rPr lang="it-IT" dirty="0"/>
+              <a:t> attivi, prestando attenzione ai nomi dei tre </a:t>
+            </a:r>
+            <a:r>
+              <a:rPr lang="it-IT" dirty="0" err="1"/>
+              <a:t>Pod</a:t>
+            </a:r>
+            <a:r>
+              <a:rPr lang="it-IT" dirty="0"/>
+              <a:t> in tabella: </a:t>
+            </a:r>
+          </a:p>
+          <a:p>
+            <a:r>
+              <a:rPr lang="it-IT" dirty="0" err="1">
+                <a:solidFill>
+                  <a:srgbClr val="171FE2"/>
+                </a:solidFill>
+                <a:latin typeface="Consolas" panose="020B0609020204030204" pitchFamily="49" charset="0"/>
+              </a:rPr>
+              <a:t>kubectl</a:t>
+            </a:r>
+            <a:r>
+              <a:rPr lang="it-IT" dirty="0">
+                <a:solidFill>
+                  <a:srgbClr val="171FE2"/>
+                </a:solidFill>
+                <a:latin typeface="Consolas" panose="020B0609020204030204" pitchFamily="49" charset="0"/>
+              </a:rPr>
+              <a:t> </a:t>
+            </a:r>
+            <a:r>
+              <a:rPr lang="it-IT" dirty="0" err="1">
+                <a:solidFill>
+                  <a:srgbClr val="171FE2"/>
+                </a:solidFill>
+                <a:latin typeface="Consolas" panose="020B0609020204030204" pitchFamily="49" charset="0"/>
+              </a:rPr>
+              <a:t>get</a:t>
+            </a:r>
+            <a:r>
+              <a:rPr lang="it-IT" dirty="0">
+                <a:solidFill>
+                  <a:srgbClr val="171FE2"/>
+                </a:solidFill>
+                <a:latin typeface="Consolas" panose="020B0609020204030204" pitchFamily="49" charset="0"/>
+              </a:rPr>
+              <a:t> </a:t>
+            </a:r>
+            <a:r>
+              <a:rPr lang="it-IT" dirty="0" err="1">
+                <a:solidFill>
+                  <a:srgbClr val="171FE2"/>
+                </a:solidFill>
+                <a:latin typeface="Consolas" panose="020B0609020204030204" pitchFamily="49" charset="0"/>
+              </a:rPr>
+              <a:t>pods</a:t>
+            </a:r>
+            <a:endParaRPr lang="it-IT" dirty="0">
+              <a:solidFill>
+                <a:srgbClr val="171FE2"/>
+              </a:solidFill>
+              <a:latin typeface="Consolas" panose="020B0609020204030204" pitchFamily="49" charset="0"/>
+            </a:endParaRPr>
+          </a:p>
+          <a:p>
+            <a:endParaRPr lang="it-IT" dirty="0">
+              <a:solidFill>
+                <a:srgbClr val="171FE2"/>
+              </a:solidFill>
+              <a:latin typeface="Consolas" panose="020B0609020204030204" pitchFamily="49" charset="0"/>
+            </a:endParaRPr>
+          </a:p>
+          <a:p>
+            <a:endParaRPr lang="it-IT" dirty="0"/>
+          </a:p>
+          <a:p>
+            <a:r>
+              <a:rPr lang="it-IT" dirty="0"/>
+              <a:t>Scegliamo uno qualsiasi dei tre </a:t>
+            </a:r>
+            <a:r>
+              <a:rPr lang="it-IT" dirty="0" err="1"/>
+              <a:t>Pod</a:t>
+            </a:r>
+            <a:r>
+              <a:rPr lang="it-IT" dirty="0"/>
+              <a:t> ed emuliamo il crash del server distruggendolo:</a:t>
+            </a:r>
+          </a:p>
+          <a:p>
+            <a:r>
+              <a:rPr lang="it-IT" dirty="0" err="1">
+                <a:solidFill>
+                  <a:srgbClr val="171FE2"/>
+                </a:solidFill>
+                <a:latin typeface="Consolas" panose="020B0609020204030204" pitchFamily="49" charset="0"/>
+              </a:rPr>
+              <a:t>kubectl</a:t>
+            </a:r>
+            <a:r>
+              <a:rPr lang="it-IT" dirty="0">
+                <a:solidFill>
+                  <a:srgbClr val="171FE2"/>
+                </a:solidFill>
+                <a:latin typeface="Consolas" panose="020B0609020204030204" pitchFamily="49" charset="0"/>
+              </a:rPr>
+              <a:t> delete </a:t>
+            </a:r>
+            <a:r>
+              <a:rPr lang="it-IT" dirty="0" err="1">
+                <a:solidFill>
+                  <a:srgbClr val="171FE2"/>
+                </a:solidFill>
+                <a:latin typeface="Consolas" panose="020B0609020204030204" pitchFamily="49" charset="0"/>
+              </a:rPr>
+              <a:t>pod</a:t>
+            </a:r>
+            <a:r>
+              <a:rPr lang="it-IT" dirty="0">
+                <a:solidFill>
+                  <a:srgbClr val="171FE2"/>
+                </a:solidFill>
+                <a:latin typeface="Consolas" panose="020B0609020204030204" pitchFamily="49" charset="0"/>
+              </a:rPr>
+              <a:t> backend-deployment-57584f9ffc-g5zbd</a:t>
+            </a:r>
+          </a:p>
+          <a:p>
+            <a:r>
+              <a:rPr lang="it-IT" dirty="0"/>
+              <a:t>Subito dopo eseguiamo di nuovo il comando di controllo: </a:t>
+            </a:r>
+            <a:r>
+              <a:rPr lang="it-IT" dirty="0" err="1">
+                <a:solidFill>
+                  <a:srgbClr val="171FE2"/>
+                </a:solidFill>
+                <a:latin typeface="Consolas" panose="020B0609020204030204" pitchFamily="49" charset="0"/>
+              </a:rPr>
+              <a:t>kubectl</a:t>
+            </a:r>
+            <a:r>
+              <a:rPr lang="it-IT" dirty="0">
+                <a:solidFill>
+                  <a:srgbClr val="171FE2"/>
+                </a:solidFill>
+                <a:latin typeface="Consolas" panose="020B0609020204030204" pitchFamily="49" charset="0"/>
+              </a:rPr>
+              <a:t> </a:t>
+            </a:r>
+            <a:r>
+              <a:rPr lang="it-IT" dirty="0" err="1">
+                <a:solidFill>
+                  <a:srgbClr val="171FE2"/>
+                </a:solidFill>
+                <a:latin typeface="Consolas" panose="020B0609020204030204" pitchFamily="49" charset="0"/>
+              </a:rPr>
+              <a:t>get</a:t>
+            </a:r>
+            <a:r>
+              <a:rPr lang="it-IT" dirty="0">
+                <a:solidFill>
+                  <a:srgbClr val="171FE2"/>
+                </a:solidFill>
+                <a:latin typeface="Consolas" panose="020B0609020204030204" pitchFamily="49" charset="0"/>
+              </a:rPr>
+              <a:t> </a:t>
+            </a:r>
+            <a:r>
+              <a:rPr lang="it-IT" dirty="0" err="1">
+                <a:solidFill>
+                  <a:srgbClr val="171FE2"/>
+                </a:solidFill>
+                <a:latin typeface="Consolas" panose="020B0609020204030204" pitchFamily="49" charset="0"/>
+              </a:rPr>
+              <a:t>pods</a:t>
+            </a:r>
+            <a:endParaRPr lang="it-IT" dirty="0">
+              <a:solidFill>
+                <a:srgbClr val="171FE2"/>
+              </a:solidFill>
+              <a:latin typeface="Consolas" panose="020B0609020204030204" pitchFamily="49" charset="0"/>
+            </a:endParaRPr>
+          </a:p>
+          <a:p>
+            <a:r>
+              <a:rPr lang="it-IT" dirty="0"/>
+              <a:t>Il </a:t>
+            </a:r>
+            <a:r>
+              <a:rPr lang="it-IT" dirty="0" err="1"/>
+              <a:t>Pod</a:t>
+            </a:r>
+            <a:r>
+              <a:rPr lang="it-IT" dirty="0"/>
+              <a:t> eliminato è nello stato </a:t>
+            </a:r>
+            <a:r>
+              <a:rPr lang="it-IT" i="1" dirty="0" err="1"/>
+              <a:t>Terminating</a:t>
+            </a:r>
+            <a:r>
+              <a:rPr lang="it-IT" dirty="0"/>
+              <a:t> (sta morendo), ma subito sotto è comparso un quarto </a:t>
+            </a:r>
+            <a:r>
+              <a:rPr lang="it-IT" dirty="0" err="1"/>
+              <a:t>Pod</a:t>
+            </a:r>
+            <a:r>
+              <a:rPr lang="it-IT" dirty="0"/>
+              <a:t>, con un codice finale diverso, in stato </a:t>
+            </a:r>
+            <a:r>
+              <a:rPr lang="it-IT" i="1" dirty="0" err="1"/>
+              <a:t>ContainerCreating</a:t>
+            </a:r>
+            <a:r>
+              <a:rPr lang="it-IT" dirty="0"/>
+              <a:t> o </a:t>
+            </a:r>
+            <a:r>
+              <a:rPr lang="it-IT" i="1" dirty="0"/>
+              <a:t>Running</a:t>
+            </a:r>
+            <a:r>
+              <a:rPr lang="it-IT" dirty="0"/>
+              <a:t>. </a:t>
+            </a:r>
+          </a:p>
+          <a:p>
+            <a:r>
+              <a:rPr lang="it-IT" dirty="0"/>
+              <a:t>Il numero totale di </a:t>
+            </a:r>
+            <a:r>
+              <a:rPr lang="it-IT" dirty="0" err="1"/>
+              <a:t>Pod</a:t>
+            </a:r>
+            <a:r>
+              <a:rPr lang="it-IT" dirty="0"/>
+              <a:t> attivi è rimasto rigorosamente </a:t>
+            </a:r>
+            <a:r>
+              <a:rPr lang="it-IT" b="1" dirty="0"/>
+              <a:t>3</a:t>
+            </a:r>
+            <a:r>
+              <a:rPr lang="it-IT" dirty="0"/>
+              <a:t>. </a:t>
+            </a:r>
+          </a:p>
+          <a:p>
+            <a:r>
+              <a:rPr lang="it-IT" dirty="0">
+                <a:solidFill>
+                  <a:srgbClr val="171FE2"/>
+                </a:solidFill>
+              </a:rPr>
+              <a:t>L'applicazione non è andata offline nemmeno per un millisecondo. Questo è il potere del Self-</a:t>
+            </a:r>
+            <a:r>
+              <a:rPr lang="it-IT" dirty="0" err="1">
+                <a:solidFill>
+                  <a:srgbClr val="171FE2"/>
+                </a:solidFill>
+              </a:rPr>
+              <a:t>Healing</a:t>
+            </a:r>
+            <a:r>
+              <a:rPr lang="it-IT" dirty="0">
+                <a:solidFill>
+                  <a:srgbClr val="171FE2"/>
+                </a:solidFill>
+              </a:rPr>
+              <a:t> di </a:t>
+            </a:r>
+            <a:r>
+              <a:rPr lang="it-IT" dirty="0" err="1">
+                <a:solidFill>
+                  <a:srgbClr val="171FE2"/>
+                </a:solidFill>
+              </a:rPr>
+              <a:t>Kubernetes</a:t>
+            </a:r>
+            <a:r>
+              <a:rPr lang="it-IT" dirty="0">
+                <a:solidFill>
+                  <a:srgbClr val="171FE2"/>
+                </a:solidFill>
+              </a:rPr>
+              <a:t>.</a:t>
+            </a:r>
+            <a:endParaRPr lang="it-IT" dirty="0">
+              <a:solidFill>
+                <a:srgbClr val="171FE2"/>
+              </a:solidFill>
+              <a:latin typeface="Consolas" panose="020B0609020204030204" pitchFamily="49" charset="0"/>
+            </a:endParaRPr>
+          </a:p>
+        </p:txBody>
+      </p:sp>
+      <p:pic>
+        <p:nvPicPr>
+          <p:cNvPr id="4" name="Immagine 3">
+            <a:extLst>
+              <a:ext uri="{FF2B5EF4-FFF2-40B4-BE49-F238E27FC236}">
+                <a16:creationId xmlns:a16="http://schemas.microsoft.com/office/drawing/2014/main" id="{599166C6-4FA9-AC11-E2E3-173BB4ACBD01}"/>
+              </a:ext>
+            </a:extLst>
+          </p:cNvPr>
+          <p:cNvPicPr>
+            <a:picLocks noChangeAspect="1"/>
+          </p:cNvPicPr>
+          <p:nvPr/>
+        </p:nvPicPr>
+        <p:blipFill>
+          <a:blip r:embed="rId2">
+            <a:extLst>
+              <a:ext uri="{28A0092B-C50C-407E-A947-70E740481C1C}">
+                <a14:useLocalDpi xmlns:a14="http://schemas.microsoft.com/office/drawing/2010/main" val="0"/>
+              </a:ext>
+            </a:extLst>
+          </a:blip>
+          <a:stretch>
+            <a:fillRect/>
+          </a:stretch>
+        </p:blipFill>
+        <p:spPr>
+          <a:xfrm>
+            <a:off x="3722191" y="3293310"/>
+            <a:ext cx="5151503" cy="742317"/>
+          </a:xfrm>
+          <a:prstGeom prst="rect">
+            <a:avLst/>
+          </a:prstGeom>
+        </p:spPr>
+      </p:pic>
+    </p:spTree>
+    <p:extLst>
+      <p:ext uri="{BB962C8B-B14F-4D97-AF65-F5344CB8AC3E}">
+        <p14:creationId xmlns:p14="http://schemas.microsoft.com/office/powerpoint/2010/main" val="4033776075"/>
+      </p:ext>
+    </p:extLst>
+  </p:cSld>
+  <p:clrMapOvr>
+    <a:masterClrMapping/>
+  </p:clrMapOvr>
+</p:sld>
+</file>
+
+<file path=ppt/slides/slide34.xml><?xml version="1.0" encoding="utf-8"?>
+<p:sld xmlns:a="http://schemas.openxmlformats.org/drawingml/2006/main" xmlns:r="http://schemas.openxmlformats.org/officeDocument/2006/relationships" xmlns:p="http://schemas.openxmlformats.org/presentationml/2006/main">
+  <p:cSld>
+    <p:spTree>
+      <p:nvGrpSpPr>
+        <p:cNvPr id="1" name=""/>
+        <p:cNvGrpSpPr/>
+        <p:nvPr/>
+      </p:nvGrpSpPr>
+      <p:grpSpPr>
+        <a:xfrm>
+          <a:off x="0" y="0"/>
+          <a:ext cx="0" cy="0"/>
+          <a:chOff x="0" y="0"/>
+          <a:chExt cx="0" cy="0"/>
+        </a:xfrm>
+      </p:grpSpPr>
+      <p:sp>
+        <p:nvSpPr>
+          <p:cNvPr id="2" name="Titolo 1">
+            <a:extLst>
+              <a:ext uri="{FF2B5EF4-FFF2-40B4-BE49-F238E27FC236}">
+                <a16:creationId xmlns:a16="http://schemas.microsoft.com/office/drawing/2014/main" id="{B5E02355-4941-9C10-CA1D-649F04DB5143}"/>
+              </a:ext>
+            </a:extLst>
+          </p:cNvPr>
+          <p:cNvSpPr>
+            <a:spLocks noGrp="1"/>
+          </p:cNvSpPr>
+          <p:nvPr>
+            <p:ph type="title"/>
+          </p:nvPr>
+        </p:nvSpPr>
+        <p:spPr/>
+        <p:txBody>
+          <a:bodyPr/>
+          <a:lstStyle/>
+          <a:p>
+            <a:r>
+              <a:rPr lang="it-IT" spc="0" dirty="0">
+                <a:latin typeface="Neue Haas Grotesk Text Pro" panose="020B0504020202020204" pitchFamily="34" charset="0"/>
+              </a:rPr>
+              <a:t>GRAZIE PER L’ATTENZIONE</a:t>
+            </a:r>
+          </a:p>
+        </p:txBody>
+      </p:sp>
+    </p:spTree>
+    <p:extLst>
+      <p:ext uri="{BB962C8B-B14F-4D97-AF65-F5344CB8AC3E}">
+        <p14:creationId xmlns:p14="http://schemas.microsoft.com/office/powerpoint/2010/main" val="3003246572"/>
       </p:ext>
     </p:extLst>
   </p:cSld>
@@ -10219,6 +14618,18 @@
 </file>
 
 <file path=customXml/item2.xml><?xml version="1.0" encoding="utf-8"?>
+<p:properties xmlns:p="http://schemas.microsoft.com/office/2006/metadata/properties" xmlns:xsi="http://www.w3.org/2001/XMLSchema-instance" xmlns:pc="http://schemas.microsoft.com/office/infopath/2007/PartnerControls">
+  <documentManagement>
+    <TaxCatchAll xmlns="21b72fd8-e7d0-49ac-9795-d1b0bc6b7e1c" xsi:nil="true"/>
+    <lcf76f155ced4ddcb4097134ff3c332f xmlns="8b3acf13-3a58-43b2-a29e-f23503de136d">
+      <Terms xmlns="http://schemas.microsoft.com/office/infopath/2007/PartnerControls"/>
+    </lcf76f155ced4ddcb4097134ff3c332f>
+    <Argomento xmlns="8b3acf13-3a58-43b2-a29e-f23503de136d" xsi:nil="true"/>
+  </documentManagement>
+</p:properties>
+</file>
+
+<file path=customXml/item3.xml><?xml version="1.0" encoding="utf-8"?>
 <ct:contentTypeSchema xmlns:ct="http://schemas.microsoft.com/office/2006/metadata/contentType" xmlns:ma="http://schemas.microsoft.com/office/2006/metadata/properties/metaAttributes" ct:_="" ma:_="" ma:contentTypeName="Document" ma:contentTypeID="0x010100D3455C6CD0B9BF4DB2CA3009677D9668" ma:contentTypeVersion="17" ma:contentTypeDescription="Create a new document." ma:contentTypeScope="" ma:versionID="6361f2605a906a42d9630ca59d277a8b">
   <xsd:schema xmlns:xsd="http://www.w3.org/2001/XMLSchema" xmlns:xs="http://www.w3.org/2001/XMLSchema" xmlns:p="http://schemas.microsoft.com/office/2006/metadata/properties" xmlns:ns2="8b3acf13-3a58-43b2-a29e-f23503de136d" xmlns:ns3="21b72fd8-e7d0-49ac-9795-d1b0bc6b7e1c" targetNamespace="http://schemas.microsoft.com/office/2006/metadata/properties" ma:root="true" ma:fieldsID="ae4eb9e2c998b5efed80ec6126f835fa" ns2:_="" ns3:_="">
     <xsd:import namespace="8b3acf13-3a58-43b2-a29e-f23503de136d"/>
@@ -10469,18 +14880,6 @@
 </ct:contentTypeSchema>
 </file>
 
-<file path=customXml/item3.xml><?xml version="1.0" encoding="utf-8"?>
-<p:properties xmlns:p="http://schemas.microsoft.com/office/2006/metadata/properties" xmlns:xsi="http://www.w3.org/2001/XMLSchema-instance" xmlns:pc="http://schemas.microsoft.com/office/infopath/2007/PartnerControls">
-  <documentManagement>
-    <TaxCatchAll xmlns="21b72fd8-e7d0-49ac-9795-d1b0bc6b7e1c" xsi:nil="true"/>
-    <lcf76f155ced4ddcb4097134ff3c332f xmlns="8b3acf13-3a58-43b2-a29e-f23503de136d">
-      <Terms xmlns="http://schemas.microsoft.com/office/infopath/2007/PartnerControls"/>
-    </lcf76f155ced4ddcb4097134ff3c332f>
-    <Argomento xmlns="8b3acf13-3a58-43b2-a29e-f23503de136d" xsi:nil="true"/>
-  </documentManagement>
-</p:properties>
-</file>
-
 <file path=customXml/itemProps1.xml><?xml version="1.0" encoding="utf-8"?>
 <ds:datastoreItem xmlns:ds="http://schemas.openxmlformats.org/officeDocument/2006/customXml" ds:itemID="{67C65656-B2D8-4C19-A873-091B25A5212E}">
   <ds:schemaRefs>
@@ -10490,6 +14889,17 @@
 </file>
 
 <file path=customXml/itemProps2.xml><?xml version="1.0" encoding="utf-8"?>
+<ds:datastoreItem xmlns:ds="http://schemas.openxmlformats.org/officeDocument/2006/customXml" ds:itemID="{6766878A-54ED-4867-B478-72A29DC19B89}">
+  <ds:schemaRefs>
+    <ds:schemaRef ds:uri="http://schemas.microsoft.com/office/2006/metadata/properties"/>
+    <ds:schemaRef ds:uri="http://schemas.microsoft.com/office/infopath/2007/PartnerControls"/>
+    <ds:schemaRef ds:uri="21b72fd8-e7d0-49ac-9795-d1b0bc6b7e1c"/>
+    <ds:schemaRef ds:uri="8b3acf13-3a58-43b2-a29e-f23503de136d"/>
+  </ds:schemaRefs>
+</ds:datastoreItem>
+</file>
+
+<file path=customXml/itemProps3.xml><?xml version="1.0" encoding="utf-8"?>
 <ds:datastoreItem xmlns:ds="http://schemas.openxmlformats.org/officeDocument/2006/customXml" ds:itemID="{70468F63-B318-4D5F-A1DF-86BE98AC2293}">
   <ds:schemaRefs>
     <ds:schemaRef ds:uri="http://schemas.microsoft.com/office/2006/metadata/contentType"/>
@@ -10506,15 +14916,4 @@
     <ds:schemaRef ds:uri="http://schemas.microsoft.com/internal/obd"/>
   </ds:schemaRefs>
 </ds:datastoreItem>
-</file>
-
-<file path=customXml/itemProps3.xml><?xml version="1.0" encoding="utf-8"?>
-<ds:datastoreItem xmlns:ds="http://schemas.openxmlformats.org/officeDocument/2006/customXml" ds:itemID="{6766878A-54ED-4867-B478-72A29DC19B89}">
-  <ds:schemaRefs>
-    <ds:schemaRef ds:uri="http://schemas.microsoft.com/office/2006/metadata/properties"/>
-    <ds:schemaRef ds:uri="http://schemas.microsoft.com/office/infopath/2007/PartnerControls"/>
-    <ds:schemaRef ds:uri="21b72fd8-e7d0-49ac-9795-d1b0bc6b7e1c"/>
-    <ds:schemaRef ds:uri="8b3acf13-3a58-43b2-a29e-f23503de136d"/>
-  </ds:schemaRefs>
-</ds:datastoreItem>
 </file>